--- a/PPTs/Ch4_ARM_Arithmetic_Logic_Exercises_ANS.pptx
+++ b/PPTs/Ch4_ARM_Arithmetic_Logic_Exercises_ANS.pptx
@@ -5,7 +5,7 @@
     <p:sldMasterId id="2147483660" r:id="rId1"/>
   </p:sldMasterIdLst>
   <p:notesMasterIdLst>
-    <p:notesMasterId r:id="rId53"/>
+    <p:notesMasterId r:id="rId52"/>
   </p:notesMasterIdLst>
   <p:sldIdLst>
     <p:sldId id="256" r:id="rId2"/>
@@ -27,38 +27,37 @@
     <p:sldId id="258" r:id="rId18"/>
     <p:sldId id="259" r:id="rId19"/>
     <p:sldId id="260" r:id="rId20"/>
-    <p:sldId id="262" r:id="rId21"/>
-    <p:sldId id="261" r:id="rId22"/>
-    <p:sldId id="352" r:id="rId23"/>
-    <p:sldId id="353" r:id="rId24"/>
-    <p:sldId id="560" r:id="rId25"/>
-    <p:sldId id="592" r:id="rId26"/>
-    <p:sldId id="562" r:id="rId27"/>
-    <p:sldId id="561" r:id="rId28"/>
-    <p:sldId id="593" r:id="rId29"/>
-    <p:sldId id="568" r:id="rId30"/>
-    <p:sldId id="570" r:id="rId31"/>
-    <p:sldId id="571" r:id="rId32"/>
-    <p:sldId id="572" r:id="rId33"/>
-    <p:sldId id="574" r:id="rId34"/>
-    <p:sldId id="573" r:id="rId35"/>
-    <p:sldId id="579" r:id="rId36"/>
-    <p:sldId id="582" r:id="rId37"/>
-    <p:sldId id="580" r:id="rId38"/>
-    <p:sldId id="354" r:id="rId39"/>
-    <p:sldId id="356" r:id="rId40"/>
-    <p:sldId id="357" r:id="rId41"/>
-    <p:sldId id="358" r:id="rId42"/>
-    <p:sldId id="384" r:id="rId43"/>
-    <p:sldId id="385" r:id="rId44"/>
-    <p:sldId id="387" r:id="rId45"/>
-    <p:sldId id="589" r:id="rId46"/>
-    <p:sldId id="591" r:id="rId47"/>
-    <p:sldId id="590" r:id="rId48"/>
-    <p:sldId id="587" r:id="rId49"/>
-    <p:sldId id="583" r:id="rId50"/>
-    <p:sldId id="585" r:id="rId51"/>
-    <p:sldId id="586" r:id="rId52"/>
+    <p:sldId id="261" r:id="rId21"/>
+    <p:sldId id="352" r:id="rId22"/>
+    <p:sldId id="353" r:id="rId23"/>
+    <p:sldId id="560" r:id="rId24"/>
+    <p:sldId id="592" r:id="rId25"/>
+    <p:sldId id="562" r:id="rId26"/>
+    <p:sldId id="561" r:id="rId27"/>
+    <p:sldId id="593" r:id="rId28"/>
+    <p:sldId id="568" r:id="rId29"/>
+    <p:sldId id="570" r:id="rId30"/>
+    <p:sldId id="571" r:id="rId31"/>
+    <p:sldId id="572" r:id="rId32"/>
+    <p:sldId id="574" r:id="rId33"/>
+    <p:sldId id="573" r:id="rId34"/>
+    <p:sldId id="579" r:id="rId35"/>
+    <p:sldId id="582" r:id="rId36"/>
+    <p:sldId id="580" r:id="rId37"/>
+    <p:sldId id="354" r:id="rId38"/>
+    <p:sldId id="356" r:id="rId39"/>
+    <p:sldId id="357" r:id="rId40"/>
+    <p:sldId id="358" r:id="rId41"/>
+    <p:sldId id="384" r:id="rId42"/>
+    <p:sldId id="385" r:id="rId43"/>
+    <p:sldId id="387" r:id="rId44"/>
+    <p:sldId id="589" r:id="rId45"/>
+    <p:sldId id="591" r:id="rId46"/>
+    <p:sldId id="590" r:id="rId47"/>
+    <p:sldId id="587" r:id="rId48"/>
+    <p:sldId id="583" r:id="rId49"/>
+    <p:sldId id="585" r:id="rId50"/>
+    <p:sldId id="586" r:id="rId51"/>
   </p:sldIdLst>
   <p:sldSz cx="9144000" cy="6858000" type="screen4x3"/>
   <p:notesSz cx="7010400" cy="9296400"/>
@@ -179,7 +178,7 @@
 <file path=ppt/revisionInfo.xml><?xml version="1.0" encoding="utf-8"?>
 <p1510:revInfo xmlns:a="http://schemas.openxmlformats.org/drawingml/2006/main" xmlns:r="http://schemas.openxmlformats.org/officeDocument/2006/relationships" xmlns:p1510="http://schemas.microsoft.com/office/powerpoint/2015/10/main">
   <p1510:revLst>
-    <p1510:client id="{949F66C0-3357-40C2-B5B1-DCDAC1289C61}" v="70" dt="2025-10-25T23:40:54.265"/>
+    <p1510:client id="{3EA26A7C-643B-4FA3-9A12-084F4CC1FB31}" v="8" dt="2026-02-26T16:03:57.148"/>
   </p1510:revLst>
 </p1510:revInfo>
 </file>
@@ -189,805 +188,59 @@
   <pc:docChgLst>
     <pc:chgData name="Zonghua Gu" userId="9a7e1853e1951ef5" providerId="LiveId" clId="{CF1FAA12-072C-4ED5-BA76-0FFFAEFDB88A}"/>
     <pc:docChg chg="undo redo custSel addSld delSld modSld sldOrd modNotesMaster">
-      <pc:chgData name="Zonghua Gu" userId="9a7e1853e1951ef5" providerId="LiveId" clId="{CF1FAA12-072C-4ED5-BA76-0FFFAEFDB88A}" dt="2025-10-26T17:14:17.918" v="5949" actId="20577"/>
+      <pc:chgData name="Zonghua Gu" userId="9a7e1853e1951ef5" providerId="LiveId" clId="{CF1FAA12-072C-4ED5-BA76-0FFFAEFDB88A}" dt="2026-02-26T16:09:54.631" v="6121" actId="47"/>
       <pc:docMkLst>
         <pc:docMk/>
       </pc:docMkLst>
-      <pc:sldChg chg="modSp add mod">
-        <pc:chgData name="Zonghua Gu" userId="9a7e1853e1951ef5" providerId="LiveId" clId="{CF1FAA12-072C-4ED5-BA76-0FFFAEFDB88A}" dt="2025-10-16T22:18:35.499" v="4996" actId="20577"/>
+      <pc:sldChg chg="modSp mod">
+        <pc:chgData name="Zonghua Gu" userId="9a7e1853e1951ef5" providerId="LiveId" clId="{CF1FAA12-072C-4ED5-BA76-0FFFAEFDB88A}" dt="2026-02-26T16:04:15.959" v="6120" actId="20577"/>
         <pc:sldMkLst>
           <pc:docMk/>
-          <pc:sldMk cId="3148296310" sldId="258"/>
+          <pc:sldMk cId="2350803268" sldId="259"/>
         </pc:sldMkLst>
         <pc:spChg chg="mod">
-          <ac:chgData name="Zonghua Gu" userId="9a7e1853e1951ef5" providerId="LiveId" clId="{CF1FAA12-072C-4ED5-BA76-0FFFAEFDB88A}" dt="2025-10-16T22:18:35.499" v="4996" actId="20577"/>
+          <ac:chgData name="Zonghua Gu" userId="9a7e1853e1951ef5" providerId="LiveId" clId="{CF1FAA12-072C-4ED5-BA76-0FFFAEFDB88A}" dt="2026-02-26T16:04:15.959" v="6120" actId="20577"/>
           <ac:spMkLst>
             <pc:docMk/>
-            <pc:sldMk cId="3148296310" sldId="258"/>
-            <ac:spMk id="4" creationId="{53E5C410-5B5B-9673-EACF-102D341F6238}"/>
+            <pc:sldMk cId="2350803268" sldId="259"/>
+            <ac:spMk id="4" creationId="{BA07637E-01BA-8126-601A-84479B0807A3}"/>
           </ac:spMkLst>
         </pc:spChg>
       </pc:sldChg>
-      <pc:sldChg chg="add">
-        <pc:chgData name="Zonghua Gu" userId="9a7e1853e1951ef5" providerId="LiveId" clId="{CF1FAA12-072C-4ED5-BA76-0FFFAEFDB88A}" dt="2025-10-09T21:56:54.308" v="4346"/>
+      <pc:sldChg chg="modSp mod">
+        <pc:chgData name="Zonghua Gu" userId="9a7e1853e1951ef5" providerId="LiveId" clId="{CF1FAA12-072C-4ED5-BA76-0FFFAEFDB88A}" dt="2026-02-26T16:02:53.668" v="6113"/>
         <pc:sldMkLst>
           <pc:docMk/>
-          <pc:sldMk cId="3279631536" sldId="351"/>
+          <pc:sldMk cId="3642733396" sldId="260"/>
         </pc:sldMkLst>
-      </pc:sldChg>
-      <pc:sldChg chg="addSp delSp modSp new mod">
-        <pc:chgData name="Zonghua Gu" userId="9a7e1853e1951ef5" providerId="LiveId" clId="{CF1FAA12-072C-4ED5-BA76-0FFFAEFDB88A}" dt="2025-10-16T23:50:46.662" v="5760" actId="20577"/>
-        <pc:sldMkLst>
-          <pc:docMk/>
-          <pc:sldMk cId="2291445225" sldId="354"/>
-        </pc:sldMkLst>
-        <pc:spChg chg="add mod">
-          <ac:chgData name="Zonghua Gu" userId="9a7e1853e1951ef5" providerId="LiveId" clId="{CF1FAA12-072C-4ED5-BA76-0FFFAEFDB88A}" dt="2025-10-16T23:50:46.662" v="5760" actId="20577"/>
+        <pc:spChg chg="mod">
+          <ac:chgData name="Zonghua Gu" userId="9a7e1853e1951ef5" providerId="LiveId" clId="{CF1FAA12-072C-4ED5-BA76-0FFFAEFDB88A}" dt="2026-02-26T16:02:53.668" v="6113"/>
           <ac:spMkLst>
             <pc:docMk/>
-            <pc:sldMk cId="2291445225" sldId="354"/>
-            <ac:spMk id="7" creationId="{BCB598EB-3D73-A532-9DE0-CBC965E702FA}"/>
+            <pc:sldMk cId="3642733396" sldId="260"/>
+            <ac:spMk id="4" creationId="{0FB0DF07-A9DB-A45E-E865-E3DA1A2E9A18}"/>
           </ac:spMkLst>
         </pc:spChg>
       </pc:sldChg>
-      <pc:sldChg chg="addSp delSp modSp add mod">
-        <pc:chgData name="Zonghua Gu" userId="9a7e1853e1951ef5" providerId="LiveId" clId="{CF1FAA12-072C-4ED5-BA76-0FFFAEFDB88A}" dt="2025-10-26T17:14:17.918" v="5949" actId="20577"/>
+      <pc:sldChg chg="del">
+        <pc:chgData name="Zonghua Gu" userId="9a7e1853e1951ef5" providerId="LiveId" clId="{CF1FAA12-072C-4ED5-BA76-0FFFAEFDB88A}" dt="2026-02-26T16:09:54.631" v="6121" actId="47"/>
         <pc:sldMkLst>
           <pc:docMk/>
-          <pc:sldMk cId="3592227053" sldId="356"/>
-        </pc:sldMkLst>
-        <pc:spChg chg="mod">
-          <ac:chgData name="Zonghua Gu" userId="9a7e1853e1951ef5" providerId="LiveId" clId="{CF1FAA12-072C-4ED5-BA76-0FFFAEFDB88A}" dt="2025-10-16T23:22:01.678" v="5566" actId="404"/>
-          <ac:spMkLst>
-            <pc:docMk/>
-            <pc:sldMk cId="3592227053" sldId="356"/>
-            <ac:spMk id="4" creationId="{2D018A86-8DB2-795C-FF88-161C2A00B316}"/>
-          </ac:spMkLst>
-        </pc:spChg>
-        <pc:spChg chg="add mod">
-          <ac:chgData name="Zonghua Gu" userId="9a7e1853e1951ef5" providerId="LiveId" clId="{CF1FAA12-072C-4ED5-BA76-0FFFAEFDB88A}" dt="2025-10-26T17:14:17.918" v="5949" actId="20577"/>
-          <ac:spMkLst>
-            <pc:docMk/>
-            <pc:sldMk cId="3592227053" sldId="356"/>
-            <ac:spMk id="5" creationId="{FA200113-936A-759C-DAEA-A0CA7E874220}"/>
-          </ac:spMkLst>
-        </pc:spChg>
-        <pc:spChg chg="mod">
-          <ac:chgData name="Zonghua Gu" userId="9a7e1853e1951ef5" providerId="LiveId" clId="{CF1FAA12-072C-4ED5-BA76-0FFFAEFDB88A}" dt="2025-10-16T23:50:40.281" v="5758" actId="6549"/>
-          <ac:spMkLst>
-            <pc:docMk/>
-            <pc:sldMk cId="3592227053" sldId="356"/>
-            <ac:spMk id="7" creationId="{024CB201-5D7D-1A95-A3C5-0B501ADFE4ED}"/>
-          </ac:spMkLst>
-        </pc:spChg>
-      </pc:sldChg>
-      <pc:sldChg chg="addSp delSp modSp new mod">
-        <pc:chgData name="Zonghua Gu" userId="9a7e1853e1951ef5" providerId="LiveId" clId="{CF1FAA12-072C-4ED5-BA76-0FFFAEFDB88A}" dt="2025-10-16T23:20:39.970" v="5533" actId="1076"/>
-        <pc:sldMkLst>
-          <pc:docMk/>
-          <pc:sldMk cId="1401545001" sldId="357"/>
-        </pc:sldMkLst>
-        <pc:spChg chg="add mod">
-          <ac:chgData name="Zonghua Gu" userId="9a7e1853e1951ef5" providerId="LiveId" clId="{CF1FAA12-072C-4ED5-BA76-0FFFAEFDB88A}" dt="2025-10-16T23:20:37.088" v="5532" actId="404"/>
-          <ac:spMkLst>
-            <pc:docMk/>
-            <pc:sldMk cId="1401545001" sldId="357"/>
-            <ac:spMk id="7" creationId="{B21BD5E1-8C43-5CBF-BEB4-B430BDD4D73C}"/>
-          </ac:spMkLst>
-        </pc:spChg>
-        <pc:spChg chg="add mod">
-          <ac:chgData name="Zonghua Gu" userId="9a7e1853e1951ef5" providerId="LiveId" clId="{CF1FAA12-072C-4ED5-BA76-0FFFAEFDB88A}" dt="2025-10-16T23:20:39.970" v="5533" actId="1076"/>
-          <ac:spMkLst>
-            <pc:docMk/>
-            <pc:sldMk cId="1401545001" sldId="357"/>
-            <ac:spMk id="8" creationId="{D43F8B0C-9B9C-5AAA-26B5-003AE580EB61}"/>
-          </ac:spMkLst>
-        </pc:spChg>
-      </pc:sldChg>
-      <pc:sldChg chg="addSp modSp add mod">
-        <pc:chgData name="Zonghua Gu" userId="9a7e1853e1951ef5" providerId="LiveId" clId="{CF1FAA12-072C-4ED5-BA76-0FFFAEFDB88A}" dt="2025-10-26T17:13:19.938" v="5945" actId="20577"/>
-        <pc:sldMkLst>
-          <pc:docMk/>
-          <pc:sldMk cId="1087692432" sldId="358"/>
-        </pc:sldMkLst>
-        <pc:spChg chg="add mod">
-          <ac:chgData name="Zonghua Gu" userId="9a7e1853e1951ef5" providerId="LiveId" clId="{CF1FAA12-072C-4ED5-BA76-0FFFAEFDB88A}" dt="2025-10-26T17:13:19.938" v="5945" actId="20577"/>
-          <ac:spMkLst>
-            <pc:docMk/>
-            <pc:sldMk cId="1087692432" sldId="358"/>
-            <ac:spMk id="4" creationId="{72C864CC-AEF5-15FA-F8F8-33E8C3B92231}"/>
-          </ac:spMkLst>
-        </pc:spChg>
-        <pc:spChg chg="mod">
-          <ac:chgData name="Zonghua Gu" userId="9a7e1853e1951ef5" providerId="LiveId" clId="{CF1FAA12-072C-4ED5-BA76-0FFFAEFDB88A}" dt="2025-10-16T23:19:43.615" v="5518" actId="404"/>
-          <ac:spMkLst>
-            <pc:docMk/>
-            <pc:sldMk cId="1087692432" sldId="358"/>
-            <ac:spMk id="7" creationId="{7B3059B3-E7CA-6A88-ECC8-ADFF4594B569}"/>
-          </ac:spMkLst>
-        </pc:spChg>
-        <pc:spChg chg="mod">
-          <ac:chgData name="Zonghua Gu" userId="9a7e1853e1951ef5" providerId="LiveId" clId="{CF1FAA12-072C-4ED5-BA76-0FFFAEFDB88A}" dt="2025-10-16T23:19:53.729" v="5519" actId="1076"/>
-          <ac:spMkLst>
-            <pc:docMk/>
-            <pc:sldMk cId="1087692432" sldId="358"/>
-            <ac:spMk id="8" creationId="{63728C00-95CC-7E30-18AF-775A46A3C6BF}"/>
-          </ac:spMkLst>
-        </pc:spChg>
-      </pc:sldChg>
-      <pc:sldChg chg="addSp delSp modSp add mod modNotes">
-        <pc:chgData name="Zonghua Gu" userId="9a7e1853e1951ef5" providerId="LiveId" clId="{CF1FAA12-072C-4ED5-BA76-0FFFAEFDB88A}" dt="2025-10-16T23:21:29.466" v="5557" actId="20577"/>
-        <pc:sldMkLst>
-          <pc:docMk/>
-          <pc:sldMk cId="1456166100" sldId="384"/>
-        </pc:sldMkLst>
-        <pc:spChg chg="mod">
-          <ac:chgData name="Zonghua Gu" userId="9a7e1853e1951ef5" providerId="LiveId" clId="{CF1FAA12-072C-4ED5-BA76-0FFFAEFDB88A}" dt="2025-10-16T23:21:29.466" v="5557" actId="20577"/>
-          <ac:spMkLst>
-            <pc:docMk/>
-            <pc:sldMk cId="1456166100" sldId="384"/>
-            <ac:spMk id="4" creationId="{FD21DA5F-0B0C-5E4B-FFBA-4A8692F7A975}"/>
-          </ac:spMkLst>
-        </pc:spChg>
-        <pc:graphicFrameChg chg="add mod">
-          <ac:chgData name="Zonghua Gu" userId="9a7e1853e1951ef5" providerId="LiveId" clId="{CF1FAA12-072C-4ED5-BA76-0FFFAEFDB88A}" dt="2025-10-08T01:01:39.844" v="3961"/>
-          <ac:graphicFrameMkLst>
-            <pc:docMk/>
-            <pc:sldMk cId="1456166100" sldId="384"/>
-            <ac:graphicFrameMk id="6" creationId="{F6C027E4-0F54-2503-6E54-155E1BC92737}"/>
-          </ac:graphicFrameMkLst>
-        </pc:graphicFrameChg>
-      </pc:sldChg>
-      <pc:sldChg chg="addSp delSp modSp new mod">
-        <pc:chgData name="Zonghua Gu" userId="9a7e1853e1951ef5" providerId="LiveId" clId="{CF1FAA12-072C-4ED5-BA76-0FFFAEFDB88A}" dt="2025-10-16T23:24:23.268" v="5627" actId="20577"/>
-        <pc:sldMkLst>
-          <pc:docMk/>
-          <pc:sldMk cId="3808152940" sldId="385"/>
-        </pc:sldMkLst>
-        <pc:spChg chg="mod">
-          <ac:chgData name="Zonghua Gu" userId="9a7e1853e1951ef5" providerId="LiveId" clId="{CF1FAA12-072C-4ED5-BA76-0FFFAEFDB88A}" dt="2025-10-16T23:24:23.268" v="5627" actId="20577"/>
-          <ac:spMkLst>
-            <pc:docMk/>
-            <pc:sldMk cId="3808152940" sldId="385"/>
-            <ac:spMk id="4" creationId="{20AF534B-2417-B92D-61EA-CC2082CC62B6}"/>
-          </ac:spMkLst>
-        </pc:spChg>
-        <pc:graphicFrameChg chg="add mod">
-          <ac:chgData name="Zonghua Gu" userId="9a7e1853e1951ef5" providerId="LiveId" clId="{CF1FAA12-072C-4ED5-BA76-0FFFAEFDB88A}" dt="2025-10-08T01:01:39.844" v="3961"/>
-          <ac:graphicFrameMkLst>
-            <pc:docMk/>
-            <pc:sldMk cId="3808152940" sldId="385"/>
-            <ac:graphicFrameMk id="6" creationId="{9F3E2C1E-31D7-D8FB-CE9D-0E062ADEFB6A}"/>
-          </ac:graphicFrameMkLst>
-        </pc:graphicFrameChg>
-      </pc:sldChg>
-      <pc:sldChg chg="addSp delSp modSp add mod">
-        <pc:chgData name="Zonghua Gu" userId="9a7e1853e1951ef5" providerId="LiveId" clId="{CF1FAA12-072C-4ED5-BA76-0FFFAEFDB88A}" dt="2025-10-08T01:21:20.761" v="4283" actId="20577"/>
-        <pc:sldMkLst>
-          <pc:docMk/>
-          <pc:sldMk cId="1496054644" sldId="387"/>
-        </pc:sldMkLst>
-        <pc:spChg chg="mod">
-          <ac:chgData name="Zonghua Gu" userId="9a7e1853e1951ef5" providerId="LiveId" clId="{CF1FAA12-072C-4ED5-BA76-0FFFAEFDB88A}" dt="2025-10-08T01:21:20.761" v="4283" actId="20577"/>
-          <ac:spMkLst>
-            <pc:docMk/>
-            <pc:sldMk cId="1496054644" sldId="387"/>
-            <ac:spMk id="4" creationId="{5645CD76-A90D-FFA9-784E-A81C0CBBBD11}"/>
-          </ac:spMkLst>
-        </pc:spChg>
-        <pc:graphicFrameChg chg="mod modGraphic">
-          <ac:chgData name="Zonghua Gu" userId="9a7e1853e1951ef5" providerId="LiveId" clId="{CF1FAA12-072C-4ED5-BA76-0FFFAEFDB88A}" dt="2025-10-08T01:02:22.988" v="3966" actId="21"/>
-          <ac:graphicFrameMkLst>
-            <pc:docMk/>
-            <pc:sldMk cId="1496054644" sldId="387"/>
-            <ac:graphicFrameMk id="5" creationId="{9BFC7784-AC7A-8159-74B8-C94D84BE48E4}"/>
-          </ac:graphicFrameMkLst>
-        </pc:graphicFrameChg>
-      </pc:sldChg>
-      <pc:sldChg chg="modSp add mod">
-        <pc:chgData name="Zonghua Gu" userId="9a7e1853e1951ef5" providerId="LiveId" clId="{CF1FAA12-072C-4ED5-BA76-0FFFAEFDB88A}" dt="2025-10-09T21:59:29.534" v="4352" actId="403"/>
-        <pc:sldMkLst>
-          <pc:docMk/>
-          <pc:sldMk cId="3531879706" sldId="553"/>
-        </pc:sldMkLst>
-        <pc:spChg chg="mod">
-          <ac:chgData name="Zonghua Gu" userId="9a7e1853e1951ef5" providerId="LiveId" clId="{CF1FAA12-072C-4ED5-BA76-0FFFAEFDB88A}" dt="2025-10-09T21:57:11.061" v="4348" actId="1076"/>
-          <ac:spMkLst>
-            <pc:docMk/>
-            <pc:sldMk cId="3531879706" sldId="553"/>
-            <ac:spMk id="4" creationId="{3666F114-4345-426E-8C76-29F4A48DFE0E}"/>
-          </ac:spMkLst>
-        </pc:spChg>
-        <pc:spChg chg="mod">
-          <ac:chgData name="Zonghua Gu" userId="9a7e1853e1951ef5" providerId="LiveId" clId="{CF1FAA12-072C-4ED5-BA76-0FFFAEFDB88A}" dt="2025-10-09T21:59:29.534" v="4352" actId="403"/>
-          <ac:spMkLst>
-            <pc:docMk/>
-            <pc:sldMk cId="3531879706" sldId="553"/>
-            <ac:spMk id="38917" creationId="{00000000-0000-0000-0000-000000000000}"/>
-          </ac:spMkLst>
-        </pc:spChg>
-        <pc:spChg chg="mod">
-          <ac:chgData name="Zonghua Gu" userId="9a7e1853e1951ef5" providerId="LiveId" clId="{CF1FAA12-072C-4ED5-BA76-0FFFAEFDB88A}" dt="2025-10-09T21:57:14.218" v="4349" actId="1076"/>
-          <ac:spMkLst>
-            <pc:docMk/>
-            <pc:sldMk cId="3531879706" sldId="553"/>
-            <ac:spMk id="323587" creationId="{00000000-0000-0000-0000-000000000000}"/>
-          </ac:spMkLst>
-        </pc:spChg>
-        <pc:graphicFrameChg chg="mod">
-          <ac:chgData name="Zonghua Gu" userId="9a7e1853e1951ef5" providerId="LiveId" clId="{CF1FAA12-072C-4ED5-BA76-0FFFAEFDB88A}" dt="2025-10-09T21:57:14.218" v="4349" actId="1076"/>
-          <ac:graphicFrameMkLst>
-            <pc:docMk/>
-            <pc:sldMk cId="3531879706" sldId="553"/>
-            <ac:graphicFrameMk id="2" creationId="{00000000-0000-0000-0000-000000000000}"/>
-          </ac:graphicFrameMkLst>
-        </pc:graphicFrameChg>
-        <pc:inkChg chg="mod">
-          <ac:chgData name="Zonghua Gu" userId="9a7e1853e1951ef5" providerId="LiveId" clId="{CF1FAA12-072C-4ED5-BA76-0FFFAEFDB88A}" dt="2025-10-09T21:57:14.218" v="4349" actId="1076"/>
-          <ac:inkMkLst>
-            <pc:docMk/>
-            <pc:sldMk cId="3531879706" sldId="553"/>
-            <ac:inkMk id="5" creationId="{E2ACC35D-CF95-407F-B222-DF5A1F69BA9F}"/>
-          </ac:inkMkLst>
-        </pc:inkChg>
-        <pc:inkChg chg="mod">
-          <ac:chgData name="Zonghua Gu" userId="9a7e1853e1951ef5" providerId="LiveId" clId="{CF1FAA12-072C-4ED5-BA76-0FFFAEFDB88A}" dt="2025-10-09T21:57:14.218" v="4349" actId="1076"/>
-          <ac:inkMkLst>
-            <pc:docMk/>
-            <pc:sldMk cId="3531879706" sldId="553"/>
-            <ac:inkMk id="6" creationId="{641399B7-0992-4159-AA56-A61464B0489C}"/>
-          </ac:inkMkLst>
-        </pc:inkChg>
-      </pc:sldChg>
-      <pc:sldChg chg="modSp new mod">
-        <pc:chgData name="Zonghua Gu" userId="9a7e1853e1951ef5" providerId="LiveId" clId="{CF1FAA12-072C-4ED5-BA76-0FFFAEFDB88A}" dt="2025-10-16T23:43:30.900" v="5674" actId="20577"/>
-        <pc:sldMkLst>
-          <pc:docMk/>
-          <pc:sldMk cId="1248622466" sldId="555"/>
-        </pc:sldMkLst>
-        <pc:spChg chg="mod">
-          <ac:chgData name="Zonghua Gu" userId="9a7e1853e1951ef5" providerId="LiveId" clId="{CF1FAA12-072C-4ED5-BA76-0FFFAEFDB88A}" dt="2025-10-16T23:43:30.900" v="5674" actId="20577"/>
-          <ac:spMkLst>
-            <pc:docMk/>
-            <pc:sldMk cId="1248622466" sldId="555"/>
-            <ac:spMk id="4" creationId="{0DBB9D86-D583-CABE-4B85-A5314A655FCE}"/>
-          </ac:spMkLst>
-        </pc:spChg>
-      </pc:sldChg>
-      <pc:sldChg chg="addSp modSp add mod">
-        <pc:chgData name="Zonghua Gu" userId="9a7e1853e1951ef5" providerId="LiveId" clId="{CF1FAA12-072C-4ED5-BA76-0FFFAEFDB88A}" dt="2025-10-16T23:46:24.446" v="5696" actId="20577"/>
-        <pc:sldMkLst>
-          <pc:docMk/>
-          <pc:sldMk cId="3198797166" sldId="556"/>
-        </pc:sldMkLst>
-        <pc:spChg chg="mod">
-          <ac:chgData name="Zonghua Gu" userId="9a7e1853e1951ef5" providerId="LiveId" clId="{CF1FAA12-072C-4ED5-BA76-0FFFAEFDB88A}" dt="2025-10-16T23:43:35.841" v="5676" actId="20577"/>
-          <ac:spMkLst>
-            <pc:docMk/>
-            <pc:sldMk cId="3198797166" sldId="556"/>
-            <ac:spMk id="4" creationId="{26C07159-9E90-34FC-FD37-707ADD2978CD}"/>
-          </ac:spMkLst>
-        </pc:spChg>
-        <pc:spChg chg="add mod">
-          <ac:chgData name="Zonghua Gu" userId="9a7e1853e1951ef5" providerId="LiveId" clId="{CF1FAA12-072C-4ED5-BA76-0FFFAEFDB88A}" dt="2025-10-16T23:46:24.446" v="5696" actId="20577"/>
-          <ac:spMkLst>
-            <pc:docMk/>
-            <pc:sldMk cId="3198797166" sldId="556"/>
-            <ac:spMk id="5" creationId="{F62F52E9-C913-0809-7AFE-FB9B6517BE16}"/>
-          </ac:spMkLst>
-        </pc:spChg>
-      </pc:sldChg>
-      <pc:sldChg chg="modSp add mod">
-        <pc:chgData name="Zonghua Gu" userId="9a7e1853e1951ef5" providerId="LiveId" clId="{CF1FAA12-072C-4ED5-BA76-0FFFAEFDB88A}" dt="2025-10-16T23:49:22.171" v="5754" actId="20577"/>
-        <pc:sldMkLst>
-          <pc:docMk/>
-          <pc:sldMk cId="3001218416" sldId="558"/>
-        </pc:sldMkLst>
-        <pc:spChg chg="mod">
-          <ac:chgData name="Zonghua Gu" userId="9a7e1853e1951ef5" providerId="LiveId" clId="{CF1FAA12-072C-4ED5-BA76-0FFFAEFDB88A}" dt="2025-10-16T23:49:22.171" v="5754" actId="20577"/>
-          <ac:spMkLst>
-            <pc:docMk/>
-            <pc:sldMk cId="3001218416" sldId="558"/>
-            <ac:spMk id="4" creationId="{65B1C0D2-DA1A-E3F6-EAF4-BA1DF53BEE99}"/>
-          </ac:spMkLst>
-        </pc:spChg>
-      </pc:sldChg>
-      <pc:sldChg chg="modSp add mod">
-        <pc:chgData name="Zonghua Gu" userId="9a7e1853e1951ef5" providerId="LiveId" clId="{CF1FAA12-072C-4ED5-BA76-0FFFAEFDB88A}" dt="2025-10-17T12:08:46.152" v="5789" actId="14100"/>
-        <pc:sldMkLst>
-          <pc:docMk/>
-          <pc:sldMk cId="1329116476" sldId="560"/>
-        </pc:sldMkLst>
-        <pc:spChg chg="mod">
-          <ac:chgData name="Zonghua Gu" userId="9a7e1853e1951ef5" providerId="LiveId" clId="{CF1FAA12-072C-4ED5-BA76-0FFFAEFDB88A}" dt="2025-10-17T12:08:46.152" v="5789" actId="14100"/>
-          <ac:spMkLst>
-            <pc:docMk/>
-            <pc:sldMk cId="1329116476" sldId="560"/>
-            <ac:spMk id="4" creationId="{4D005CE6-6347-A24A-DCDF-0579A282CE42}"/>
-          </ac:spMkLst>
-        </pc:spChg>
-      </pc:sldChg>
-      <pc:sldChg chg="add">
-        <pc:chgData name="Zonghua Gu" userId="9a7e1853e1951ef5" providerId="LiveId" clId="{CF1FAA12-072C-4ED5-BA76-0FFFAEFDB88A}" dt="2025-10-17T12:05:52.117" v="5784"/>
-        <pc:sldMkLst>
-          <pc:docMk/>
-          <pc:sldMk cId="4168816101" sldId="562"/>
+          <pc:sldMk cId="2531244333" sldId="262"/>
         </pc:sldMkLst>
       </pc:sldChg>
       <pc:sldChg chg="addSp delSp modSp add mod">
-        <pc:chgData name="Zonghua Gu" userId="9a7e1853e1951ef5" providerId="LiveId" clId="{CF1FAA12-072C-4ED5-BA76-0FFFAEFDB88A}" dt="2025-10-25T23:40:58.206" v="5815" actId="20577"/>
+        <pc:chgData name="Zonghua Gu" userId="9a7e1853e1951ef5" providerId="LiveId" clId="{CF1FAA12-072C-4ED5-BA76-0FFFAEFDB88A}" dt="2026-02-26T15:49:23.922" v="5957" actId="20577"/>
         <pc:sldMkLst>
           <pc:docMk/>
           <pc:sldMk cId="3678485956" sldId="565"/>
         </pc:sldMkLst>
         <pc:spChg chg="mod">
-          <ac:chgData name="Zonghua Gu" userId="9a7e1853e1951ef5" providerId="LiveId" clId="{CF1FAA12-072C-4ED5-BA76-0FFFAEFDB88A}" dt="2025-10-25T23:40:58.206" v="5815" actId="20577"/>
+          <ac:chgData name="Zonghua Gu" userId="9a7e1853e1951ef5" providerId="LiveId" clId="{CF1FAA12-072C-4ED5-BA76-0FFFAEFDB88A}" dt="2026-02-26T15:49:23.922" v="5957" actId="20577"/>
           <ac:spMkLst>
             <pc:docMk/>
             <pc:sldMk cId="3678485956" sldId="565"/>
             <ac:spMk id="4" creationId="{C3D9501F-592C-5813-E379-F3D65F5F6FEC}"/>
-          </ac:spMkLst>
-        </pc:spChg>
-      </pc:sldChg>
-      <pc:sldChg chg="modSp new mod">
-        <pc:chgData name="Zonghua Gu" userId="9a7e1853e1951ef5" providerId="LiveId" clId="{CF1FAA12-072C-4ED5-BA76-0FFFAEFDB88A}" dt="2025-10-16T22:15:34.056" v="4992" actId="20577"/>
-        <pc:sldMkLst>
-          <pc:docMk/>
-          <pc:sldMk cId="183442351" sldId="577"/>
-        </pc:sldMkLst>
-        <pc:spChg chg="mod">
-          <ac:chgData name="Zonghua Gu" userId="9a7e1853e1951ef5" providerId="LiveId" clId="{CF1FAA12-072C-4ED5-BA76-0FFFAEFDB88A}" dt="2025-10-16T22:15:34.056" v="4992" actId="20577"/>
-          <ac:spMkLst>
-            <pc:docMk/>
-            <pc:sldMk cId="183442351" sldId="577"/>
-            <ac:spMk id="4" creationId="{1E92B818-9E8A-D4F7-35C5-0DE946EE802E}"/>
-          </ac:spMkLst>
-        </pc:spChg>
-      </pc:sldChg>
-      <pc:sldChg chg="addSp delSp modSp new mod">
-        <pc:chgData name="Zonghua Gu" userId="9a7e1853e1951ef5" providerId="LiveId" clId="{CF1FAA12-072C-4ED5-BA76-0FFFAEFDB88A}" dt="2025-10-15T00:22:35.321" v="4949" actId="1076"/>
-        <pc:sldMkLst>
-          <pc:docMk/>
-          <pc:sldMk cId="2830003090" sldId="583"/>
-        </pc:sldMkLst>
-        <pc:spChg chg="mod">
-          <ac:chgData name="Zonghua Gu" userId="9a7e1853e1951ef5" providerId="LiveId" clId="{CF1FAA12-072C-4ED5-BA76-0FFFAEFDB88A}" dt="2025-10-07T21:12:54.151" v="3908" actId="20577"/>
-          <ac:spMkLst>
-            <pc:docMk/>
-            <pc:sldMk cId="2830003090" sldId="583"/>
-            <ac:spMk id="2" creationId="{1E173C70-86D1-2699-001E-17FB9C6BE226}"/>
-          </ac:spMkLst>
-        </pc:spChg>
-        <pc:spChg chg="add mod">
-          <ac:chgData name="Zonghua Gu" userId="9a7e1853e1951ef5" providerId="LiveId" clId="{CF1FAA12-072C-4ED5-BA76-0FFFAEFDB88A}" dt="2025-10-15T00:20:26.474" v="4943" actId="20577"/>
-          <ac:spMkLst>
-            <pc:docMk/>
-            <pc:sldMk cId="2830003090" sldId="583"/>
-            <ac:spMk id="7" creationId="{0D49BC51-81B0-0099-8662-2532F481FECD}"/>
-          </ac:spMkLst>
-        </pc:spChg>
-        <pc:graphicFrameChg chg="add mod modGraphic">
-          <ac:chgData name="Zonghua Gu" userId="9a7e1853e1951ef5" providerId="LiveId" clId="{CF1FAA12-072C-4ED5-BA76-0FFFAEFDB88A}" dt="2025-10-15T00:22:35.321" v="4949" actId="1076"/>
-          <ac:graphicFrameMkLst>
-            <pc:docMk/>
-            <pc:sldMk cId="2830003090" sldId="583"/>
-            <ac:graphicFrameMk id="6" creationId="{9B855329-644D-B313-F6DA-A77E9B02AAE4}"/>
-          </ac:graphicFrameMkLst>
-        </pc:graphicFrameChg>
-      </pc:sldChg>
-      <pc:sldChg chg="addSp delSp modSp new mod">
-        <pc:chgData name="Zonghua Gu" userId="9a7e1853e1951ef5" providerId="LiveId" clId="{CF1FAA12-072C-4ED5-BA76-0FFFAEFDB88A}" dt="2025-10-15T00:15:20.072" v="4862" actId="571"/>
-        <pc:sldMkLst>
-          <pc:docMk/>
-          <pc:sldMk cId="753812427" sldId="585"/>
-        </pc:sldMkLst>
-        <pc:spChg chg="mod">
-          <ac:chgData name="Zonghua Gu" userId="9a7e1853e1951ef5" providerId="LiveId" clId="{CF1FAA12-072C-4ED5-BA76-0FFFAEFDB88A}" dt="2025-10-07T21:15:51.119" v="3911"/>
-          <ac:spMkLst>
-            <pc:docMk/>
-            <pc:sldMk cId="753812427" sldId="585"/>
-            <ac:spMk id="2" creationId="{B2F387BE-21EF-D8F5-98CC-8E638AA4C3CB}"/>
-          </ac:spMkLst>
-        </pc:spChg>
-        <pc:spChg chg="add mod">
-          <ac:chgData name="Zonghua Gu" userId="9a7e1853e1951ef5" providerId="LiveId" clId="{CF1FAA12-072C-4ED5-BA76-0FFFAEFDB88A}" dt="2025-10-07T20:20:15.077" v="3750" actId="1076"/>
-          <ac:spMkLst>
-            <pc:docMk/>
-            <pc:sldMk cId="753812427" sldId="585"/>
-            <ac:spMk id="7" creationId="{3DC6837D-2422-BFB8-F87C-7FA5B761C9E2}"/>
-          </ac:spMkLst>
-        </pc:spChg>
-        <pc:spChg chg="add mod">
-          <ac:chgData name="Zonghua Gu" userId="9a7e1853e1951ef5" providerId="LiveId" clId="{CF1FAA12-072C-4ED5-BA76-0FFFAEFDB88A}" dt="2025-10-15T00:15:02.630" v="4857" actId="1076"/>
-          <ac:spMkLst>
-            <pc:docMk/>
-            <pc:sldMk cId="753812427" sldId="585"/>
-            <ac:spMk id="8" creationId="{BCCAC2F7-7B48-A7B1-D707-D63B0BCE4A2D}"/>
-          </ac:spMkLst>
-        </pc:spChg>
-        <pc:spChg chg="add mod">
-          <ac:chgData name="Zonghua Gu" userId="9a7e1853e1951ef5" providerId="LiveId" clId="{CF1FAA12-072C-4ED5-BA76-0FFFAEFDB88A}" dt="2025-10-15T00:15:11.266" v="4860" actId="1076"/>
-          <ac:spMkLst>
-            <pc:docMk/>
-            <pc:sldMk cId="753812427" sldId="585"/>
-            <ac:spMk id="9" creationId="{E691C844-4BC0-0B20-B37E-D78145261753}"/>
-          </ac:spMkLst>
-        </pc:spChg>
-        <pc:spChg chg="add mod">
-          <ac:chgData name="Zonghua Gu" userId="9a7e1853e1951ef5" providerId="LiveId" clId="{CF1FAA12-072C-4ED5-BA76-0FFFAEFDB88A}" dt="2025-10-15T00:15:16.403" v="4861" actId="571"/>
-          <ac:spMkLst>
-            <pc:docMk/>
-            <pc:sldMk cId="753812427" sldId="585"/>
-            <ac:spMk id="10" creationId="{EDCEFAB5-9995-5D1A-7108-FE6877E0AFFF}"/>
-          </ac:spMkLst>
-        </pc:spChg>
-        <pc:spChg chg="add mod">
-          <ac:chgData name="Zonghua Gu" userId="9a7e1853e1951ef5" providerId="LiveId" clId="{CF1FAA12-072C-4ED5-BA76-0FFFAEFDB88A}" dt="2025-10-15T00:15:20.072" v="4862" actId="571"/>
-          <ac:spMkLst>
-            <pc:docMk/>
-            <pc:sldMk cId="753812427" sldId="585"/>
-            <ac:spMk id="11" creationId="{91BA33C9-48DD-5A86-81ED-82377FB93AD6}"/>
-          </ac:spMkLst>
-        </pc:spChg>
-        <pc:spChg chg="add mod">
-          <ac:chgData name="Zonghua Gu" userId="9a7e1853e1951ef5" providerId="LiveId" clId="{CF1FAA12-072C-4ED5-BA76-0FFFAEFDB88A}" dt="2025-10-07T20:21:16.408" v="3757" actId="20577"/>
-          <ac:spMkLst>
-            <pc:docMk/>
-            <pc:sldMk cId="753812427" sldId="585"/>
-            <ac:spMk id="15" creationId="{6C131644-8E94-FA19-4A25-27C373117556}"/>
-          </ac:spMkLst>
-        </pc:spChg>
-        <pc:spChg chg="add mod">
-          <ac:chgData name="Zonghua Gu" userId="9a7e1853e1951ef5" providerId="LiveId" clId="{CF1FAA12-072C-4ED5-BA76-0FFFAEFDB88A}" dt="2025-10-07T20:49:33.419" v="3769" actId="20577"/>
-          <ac:spMkLst>
-            <pc:docMk/>
-            <pc:sldMk cId="753812427" sldId="585"/>
-            <ac:spMk id="18" creationId="{A7D0E2EB-4643-8298-6FFB-F644054699CA}"/>
-          </ac:spMkLst>
-        </pc:spChg>
-        <pc:spChg chg="add mod">
-          <ac:chgData name="Zonghua Gu" userId="9a7e1853e1951ef5" providerId="LiveId" clId="{CF1FAA12-072C-4ED5-BA76-0FFFAEFDB88A}" dt="2025-10-07T20:50:36.213" v="3774" actId="20577"/>
-          <ac:spMkLst>
-            <pc:docMk/>
-            <pc:sldMk cId="753812427" sldId="585"/>
-            <ac:spMk id="21" creationId="{3F78BDCB-4750-D7AD-9448-AC89996468A5}"/>
-          </ac:spMkLst>
-        </pc:spChg>
-        <pc:graphicFrameChg chg="add mod modGraphic">
-          <ac:chgData name="Zonghua Gu" userId="9a7e1853e1951ef5" providerId="LiveId" clId="{CF1FAA12-072C-4ED5-BA76-0FFFAEFDB88A}" dt="2025-10-07T20:20:15.077" v="3750" actId="1076"/>
-          <ac:graphicFrameMkLst>
-            <pc:docMk/>
-            <pc:sldMk cId="753812427" sldId="585"/>
-            <ac:graphicFrameMk id="5" creationId="{1F15F41E-EB7A-6ECD-3CFB-38D27911E9F1}"/>
-          </ac:graphicFrameMkLst>
-        </pc:graphicFrameChg>
-        <pc:graphicFrameChg chg="add mod modGraphic">
-          <ac:chgData name="Zonghua Gu" userId="9a7e1853e1951ef5" providerId="LiveId" clId="{CF1FAA12-072C-4ED5-BA76-0FFFAEFDB88A}" dt="2025-10-07T20:21:10.121" v="3756" actId="20577"/>
-          <ac:graphicFrameMkLst>
-            <pc:docMk/>
-            <pc:sldMk cId="753812427" sldId="585"/>
-            <ac:graphicFrameMk id="13" creationId="{BF5E2B1E-1943-38C7-5905-F4C88EAC39E0}"/>
-          </ac:graphicFrameMkLst>
-        </pc:graphicFrameChg>
-        <pc:graphicFrameChg chg="add mod modGraphic">
-          <ac:chgData name="Zonghua Gu" userId="9a7e1853e1951ef5" providerId="LiveId" clId="{CF1FAA12-072C-4ED5-BA76-0FFFAEFDB88A}" dt="2025-10-07T20:49:31.386" v="3768" actId="20577"/>
-          <ac:graphicFrameMkLst>
-            <pc:docMk/>
-            <pc:sldMk cId="753812427" sldId="585"/>
-            <ac:graphicFrameMk id="16" creationId="{967EEEEF-DB31-16C1-E51E-AA11ED143EE0}"/>
-          </ac:graphicFrameMkLst>
-        </pc:graphicFrameChg>
-        <pc:graphicFrameChg chg="add mod modGraphic">
-          <ac:chgData name="Zonghua Gu" userId="9a7e1853e1951ef5" providerId="LiveId" clId="{CF1FAA12-072C-4ED5-BA76-0FFFAEFDB88A}" dt="2025-10-15T00:13:41.253" v="4839" actId="20577"/>
-          <ac:graphicFrameMkLst>
-            <pc:docMk/>
-            <pc:sldMk cId="753812427" sldId="585"/>
-            <ac:graphicFrameMk id="19" creationId="{6FCB6396-85EE-B89A-4A0B-9D70E0C24EB3}"/>
-          </ac:graphicFrameMkLst>
-        </pc:graphicFrameChg>
-        <pc:cxnChg chg="add mod">
-          <ac:chgData name="Zonghua Gu" userId="9a7e1853e1951ef5" providerId="LiveId" clId="{CF1FAA12-072C-4ED5-BA76-0FFFAEFDB88A}" dt="2025-10-07T20:20:15.077" v="3750" actId="1076"/>
-          <ac:cxnSpMkLst>
-            <pc:docMk/>
-            <pc:sldMk cId="753812427" sldId="585"/>
-            <ac:cxnSpMk id="6" creationId="{064E99EB-A80A-64E3-3DC8-0F9341ACD6FF}"/>
-          </ac:cxnSpMkLst>
-        </pc:cxnChg>
-        <pc:cxnChg chg="add mod">
-          <ac:chgData name="Zonghua Gu" userId="9a7e1853e1951ef5" providerId="LiveId" clId="{CF1FAA12-072C-4ED5-BA76-0FFFAEFDB88A}" dt="2025-10-07T20:20:09.514" v="3749" actId="571"/>
-          <ac:cxnSpMkLst>
-            <pc:docMk/>
-            <pc:sldMk cId="753812427" sldId="585"/>
-            <ac:cxnSpMk id="14" creationId="{D8606BFC-23E4-2641-7362-BF44732DFAC4}"/>
-          </ac:cxnSpMkLst>
-        </pc:cxnChg>
-        <pc:cxnChg chg="add mod">
-          <ac:chgData name="Zonghua Gu" userId="9a7e1853e1951ef5" providerId="LiveId" clId="{CF1FAA12-072C-4ED5-BA76-0FFFAEFDB88A}" dt="2025-10-07T20:48:53.189" v="3759" actId="571"/>
-          <ac:cxnSpMkLst>
-            <pc:docMk/>
-            <pc:sldMk cId="753812427" sldId="585"/>
-            <ac:cxnSpMk id="17" creationId="{C9696F67-3162-0CEE-5F9F-C340110C76D5}"/>
-          </ac:cxnSpMkLst>
-        </pc:cxnChg>
-        <pc:cxnChg chg="add mod">
-          <ac:chgData name="Zonghua Gu" userId="9a7e1853e1951ef5" providerId="LiveId" clId="{CF1FAA12-072C-4ED5-BA76-0FFFAEFDB88A}" dt="2025-10-07T20:48:53.189" v="3759" actId="571"/>
-          <ac:cxnSpMkLst>
-            <pc:docMk/>
-            <pc:sldMk cId="753812427" sldId="585"/>
-            <ac:cxnSpMk id="20" creationId="{ED5303E1-F393-2BF6-3DF5-89ED60AD5E31}"/>
-          </ac:cxnSpMkLst>
-        </pc:cxnChg>
-      </pc:sldChg>
-      <pc:sldChg chg="addSp delSp modSp add mod">
-        <pc:chgData name="Zonghua Gu" userId="9a7e1853e1951ef5" providerId="LiveId" clId="{CF1FAA12-072C-4ED5-BA76-0FFFAEFDB88A}" dt="2025-10-15T00:15:33.611" v="4867" actId="478"/>
-        <pc:sldMkLst>
-          <pc:docMk/>
-          <pc:sldMk cId="908488964" sldId="586"/>
-        </pc:sldMkLst>
-        <pc:spChg chg="add mod">
-          <ac:chgData name="Zonghua Gu" userId="9a7e1853e1951ef5" providerId="LiveId" clId="{CF1FAA12-072C-4ED5-BA76-0FFFAEFDB88A}" dt="2025-10-15T00:15:21.641" v="4863"/>
-          <ac:spMkLst>
-            <pc:docMk/>
-            <pc:sldMk cId="908488964" sldId="586"/>
-            <ac:spMk id="2" creationId="{59936A83-1579-8CB9-0726-27085A2456A7}"/>
-          </ac:spMkLst>
-        </pc:spChg>
-        <pc:spChg chg="add mod">
-          <ac:chgData name="Zonghua Gu" userId="9a7e1853e1951ef5" providerId="LiveId" clId="{CF1FAA12-072C-4ED5-BA76-0FFFAEFDB88A}" dt="2025-10-07T20:54:05.119" v="3843" actId="1076"/>
-          <ac:spMkLst>
-            <pc:docMk/>
-            <pc:sldMk cId="908488964" sldId="586"/>
-            <ac:spMk id="4" creationId="{D782C3D1-9D60-C236-C2F8-5F422D8F9736}"/>
-          </ac:spMkLst>
-        </pc:spChg>
-        <pc:spChg chg="mod">
-          <ac:chgData name="Zonghua Gu" userId="9a7e1853e1951ef5" providerId="LiveId" clId="{CF1FAA12-072C-4ED5-BA76-0FFFAEFDB88A}" dt="2025-10-07T20:52:31.565" v="3823" actId="20577"/>
-          <ac:spMkLst>
-            <pc:docMk/>
-            <pc:sldMk cId="908488964" sldId="586"/>
-            <ac:spMk id="7" creationId="{99412AA8-0F73-4034-C9CE-818495B51FCF}"/>
-          </ac:spMkLst>
-        </pc:spChg>
-        <pc:spChg chg="add mod">
-          <ac:chgData name="Zonghua Gu" userId="9a7e1853e1951ef5" providerId="LiveId" clId="{CF1FAA12-072C-4ED5-BA76-0FFFAEFDB88A}" dt="2025-10-07T20:53:28.452" v="3835" actId="20577"/>
-          <ac:spMkLst>
-            <pc:docMk/>
-            <pc:sldMk cId="908488964" sldId="586"/>
-            <ac:spMk id="8" creationId="{10473BA3-1C93-0ECA-CF12-1C0F34AEF3F8}"/>
-          </ac:spMkLst>
-        </pc:spChg>
-        <pc:spChg chg="add mod">
-          <ac:chgData name="Zonghua Gu" userId="9a7e1853e1951ef5" providerId="LiveId" clId="{CF1FAA12-072C-4ED5-BA76-0FFFAEFDB88A}" dt="2025-10-07T20:54:28.963" v="3850" actId="20577"/>
-          <ac:spMkLst>
-            <pc:docMk/>
-            <pc:sldMk cId="908488964" sldId="586"/>
-            <ac:spMk id="9" creationId="{959289A5-B78D-C5A1-6E73-CEAD62EBFA85}"/>
-          </ac:spMkLst>
-        </pc:spChg>
-        <pc:spChg chg="add mod">
-          <ac:chgData name="Zonghua Gu" userId="9a7e1853e1951ef5" providerId="LiveId" clId="{CF1FAA12-072C-4ED5-BA76-0FFFAEFDB88A}" dt="2025-10-07T20:55:18.483" v="3864" actId="20577"/>
-          <ac:spMkLst>
-            <pc:docMk/>
-            <pc:sldMk cId="908488964" sldId="586"/>
-            <ac:spMk id="10" creationId="{1989D623-F045-D185-C4D1-81732EF37614}"/>
-          </ac:spMkLst>
-        </pc:spChg>
-        <pc:spChg chg="add mod">
-          <ac:chgData name="Zonghua Gu" userId="9a7e1853e1951ef5" providerId="LiveId" clId="{CF1FAA12-072C-4ED5-BA76-0FFFAEFDB88A}" dt="2025-10-07T21:16:01.098" v="3913" actId="1076"/>
-          <ac:spMkLst>
-            <pc:docMk/>
-            <pc:sldMk cId="908488964" sldId="586"/>
-            <ac:spMk id="11" creationId="{A0645D20-AFA0-6C43-3DA8-702124B76FCB}"/>
-          </ac:spMkLst>
-        </pc:spChg>
-        <pc:spChg chg="mod">
-          <ac:chgData name="Zonghua Gu" userId="9a7e1853e1951ef5" providerId="LiveId" clId="{CF1FAA12-072C-4ED5-BA76-0FFFAEFDB88A}" dt="2025-10-07T20:53:45.434" v="3840" actId="20577"/>
-          <ac:spMkLst>
-            <pc:docMk/>
-            <pc:sldMk cId="908488964" sldId="586"/>
-            <ac:spMk id="15" creationId="{5BBCA20D-EC11-8C63-568E-AF5BE0B4B92B}"/>
-          </ac:spMkLst>
-        </pc:spChg>
-        <pc:spChg chg="mod">
-          <ac:chgData name="Zonghua Gu" userId="9a7e1853e1951ef5" providerId="LiveId" clId="{CF1FAA12-072C-4ED5-BA76-0FFFAEFDB88A}" dt="2025-10-07T20:54:50.838" v="3857" actId="20577"/>
-          <ac:spMkLst>
-            <pc:docMk/>
-            <pc:sldMk cId="908488964" sldId="586"/>
-            <ac:spMk id="18" creationId="{BB306B94-61E9-E613-CFA2-1C08136B278D}"/>
-          </ac:spMkLst>
-        </pc:spChg>
-        <pc:spChg chg="mod">
-          <ac:chgData name="Zonghua Gu" userId="9a7e1853e1951ef5" providerId="LiveId" clId="{CF1FAA12-072C-4ED5-BA76-0FFFAEFDB88A}" dt="2025-10-07T20:55:37.241" v="3871" actId="20577"/>
-          <ac:spMkLst>
-            <pc:docMk/>
-            <pc:sldMk cId="908488964" sldId="586"/>
-            <ac:spMk id="21" creationId="{7BA59ECF-E539-3CF2-7331-F24D28CA3E52}"/>
-          </ac:spMkLst>
-        </pc:spChg>
-        <pc:spChg chg="add mod">
-          <ac:chgData name="Zonghua Gu" userId="9a7e1853e1951ef5" providerId="LiveId" clId="{CF1FAA12-072C-4ED5-BA76-0FFFAEFDB88A}" dt="2025-10-15T00:15:29.539" v="4865"/>
-          <ac:spMkLst>
-            <pc:docMk/>
-            <pc:sldMk cId="908488964" sldId="586"/>
-            <ac:spMk id="23" creationId="{7D1CF86A-D4ED-E25F-19E3-E1F021E47C8F}"/>
-          </ac:spMkLst>
-        </pc:spChg>
-        <pc:spChg chg="add mod">
-          <ac:chgData name="Zonghua Gu" userId="9a7e1853e1951ef5" providerId="LiveId" clId="{CF1FAA12-072C-4ED5-BA76-0FFFAEFDB88A}" dt="2025-10-15T00:15:29.539" v="4865"/>
-          <ac:spMkLst>
-            <pc:docMk/>
-            <pc:sldMk cId="908488964" sldId="586"/>
-            <ac:spMk id="24" creationId="{8F7C7F06-67DF-7BC1-E659-4759B0125435}"/>
-          </ac:spMkLst>
-        </pc:spChg>
-        <pc:spChg chg="add mod">
-          <ac:chgData name="Zonghua Gu" userId="9a7e1853e1951ef5" providerId="LiveId" clId="{CF1FAA12-072C-4ED5-BA76-0FFFAEFDB88A}" dt="2025-10-15T00:15:29.539" v="4865"/>
-          <ac:spMkLst>
-            <pc:docMk/>
-            <pc:sldMk cId="908488964" sldId="586"/>
-            <ac:spMk id="25" creationId="{0BE27724-9882-64E4-9FA6-DF613F1C77AE}"/>
-          </ac:spMkLst>
-        </pc:spChg>
-        <pc:graphicFrameChg chg="modGraphic">
-          <ac:chgData name="Zonghua Gu" userId="9a7e1853e1951ef5" providerId="LiveId" clId="{CF1FAA12-072C-4ED5-BA76-0FFFAEFDB88A}" dt="2025-10-07T20:52:20.289" v="3822" actId="20577"/>
-          <ac:graphicFrameMkLst>
-            <pc:docMk/>
-            <pc:sldMk cId="908488964" sldId="586"/>
-            <ac:graphicFrameMk id="5" creationId="{65E83F07-A072-D782-6A5E-2BFF083E04B3}"/>
-          </ac:graphicFrameMkLst>
-        </pc:graphicFrameChg>
-        <pc:graphicFrameChg chg="modGraphic">
-          <ac:chgData name="Zonghua Gu" userId="9a7e1853e1951ef5" providerId="LiveId" clId="{CF1FAA12-072C-4ED5-BA76-0FFFAEFDB88A}" dt="2025-10-14T23:08:59.529" v="4353" actId="20577"/>
-          <ac:graphicFrameMkLst>
-            <pc:docMk/>
-            <pc:sldMk cId="908488964" sldId="586"/>
-            <ac:graphicFrameMk id="13" creationId="{F63A0396-E875-E526-563F-9D73C0C90D13}"/>
-          </ac:graphicFrameMkLst>
-        </pc:graphicFrameChg>
-        <pc:graphicFrameChg chg="modGraphic">
-          <ac:chgData name="Zonghua Gu" userId="9a7e1853e1951ef5" providerId="LiveId" clId="{CF1FAA12-072C-4ED5-BA76-0FFFAEFDB88A}" dt="2025-10-07T21:11:04.012" v="3876" actId="20577"/>
-          <ac:graphicFrameMkLst>
-            <pc:docMk/>
-            <pc:sldMk cId="908488964" sldId="586"/>
-            <ac:graphicFrameMk id="16" creationId="{18815F9F-0A77-C53E-5E6E-AFCEED2346CE}"/>
-          </ac:graphicFrameMkLst>
-        </pc:graphicFrameChg>
-        <pc:graphicFrameChg chg="modGraphic">
-          <ac:chgData name="Zonghua Gu" userId="9a7e1853e1951ef5" providerId="LiveId" clId="{CF1FAA12-072C-4ED5-BA76-0FFFAEFDB88A}" dt="2025-10-07T21:10:58.008" v="3875" actId="20577"/>
-          <ac:graphicFrameMkLst>
-            <pc:docMk/>
-            <pc:sldMk cId="908488964" sldId="586"/>
-            <ac:graphicFrameMk id="19" creationId="{84DB85B8-7574-25F2-060F-F0E37FAF8037}"/>
-          </ac:graphicFrameMkLst>
-        </pc:graphicFrameChg>
-      </pc:sldChg>
-      <pc:sldChg chg="addSp delSp modSp add mod ord">
-        <pc:chgData name="Zonghua Gu" userId="9a7e1853e1951ef5" providerId="LiveId" clId="{CF1FAA12-072C-4ED5-BA76-0FFFAEFDB88A}" dt="2025-10-15T00:15:55.115" v="4871" actId="6549"/>
-        <pc:sldMkLst>
-          <pc:docMk/>
-          <pc:sldMk cId="3350438353" sldId="587"/>
-        </pc:sldMkLst>
-        <pc:spChg chg="mod">
-          <ac:chgData name="Zonghua Gu" userId="9a7e1853e1951ef5" providerId="LiveId" clId="{CF1FAA12-072C-4ED5-BA76-0FFFAEFDB88A}" dt="2025-10-07T21:12:48.454" v="3906" actId="20577"/>
-          <ac:spMkLst>
-            <pc:docMk/>
-            <pc:sldMk cId="3350438353" sldId="587"/>
-            <ac:spMk id="2" creationId="{7FA9ABE5-E35E-9995-C450-C422553E96B1}"/>
-          </ac:spMkLst>
-        </pc:spChg>
-        <pc:graphicFrameChg chg="add mod modGraphic">
-          <ac:chgData name="Zonghua Gu" userId="9a7e1853e1951ef5" providerId="LiveId" clId="{CF1FAA12-072C-4ED5-BA76-0FFFAEFDB88A}" dt="2025-10-15T00:15:55.115" v="4871" actId="6549"/>
-          <ac:graphicFrameMkLst>
-            <pc:docMk/>
-            <pc:sldMk cId="3350438353" sldId="587"/>
-            <ac:graphicFrameMk id="4" creationId="{39EE1C15-FF51-08AC-2A57-2CF578AEDA18}"/>
-          </ac:graphicFrameMkLst>
-        </pc:graphicFrameChg>
-      </pc:sldChg>
-      <pc:sldChg chg="addSp delSp modSp add mod">
-        <pc:chgData name="Zonghua Gu" userId="9a7e1853e1951ef5" providerId="LiveId" clId="{CF1FAA12-072C-4ED5-BA76-0FFFAEFDB88A}" dt="2025-10-08T01:23:45.059" v="4321" actId="20577"/>
-        <pc:sldMkLst>
-          <pc:docMk/>
-          <pc:sldMk cId="3677126747" sldId="589"/>
-        </pc:sldMkLst>
-        <pc:spChg chg="mod">
-          <ac:chgData name="Zonghua Gu" userId="9a7e1853e1951ef5" providerId="LiveId" clId="{CF1FAA12-072C-4ED5-BA76-0FFFAEFDB88A}" dt="2025-10-08T01:04:06.916" v="4056" actId="20577"/>
-          <ac:spMkLst>
-            <pc:docMk/>
-            <pc:sldMk cId="3677126747" sldId="589"/>
-            <ac:spMk id="2" creationId="{CB69B07D-F698-D274-049D-5A851970124B}"/>
-          </ac:spMkLst>
-        </pc:spChg>
-        <pc:spChg chg="mod">
-          <ac:chgData name="Zonghua Gu" userId="9a7e1853e1951ef5" providerId="LiveId" clId="{CF1FAA12-072C-4ED5-BA76-0FFFAEFDB88A}" dt="2025-10-08T01:23:45.059" v="4321" actId="20577"/>
-          <ac:spMkLst>
-            <pc:docMk/>
-            <pc:sldMk cId="3677126747" sldId="589"/>
-            <ac:spMk id="4" creationId="{0A380CFB-3CFF-ED04-FB0F-0B0AEF72870A}"/>
-          </ac:spMkLst>
-        </pc:spChg>
-        <pc:graphicFrameChg chg="add mod">
-          <ac:chgData name="Zonghua Gu" userId="9a7e1853e1951ef5" providerId="LiveId" clId="{CF1FAA12-072C-4ED5-BA76-0FFFAEFDB88A}" dt="2025-10-08T01:08:41.220" v="4112"/>
-          <ac:graphicFrameMkLst>
-            <pc:docMk/>
-            <pc:sldMk cId="3677126747" sldId="589"/>
-            <ac:graphicFrameMk id="6" creationId="{D26B2FE4-3D6B-5F71-9A58-0E695C18479A}"/>
-          </ac:graphicFrameMkLst>
-        </pc:graphicFrameChg>
-      </pc:sldChg>
-      <pc:sldChg chg="addSp delSp modSp add mod">
-        <pc:chgData name="Zonghua Gu" userId="9a7e1853e1951ef5" providerId="LiveId" clId="{CF1FAA12-072C-4ED5-BA76-0FFFAEFDB88A}" dt="2025-10-16T23:24:08.066" v="5625" actId="20577"/>
-        <pc:sldMkLst>
-          <pc:docMk/>
-          <pc:sldMk cId="1060976615" sldId="590"/>
-        </pc:sldMkLst>
-        <pc:spChg chg="mod">
-          <ac:chgData name="Zonghua Gu" userId="9a7e1853e1951ef5" providerId="LiveId" clId="{CF1FAA12-072C-4ED5-BA76-0FFFAEFDB88A}" dt="2025-10-16T23:24:08.066" v="5625" actId="20577"/>
-          <ac:spMkLst>
-            <pc:docMk/>
-            <pc:sldMk cId="1060976615" sldId="590"/>
-            <ac:spMk id="4" creationId="{80E8719E-6F53-B45E-0478-44C5D8020651}"/>
-          </ac:spMkLst>
-        </pc:spChg>
-      </pc:sldChg>
-      <pc:sldChg chg="addSp delSp modSp add mod ord">
-        <pc:chgData name="Zonghua Gu" userId="9a7e1853e1951ef5" providerId="LiveId" clId="{CF1FAA12-072C-4ED5-BA76-0FFFAEFDB88A}" dt="2025-10-08T01:24:03.105" v="4333" actId="20577"/>
-        <pc:sldMkLst>
-          <pc:docMk/>
-          <pc:sldMk cId="1206155242" sldId="591"/>
-        </pc:sldMkLst>
-        <pc:spChg chg="mod">
-          <ac:chgData name="Zonghua Gu" userId="9a7e1853e1951ef5" providerId="LiveId" clId="{CF1FAA12-072C-4ED5-BA76-0FFFAEFDB88A}" dt="2025-10-08T01:24:03.105" v="4333" actId="20577"/>
-          <ac:spMkLst>
-            <pc:docMk/>
-            <pc:sldMk cId="1206155242" sldId="591"/>
-            <ac:spMk id="4" creationId="{7E1BCC50-A76F-3959-218D-71AAD3648525}"/>
-          </ac:spMkLst>
-        </pc:spChg>
-      </pc:sldChg>
-      <pc:sldChg chg="modSp add mod">
-        <pc:chgData name="Zonghua Gu" userId="9a7e1853e1951ef5" providerId="LiveId" clId="{CF1FAA12-072C-4ED5-BA76-0FFFAEFDB88A}" dt="2025-10-17T12:04:17.917" v="5780" actId="20577"/>
-        <pc:sldMkLst>
-          <pc:docMk/>
-          <pc:sldMk cId="3403107874" sldId="592"/>
-        </pc:sldMkLst>
-        <pc:spChg chg="mod">
-          <ac:chgData name="Zonghua Gu" userId="9a7e1853e1951ef5" providerId="LiveId" clId="{CF1FAA12-072C-4ED5-BA76-0FFFAEFDB88A}" dt="2025-10-16T22:28:15.749" v="5010" actId="20577"/>
-          <ac:spMkLst>
-            <pc:docMk/>
-            <pc:sldMk cId="3403107874" sldId="592"/>
-            <ac:spMk id="2" creationId="{3BF8795C-148F-094D-80F5-1264C3578EE6}"/>
-          </ac:spMkLst>
-        </pc:spChg>
-        <pc:spChg chg="mod">
-          <ac:chgData name="Zonghua Gu" userId="9a7e1853e1951ef5" providerId="LiveId" clId="{CF1FAA12-072C-4ED5-BA76-0FFFAEFDB88A}" dt="2025-10-17T12:04:17.917" v="5780" actId="20577"/>
-          <ac:spMkLst>
-            <pc:docMk/>
-            <pc:sldMk cId="3403107874" sldId="592"/>
-            <ac:spMk id="4" creationId="{2C569AB0-22FC-BE38-C5AA-9F8E6ECA54DA}"/>
-          </ac:spMkLst>
-        </pc:spChg>
-      </pc:sldChg>
-      <pc:sldChg chg="modSp add mod">
-        <pc:chgData name="Zonghua Gu" userId="9a7e1853e1951ef5" providerId="LiveId" clId="{CF1FAA12-072C-4ED5-BA76-0FFFAEFDB88A}" dt="2025-10-17T12:04:42.582" v="5782" actId="27636"/>
-        <pc:sldMkLst>
-          <pc:docMk/>
-          <pc:sldMk cId="3657267278" sldId="593"/>
-        </pc:sldMkLst>
-        <pc:spChg chg="mod">
-          <ac:chgData name="Zonghua Gu" userId="9a7e1853e1951ef5" providerId="LiveId" clId="{CF1FAA12-072C-4ED5-BA76-0FFFAEFDB88A}" dt="2025-10-16T22:49:30.922" v="5267" actId="20577"/>
-          <ac:spMkLst>
-            <pc:docMk/>
-            <pc:sldMk cId="3657267278" sldId="593"/>
-            <ac:spMk id="2" creationId="{9AB860C7-6D32-CED6-8DDA-C2F9D8462339}"/>
-          </ac:spMkLst>
-        </pc:spChg>
-        <pc:spChg chg="mod">
-          <ac:chgData name="Zonghua Gu" userId="9a7e1853e1951ef5" providerId="LiveId" clId="{CF1FAA12-072C-4ED5-BA76-0FFFAEFDB88A}" dt="2025-10-17T12:04:42.582" v="5782" actId="27636"/>
-          <ac:spMkLst>
-            <pc:docMk/>
-            <pc:sldMk cId="3657267278" sldId="593"/>
-            <ac:spMk id="4" creationId="{B0AEBDB8-79A1-498D-B9D2-DDE87FE9C064}"/>
           </ac:spMkLst>
         </pc:spChg>
       </pc:sldChg>
@@ -1131,7 +384,7 @@
             <a:fld id="{3AC3A17A-95E8-4381-B66B-5D6DE2B3048A}" type="datetimeFigureOut">
               <a:rPr lang="en-US" smtClean="0"/>
               <a:pPr/>
-              <a:t>10/26/2025</a:t>
+              <a:t>2/26/2026</a:t>
             </a:fld>
             <a:endParaRPr lang="en-US"/>
           </a:p>
@@ -1525,6 +778,107 @@
 </file>
 
 <file path=ppt/notesSlides/notesSlide10.xml><?xml version="1.0" encoding="utf-8"?>
+<p:notes xmlns:a="http://schemas.openxmlformats.org/drawingml/2006/main" xmlns:r="http://schemas.openxmlformats.org/officeDocument/2006/relationships" xmlns:p="http://schemas.openxmlformats.org/presentationml/2006/main">
+  <p:cSld>
+    <p:spTree>
+      <p:nvGrpSpPr>
+        <p:cNvPr id="1" name=""/>
+        <p:cNvGrpSpPr/>
+        <p:nvPr/>
+      </p:nvGrpSpPr>
+      <p:grpSpPr>
+        <a:xfrm>
+          <a:off x="0" y="0"/>
+          <a:ext cx="0" cy="0"/>
+          <a:chOff x="0" y="0"/>
+          <a:chExt cx="0" cy="0"/>
+        </a:xfrm>
+      </p:grpSpPr>
+      <p:sp>
+        <p:nvSpPr>
+          <p:cNvPr id="2" name="Slide Image Placeholder 1"/>
+          <p:cNvSpPr>
+            <a:spLocks noGrp="1" noRot="1" noChangeAspect="1"/>
+          </p:cNvSpPr>
+          <p:nvPr>
+            <p:ph type="sldImg"/>
+          </p:nvPr>
+        </p:nvSpPr>
+        <p:spPr/>
+      </p:sp>
+      <p:sp>
+        <p:nvSpPr>
+          <p:cNvPr id="3" name="Notes Placeholder 2"/>
+          <p:cNvSpPr>
+            <a:spLocks noGrp="1"/>
+          </p:cNvSpPr>
+          <p:nvPr>
+            <p:ph type="body" idx="1"/>
+          </p:nvPr>
+        </p:nvSpPr>
+        <p:spPr/>
+        <p:txBody>
+          <a:bodyPr/>
+          <a:lstStyle/>
+          <a:p>
+            <a:r>
+              <a:rPr lang="en-US" dirty="0"/>
+              <a:t>ANS: count ones, then subtract from 32</a:t>
+            </a:r>
+          </a:p>
+          <a:p>
+            <a:r>
+              <a:rPr lang="pt-BR" dirty="0"/>
+              <a:t>Or </a:t>
+            </a:r>
+            <a:r>
+              <a:rPr lang="en-US" dirty="0"/>
+              <a:t>Invert r0 to get r4, then count 0’s in r4</a:t>
+            </a:r>
+          </a:p>
+          <a:p>
+            <a:endParaRPr lang="en-US" dirty="0"/>
+          </a:p>
+        </p:txBody>
+      </p:sp>
+      <p:sp>
+        <p:nvSpPr>
+          <p:cNvPr id="4" name="Slide Number Placeholder 3"/>
+          <p:cNvSpPr>
+            <a:spLocks noGrp="1"/>
+          </p:cNvSpPr>
+          <p:nvPr>
+            <p:ph type="sldNum" sz="quarter" idx="5"/>
+          </p:nvPr>
+        </p:nvSpPr>
+        <p:spPr/>
+        <p:txBody>
+          <a:bodyPr/>
+          <a:lstStyle/>
+          <a:p>
+            <a:fld id="{1B0C9D69-9831-4844-8B1E-062B2DA58B0D}" type="slidenum">
+              <a:rPr lang="en-US" smtClean="0"/>
+              <a:pPr/>
+              <a:t>32</a:t>
+            </a:fld>
+            <a:endParaRPr lang="en-US"/>
+          </a:p>
+        </p:txBody>
+      </p:sp>
+    </p:spTree>
+    <p:extLst>
+      <p:ext uri="{BB962C8B-B14F-4D97-AF65-F5344CB8AC3E}">
+        <p14:creationId xmlns:p14="http://schemas.microsoft.com/office/powerpoint/2010/main" val="1182014578"/>
+      </p:ext>
+    </p:extLst>
+  </p:cSld>
+  <p:clrMapOvr>
+    <a:masterClrMapping/>
+  </p:clrMapOvr>
+</p:notes>
+</file>
+
+<file path=ppt/notesSlides/notesSlide11.xml><?xml version="1.0" encoding="utf-8"?>
 <p:notes xmlns:a="http://schemas.openxmlformats.org/drawingml/2006/main" xmlns:r="http://schemas.openxmlformats.org/officeDocument/2006/relationships" xmlns:p="http://schemas.openxmlformats.org/presentationml/2006/main">
   <p:cSld>
     <p:spTree>
@@ -1689,7 +1043,7 @@
             <a:fld id="{1B0C9D69-9831-4844-8B1E-062B2DA58B0D}" type="slidenum">
               <a:rPr lang="en-US" smtClean="0"/>
               <a:pPr/>
-              <a:t>41</a:t>
+              <a:t>40</a:t>
             </a:fld>
             <a:endParaRPr lang="en-US"/>
           </a:p>
@@ -1699,131 +1053,6 @@
     <p:extLst>
       <p:ext uri="{BB962C8B-B14F-4D97-AF65-F5344CB8AC3E}">
         <p14:creationId xmlns:p14="http://schemas.microsoft.com/office/powerpoint/2010/main" val="3476219158"/>
-      </p:ext>
-    </p:extLst>
-  </p:cSld>
-  <p:clrMapOvr>
-    <a:masterClrMapping/>
-  </p:clrMapOvr>
-</p:notes>
-</file>
-
-<file path=ppt/notesSlides/notesSlide11.xml><?xml version="1.0" encoding="utf-8"?>
-<p:notes xmlns:a="http://schemas.openxmlformats.org/drawingml/2006/main" xmlns:r="http://schemas.openxmlformats.org/officeDocument/2006/relationships" xmlns:p="http://schemas.openxmlformats.org/presentationml/2006/main">
-  <p:cSld>
-    <p:spTree>
-      <p:nvGrpSpPr>
-        <p:cNvPr id="1" name=""/>
-        <p:cNvGrpSpPr/>
-        <p:nvPr/>
-      </p:nvGrpSpPr>
-      <p:grpSpPr>
-        <a:xfrm>
-          <a:off x="0" y="0"/>
-          <a:ext cx="0" cy="0"/>
-          <a:chOff x="0" y="0"/>
-          <a:chExt cx="0" cy="0"/>
-        </a:xfrm>
-      </p:grpSpPr>
-      <p:sp>
-        <p:nvSpPr>
-          <p:cNvPr id="2" name="Slide Image Placeholder 1"/>
-          <p:cNvSpPr>
-            <a:spLocks noGrp="1" noRot="1" noChangeAspect="1"/>
-          </p:cNvSpPr>
-          <p:nvPr>
-            <p:ph type="sldImg"/>
-          </p:nvPr>
-        </p:nvSpPr>
-        <p:spPr/>
-      </p:sp>
-      <p:sp>
-        <p:nvSpPr>
-          <p:cNvPr id="3" name="Notes Placeholder 2"/>
-          <p:cNvSpPr>
-            <a:spLocks noGrp="1"/>
-          </p:cNvSpPr>
-          <p:nvPr>
-            <p:ph type="body" idx="1"/>
-          </p:nvPr>
-        </p:nvSpPr>
-        <p:spPr/>
-        <p:txBody>
-          <a:bodyPr/>
-          <a:lstStyle/>
-          <a:p>
-            <a:pPr lvl="1"/>
-            <a:r>
-              <a:rPr lang="en-US" dirty="0"/>
-              <a:t>r0 = 0xFFFFFFFF</a:t>
-            </a:r>
-          </a:p>
-          <a:p>
-            <a:pPr lvl="1"/>
-            <a:r>
-              <a:rPr lang="en-US" dirty="0"/>
-              <a:t>r1 = 0x00000001</a:t>
-            </a:r>
-          </a:p>
-          <a:p>
-            <a:pPr lvl="1"/>
-            <a:r>
-              <a:rPr lang="en-US" dirty="0"/>
-              <a:t>r2 = 0x00000003</a:t>
-            </a:r>
-          </a:p>
-          <a:p>
-            <a:pPr lvl="1"/>
-            <a:r>
-              <a:rPr lang="en-US" dirty="0"/>
-              <a:t>r3 = 0xFFFFFFF0</a:t>
-            </a:r>
-          </a:p>
-          <a:p>
-            <a:endParaRPr lang="en-US" dirty="0"/>
-          </a:p>
-          <a:p>
-            <a:r>
-              <a:rPr lang="en-US" dirty="0"/>
-              <a:t>The N, Z, C, and V flags start out as zero.</a:t>
-            </a:r>
-          </a:p>
-          <a:p>
-            <a:r>
-              <a:rPr lang="en-US" dirty="0"/>
-              <a:t>After the execution of the following instructions, fill in the flag values. </a:t>
-            </a:r>
-          </a:p>
-        </p:txBody>
-      </p:sp>
-      <p:sp>
-        <p:nvSpPr>
-          <p:cNvPr id="4" name="Slide Number Placeholder 3"/>
-          <p:cNvSpPr>
-            <a:spLocks noGrp="1"/>
-          </p:cNvSpPr>
-          <p:nvPr>
-            <p:ph type="sldNum" sz="quarter" idx="5"/>
-          </p:nvPr>
-        </p:nvSpPr>
-        <p:spPr/>
-        <p:txBody>
-          <a:bodyPr/>
-          <a:lstStyle/>
-          <a:p>
-            <a:fld id="{1B0C9D69-9831-4844-8B1E-062B2DA58B0D}" type="slidenum">
-              <a:rPr lang="en-US" smtClean="0"/>
-              <a:pPr/>
-              <a:t>42</a:t>
-            </a:fld>
-            <a:endParaRPr lang="en-US"/>
-          </a:p>
-        </p:txBody>
-      </p:sp>
-    </p:spTree>
-    <p:extLst>
-      <p:ext uri="{BB962C8B-B14F-4D97-AF65-F5344CB8AC3E}">
-        <p14:creationId xmlns:p14="http://schemas.microsoft.com/office/powerpoint/2010/main" val="3497697715"/>
       </p:ext>
     </p:extLst>
   </p:cSld>
@@ -1877,30 +1106,47 @@
           <a:bodyPr/>
           <a:lstStyle/>
           <a:p>
+            <a:pPr lvl="1"/>
+            <a:r>
+              <a:rPr lang="en-US" dirty="0"/>
+              <a:t>r0 = 0xFFFFFFFF</a:t>
+            </a:r>
+          </a:p>
+          <a:p>
+            <a:pPr lvl="1"/>
+            <a:r>
+              <a:rPr lang="en-US" dirty="0"/>
+              <a:t>r1 = 0x00000001</a:t>
+            </a:r>
+          </a:p>
+          <a:p>
+            <a:pPr lvl="1"/>
+            <a:r>
+              <a:rPr lang="en-US" dirty="0"/>
+              <a:t>r2 = 0x00000003</a:t>
+            </a:r>
+          </a:p>
+          <a:p>
+            <a:pPr lvl="1"/>
+            <a:r>
+              <a:rPr lang="en-US" dirty="0"/>
+              <a:t>r3 = 0xFFFFFFF0</a:t>
+            </a:r>
+          </a:p>
+          <a:p>
             <a:endParaRPr lang="en-US" dirty="0"/>
           </a:p>
           <a:p>
             <a:r>
               <a:rPr lang="en-US" dirty="0"/>
-              <a:t>Suppose </a:t>
-            </a:r>
-          </a:p>
-          <a:p>
-            <a:pPr lvl="1"/>
+              <a:t>The N, Z, C, and V flags start out as zero.</a:t>
+            </a:r>
+          </a:p>
+          <a:p>
             <a:r>
               <a:rPr lang="en-US" dirty="0"/>
-              <a:t>r0 = 0xFFFFFFFF, r1 = 0x00000001, r2 = 0x00000000,</a:t>
-            </a:r>
-          </a:p>
-          <a:p>
-            <a:pPr lvl="1"/>
-            <a:r>
-              <a:rPr lang="en-US" dirty="0"/>
-              <a:t>NZCV = 0000 initially</a:t>
-            </a:r>
-          </a:p>
-          <a:p>
-            <a:endParaRPr lang="en-US" dirty="0"/>
+              <a:t>After the execution of the following instructions, fill in the flag values. </a:t>
+            </a:r>
           </a:p>
         </p:txBody>
       </p:sp>
@@ -1922,7 +1168,115 @@
             <a:fld id="{1B0C9D69-9831-4844-8B1E-062B2DA58B0D}" type="slidenum">
               <a:rPr lang="en-US" smtClean="0"/>
               <a:pPr/>
-              <a:t>45</a:t>
+              <a:t>41</a:t>
+            </a:fld>
+            <a:endParaRPr lang="en-US"/>
+          </a:p>
+        </p:txBody>
+      </p:sp>
+    </p:spTree>
+    <p:extLst>
+      <p:ext uri="{BB962C8B-B14F-4D97-AF65-F5344CB8AC3E}">
+        <p14:creationId xmlns:p14="http://schemas.microsoft.com/office/powerpoint/2010/main" val="3497697715"/>
+      </p:ext>
+    </p:extLst>
+  </p:cSld>
+  <p:clrMapOvr>
+    <a:masterClrMapping/>
+  </p:clrMapOvr>
+</p:notes>
+</file>
+
+<file path=ppt/notesSlides/notesSlide13.xml><?xml version="1.0" encoding="utf-8"?>
+<p:notes xmlns:a="http://schemas.openxmlformats.org/drawingml/2006/main" xmlns:r="http://schemas.openxmlformats.org/officeDocument/2006/relationships" xmlns:p="http://schemas.openxmlformats.org/presentationml/2006/main">
+  <p:cSld>
+    <p:spTree>
+      <p:nvGrpSpPr>
+        <p:cNvPr id="1" name=""/>
+        <p:cNvGrpSpPr/>
+        <p:nvPr/>
+      </p:nvGrpSpPr>
+      <p:grpSpPr>
+        <a:xfrm>
+          <a:off x="0" y="0"/>
+          <a:ext cx="0" cy="0"/>
+          <a:chOff x="0" y="0"/>
+          <a:chExt cx="0" cy="0"/>
+        </a:xfrm>
+      </p:grpSpPr>
+      <p:sp>
+        <p:nvSpPr>
+          <p:cNvPr id="2" name="Slide Image Placeholder 1"/>
+          <p:cNvSpPr>
+            <a:spLocks noGrp="1" noRot="1" noChangeAspect="1"/>
+          </p:cNvSpPr>
+          <p:nvPr>
+            <p:ph type="sldImg"/>
+          </p:nvPr>
+        </p:nvSpPr>
+        <p:spPr/>
+      </p:sp>
+      <p:sp>
+        <p:nvSpPr>
+          <p:cNvPr id="3" name="Notes Placeholder 2"/>
+          <p:cNvSpPr>
+            <a:spLocks noGrp="1"/>
+          </p:cNvSpPr>
+          <p:nvPr>
+            <p:ph type="body" idx="1"/>
+          </p:nvPr>
+        </p:nvSpPr>
+        <p:spPr/>
+        <p:txBody>
+          <a:bodyPr/>
+          <a:lstStyle/>
+          <a:p>
+            <a:endParaRPr lang="en-US" dirty="0"/>
+          </a:p>
+          <a:p>
+            <a:r>
+              <a:rPr lang="en-US" dirty="0"/>
+              <a:t>Suppose </a:t>
+            </a:r>
+          </a:p>
+          <a:p>
+            <a:pPr lvl="1"/>
+            <a:r>
+              <a:rPr lang="en-US" dirty="0"/>
+              <a:t>r0 = 0xFFFFFFFF, r1 = 0x00000001, r2 = 0x00000000,</a:t>
+            </a:r>
+          </a:p>
+          <a:p>
+            <a:pPr lvl="1"/>
+            <a:r>
+              <a:rPr lang="en-US" dirty="0"/>
+              <a:t>NZCV = 0000 initially</a:t>
+            </a:r>
+          </a:p>
+          <a:p>
+            <a:endParaRPr lang="en-US" dirty="0"/>
+          </a:p>
+        </p:txBody>
+      </p:sp>
+      <p:sp>
+        <p:nvSpPr>
+          <p:cNvPr id="4" name="Slide Number Placeholder 3"/>
+          <p:cNvSpPr>
+            <a:spLocks noGrp="1"/>
+          </p:cNvSpPr>
+          <p:nvPr>
+            <p:ph type="sldNum" sz="quarter" idx="5"/>
+          </p:nvPr>
+        </p:nvSpPr>
+        <p:spPr/>
+        <p:txBody>
+          <a:bodyPr/>
+          <a:lstStyle/>
+          <a:p>
+            <a:fld id="{1B0C9D69-9831-4844-8B1E-062B2DA58B0D}" type="slidenum">
+              <a:rPr lang="en-US" smtClean="0"/>
+              <a:pPr/>
+              <a:t>44</a:t>
             </a:fld>
             <a:endParaRPr lang="en-US"/>
           </a:p>
@@ -3712,26 +3066,6 @@
           <a:bodyPr/>
           <a:lstStyle/>
           <a:p>
-            <a:r>
-              <a:rPr lang="en-US" dirty="0"/>
-              <a:t>Alternative solution:</a:t>
-            </a:r>
-          </a:p>
-          <a:p>
-            <a:pPr lvl="1"/>
-            <a:r>
-              <a:rPr lang="pt-BR" dirty="0"/>
-              <a:t>AND r1, r0, #0xF0</a:t>
-            </a:r>
-          </a:p>
-          <a:p>
-            <a:pPr lvl="1"/>
-            <a:r>
-              <a:rPr lang="pt-BR" dirty="0"/>
-              <a:t>MOV r1, r1, LSR #4</a:t>
-            </a:r>
-          </a:p>
-          <a:p>
             <a:endParaRPr lang="en-US" dirty="0"/>
           </a:p>
         </p:txBody>
@@ -3754,7 +3088,112 @@
             <a:fld id="{1B0C9D69-9831-4844-8B1E-062B2DA58B0D}" type="slidenum">
               <a:rPr lang="en-US" smtClean="0"/>
               <a:pPr/>
-              <a:t>23</a:t>
+              <a:t>18</a:t>
+            </a:fld>
+            <a:endParaRPr lang="en-US"/>
+          </a:p>
+        </p:txBody>
+      </p:sp>
+    </p:spTree>
+    <p:extLst>
+      <p:ext uri="{BB962C8B-B14F-4D97-AF65-F5344CB8AC3E}">
+        <p14:creationId xmlns:p14="http://schemas.microsoft.com/office/powerpoint/2010/main" val="625572252"/>
+      </p:ext>
+    </p:extLst>
+  </p:cSld>
+  <p:clrMapOvr>
+    <a:masterClrMapping/>
+  </p:clrMapOvr>
+</p:notes>
+</file>
+
+<file path=ppt/notesSlides/notesSlide5.xml><?xml version="1.0" encoding="utf-8"?>
+<p:notes xmlns:a="http://schemas.openxmlformats.org/drawingml/2006/main" xmlns:r="http://schemas.openxmlformats.org/officeDocument/2006/relationships" xmlns:p="http://schemas.openxmlformats.org/presentationml/2006/main">
+  <p:cSld>
+    <p:spTree>
+      <p:nvGrpSpPr>
+        <p:cNvPr id="1" name=""/>
+        <p:cNvGrpSpPr/>
+        <p:nvPr/>
+      </p:nvGrpSpPr>
+      <p:grpSpPr>
+        <a:xfrm>
+          <a:off x="0" y="0"/>
+          <a:ext cx="0" cy="0"/>
+          <a:chOff x="0" y="0"/>
+          <a:chExt cx="0" cy="0"/>
+        </a:xfrm>
+      </p:grpSpPr>
+      <p:sp>
+        <p:nvSpPr>
+          <p:cNvPr id="2" name="Slide Image Placeholder 1"/>
+          <p:cNvSpPr>
+            <a:spLocks noGrp="1" noRot="1" noChangeAspect="1"/>
+          </p:cNvSpPr>
+          <p:nvPr>
+            <p:ph type="sldImg"/>
+          </p:nvPr>
+        </p:nvSpPr>
+        <p:spPr/>
+      </p:sp>
+      <p:sp>
+        <p:nvSpPr>
+          <p:cNvPr id="3" name="Notes Placeholder 2"/>
+          <p:cNvSpPr>
+            <a:spLocks noGrp="1"/>
+          </p:cNvSpPr>
+          <p:nvPr>
+            <p:ph type="body" idx="1"/>
+          </p:nvPr>
+        </p:nvSpPr>
+        <p:spPr/>
+        <p:txBody>
+          <a:bodyPr/>
+          <a:lstStyle/>
+          <a:p>
+            <a:r>
+              <a:rPr lang="en-US" dirty="0"/>
+              <a:t>Alternative solution:</a:t>
+            </a:r>
+          </a:p>
+          <a:p>
+            <a:pPr lvl="1"/>
+            <a:r>
+              <a:rPr lang="pt-BR" dirty="0"/>
+              <a:t>AND r1, r0, #0xF0</a:t>
+            </a:r>
+          </a:p>
+          <a:p>
+            <a:pPr lvl="1"/>
+            <a:r>
+              <a:rPr lang="pt-BR" dirty="0"/>
+              <a:t>MOV r1, r1, LSR #4</a:t>
+            </a:r>
+          </a:p>
+          <a:p>
+            <a:endParaRPr lang="en-US" dirty="0"/>
+          </a:p>
+        </p:txBody>
+      </p:sp>
+      <p:sp>
+        <p:nvSpPr>
+          <p:cNvPr id="4" name="Slide Number Placeholder 3"/>
+          <p:cNvSpPr>
+            <a:spLocks noGrp="1"/>
+          </p:cNvSpPr>
+          <p:nvPr>
+            <p:ph type="sldNum" sz="quarter" idx="5"/>
+          </p:nvPr>
+        </p:nvSpPr>
+        <p:spPr/>
+        <p:txBody>
+          <a:bodyPr/>
+          <a:lstStyle/>
+          <a:p>
+            <a:fld id="{1B0C9D69-9831-4844-8B1E-062B2DA58B0D}" type="slidenum">
+              <a:rPr lang="en-US" smtClean="0"/>
+              <a:pPr/>
+              <a:t>22</a:t>
             </a:fld>
             <a:endParaRPr lang="en-US"/>
           </a:p>
@@ -3773,7 +3212,7 @@
 </p:notes>
 </file>
 
-<file path=ppt/notesSlides/notesSlide5.xml><?xml version="1.0" encoding="utf-8"?>
+<file path=ppt/notesSlides/notesSlide6.xml><?xml version="1.0" encoding="utf-8"?>
 <p:notes xmlns:a="http://schemas.openxmlformats.org/drawingml/2006/main" xmlns:r="http://schemas.openxmlformats.org/officeDocument/2006/relationships" xmlns:p="http://schemas.openxmlformats.org/presentationml/2006/main">
   <p:cSld>
     <p:spTree>
@@ -3905,7 +3344,7 @@
             <a:fld id="{1B0C9D69-9831-4844-8B1E-062B2DA58B0D}" type="slidenum">
               <a:rPr lang="en-US" smtClean="0"/>
               <a:pPr/>
-              <a:t>24</a:t>
+              <a:t>23</a:t>
             </a:fld>
             <a:endParaRPr lang="en-US"/>
           </a:p>
@@ -3924,7 +3363,7 @@
 </p:notes>
 </file>
 
-<file path=ppt/notesSlides/notesSlide6.xml><?xml version="1.0" encoding="utf-8"?>
+<file path=ppt/notesSlides/notesSlide7.xml><?xml version="1.0" encoding="utf-8"?>
 <p:notes xmlns:a="http://schemas.openxmlformats.org/drawingml/2006/main" xmlns:r="http://schemas.openxmlformats.org/officeDocument/2006/relationships" xmlns:p="http://schemas.openxmlformats.org/presentationml/2006/main">
   <p:cSld>
     <p:spTree>
@@ -4014,7 +3453,7 @@
             <a:fld id="{1B0C9D69-9831-4844-8B1E-062B2DA58B0D}" type="slidenum">
               <a:rPr lang="en-US" smtClean="0"/>
               <a:pPr/>
-              <a:t>25</a:t>
+              <a:t>24</a:t>
             </a:fld>
             <a:endParaRPr lang="en-US"/>
           </a:p>
@@ -4033,7 +3472,7 @@
 </p:notes>
 </file>
 
-<file path=ppt/notesSlides/notesSlide7.xml><?xml version="1.0" encoding="utf-8"?>
+<file path=ppt/notesSlides/notesSlide8.xml><?xml version="1.0" encoding="utf-8"?>
 <p:notes xmlns:a="http://schemas.openxmlformats.org/drawingml/2006/main" xmlns:r="http://schemas.openxmlformats.org/officeDocument/2006/relationships" xmlns:p="http://schemas.openxmlformats.org/presentationml/2006/main">
   <p:cSld>
     <p:spTree>
@@ -4127,7 +3566,7 @@
             <a:fld id="{1B0C9D69-9831-4844-8B1E-062B2DA58B0D}" type="slidenum">
               <a:rPr lang="en-US" smtClean="0"/>
               <a:pPr/>
-              <a:t>27</a:t>
+              <a:t>26</a:t>
             </a:fld>
             <a:endParaRPr lang="en-US"/>
           </a:p>
@@ -4146,7 +3585,7 @@
 </p:notes>
 </file>
 
-<file path=ppt/notesSlides/notesSlide8.xml><?xml version="1.0" encoding="utf-8"?>
+<file path=ppt/notesSlides/notesSlide9.xml><?xml version="1.0" encoding="utf-8"?>
 <p:notes xmlns:a="http://schemas.openxmlformats.org/drawingml/2006/main" xmlns:r="http://schemas.openxmlformats.org/officeDocument/2006/relationships" xmlns:p="http://schemas.openxmlformats.org/presentationml/2006/main">
   <p:cSld>
     <p:spTree>
@@ -4240,7 +3679,7 @@
             <a:fld id="{1B0C9D69-9831-4844-8B1E-062B2DA58B0D}" type="slidenum">
               <a:rPr lang="en-US" smtClean="0"/>
               <a:pPr/>
-              <a:t>28</a:t>
+              <a:t>27</a:t>
             </a:fld>
             <a:endParaRPr lang="en-US"/>
           </a:p>
@@ -4250,107 +3689,6 @@
     <p:extLst>
       <p:ext uri="{BB962C8B-B14F-4D97-AF65-F5344CB8AC3E}">
         <p14:creationId xmlns:p14="http://schemas.microsoft.com/office/powerpoint/2010/main" val="2155631793"/>
-      </p:ext>
-    </p:extLst>
-  </p:cSld>
-  <p:clrMapOvr>
-    <a:masterClrMapping/>
-  </p:clrMapOvr>
-</p:notes>
-</file>
-
-<file path=ppt/notesSlides/notesSlide9.xml><?xml version="1.0" encoding="utf-8"?>
-<p:notes xmlns:a="http://schemas.openxmlformats.org/drawingml/2006/main" xmlns:r="http://schemas.openxmlformats.org/officeDocument/2006/relationships" xmlns:p="http://schemas.openxmlformats.org/presentationml/2006/main">
-  <p:cSld>
-    <p:spTree>
-      <p:nvGrpSpPr>
-        <p:cNvPr id="1" name=""/>
-        <p:cNvGrpSpPr/>
-        <p:nvPr/>
-      </p:nvGrpSpPr>
-      <p:grpSpPr>
-        <a:xfrm>
-          <a:off x="0" y="0"/>
-          <a:ext cx="0" cy="0"/>
-          <a:chOff x="0" y="0"/>
-          <a:chExt cx="0" cy="0"/>
-        </a:xfrm>
-      </p:grpSpPr>
-      <p:sp>
-        <p:nvSpPr>
-          <p:cNvPr id="2" name="Slide Image Placeholder 1"/>
-          <p:cNvSpPr>
-            <a:spLocks noGrp="1" noRot="1" noChangeAspect="1"/>
-          </p:cNvSpPr>
-          <p:nvPr>
-            <p:ph type="sldImg"/>
-          </p:nvPr>
-        </p:nvSpPr>
-        <p:spPr/>
-      </p:sp>
-      <p:sp>
-        <p:nvSpPr>
-          <p:cNvPr id="3" name="Notes Placeholder 2"/>
-          <p:cNvSpPr>
-            <a:spLocks noGrp="1"/>
-          </p:cNvSpPr>
-          <p:nvPr>
-            <p:ph type="body" idx="1"/>
-          </p:nvPr>
-        </p:nvSpPr>
-        <p:spPr/>
-        <p:txBody>
-          <a:bodyPr/>
-          <a:lstStyle/>
-          <a:p>
-            <a:r>
-              <a:rPr lang="en-US" dirty="0"/>
-              <a:t>ANS: count ones, then subtract from 32</a:t>
-            </a:r>
-          </a:p>
-          <a:p>
-            <a:r>
-              <a:rPr lang="pt-BR" dirty="0"/>
-              <a:t>Or </a:t>
-            </a:r>
-            <a:r>
-              <a:rPr lang="en-US" dirty="0"/>
-              <a:t>Invert r0 to get r4, then count 0’s in r4</a:t>
-            </a:r>
-          </a:p>
-          <a:p>
-            <a:endParaRPr lang="en-US" dirty="0"/>
-          </a:p>
-        </p:txBody>
-      </p:sp>
-      <p:sp>
-        <p:nvSpPr>
-          <p:cNvPr id="4" name="Slide Number Placeholder 3"/>
-          <p:cNvSpPr>
-            <a:spLocks noGrp="1"/>
-          </p:cNvSpPr>
-          <p:nvPr>
-            <p:ph type="sldNum" sz="quarter" idx="5"/>
-          </p:nvPr>
-        </p:nvSpPr>
-        <p:spPr/>
-        <p:txBody>
-          <a:bodyPr/>
-          <a:lstStyle/>
-          <a:p>
-            <a:fld id="{1B0C9D69-9831-4844-8B1E-062B2DA58B0D}" type="slidenum">
-              <a:rPr lang="en-US" smtClean="0"/>
-              <a:pPr/>
-              <a:t>33</a:t>
-            </a:fld>
-            <a:endParaRPr lang="en-US"/>
-          </a:p>
-        </p:txBody>
-      </p:sp>
-    </p:spTree>
-    <p:extLst>
-      <p:ext uri="{BB962C8B-B14F-4D97-AF65-F5344CB8AC3E}">
-        <p14:creationId xmlns:p14="http://schemas.microsoft.com/office/powerpoint/2010/main" val="1182014578"/>
       </p:ext>
     </p:extLst>
   </p:cSld>
@@ -4503,7 +3841,7 @@
             <a:fld id="{966FEA0E-C2DF-4252-97AD-54F2B7E07EAC}" type="datetime1">
               <a:rPr lang="en-US" smtClean="0"/>
               <a:pPr eaLnBrk="1" latinLnBrk="0" hangingPunct="1"/>
-              <a:t>10/26/2025</a:t>
+              <a:t>2/26/2026</a:t>
             </a:fld>
             <a:endParaRPr lang="en-US" sz="1600" dirty="0"/>
           </a:p>
@@ -4864,7 +4202,7 @@
             <a:fld id="{69EF9524-0CAA-4F98-BAC2-CE6B712F5E94}" type="datetime1">
               <a:rPr lang="en-US" smtClean="0"/>
               <a:pPr eaLnBrk="1" latinLnBrk="0" hangingPunct="1"/>
-              <a:t>10/26/2025</a:t>
+              <a:t>2/26/2026</a:t>
             </a:fld>
             <a:endParaRPr lang="en-US"/>
           </a:p>
@@ -5041,7 +4379,7 @@
             <a:fld id="{CB20516D-6F89-4C89-8307-32A716E22875}" type="datetime1">
               <a:rPr lang="en-US" smtClean="0"/>
               <a:pPr eaLnBrk="1" latinLnBrk="0" hangingPunct="1"/>
-              <a:t>10/26/2025</a:t>
+              <a:t>2/26/2026</a:t>
             </a:fld>
             <a:endParaRPr lang="en-US"/>
           </a:p>
@@ -5278,7 +4616,7 @@
             <a:fld id="{0CD88620-7329-4FC3-B65D-4EA691138F1B}" type="datetime1">
               <a:rPr lang="en-US" smtClean="0"/>
               <a:pPr eaLnBrk="1" latinLnBrk="0" hangingPunct="1"/>
-              <a:t>10/26/2025</a:t>
+              <a:t>2/26/2026</a:t>
             </a:fld>
             <a:endParaRPr lang="en-US" dirty="0"/>
           </a:p>
@@ -5549,7 +4887,7 @@
             <a:fld id="{0E46F3A1-5653-427D-9F78-56077401431A}" type="datetime1">
               <a:rPr lang="en-US" smtClean="0"/>
               <a:pPr eaLnBrk="1" latinLnBrk="0" hangingPunct="1"/>
-              <a:t>10/26/2025</a:t>
+              <a:t>2/26/2026</a:t>
             </a:fld>
             <a:endParaRPr lang="en-US" dirty="0"/>
           </a:p>
@@ -5771,7 +5109,7 @@
             <a:fld id="{CB67FC03-415A-45F0-B002-DF181377F7DC}" type="datetime1">
               <a:rPr lang="en-US" smtClean="0"/>
               <a:pPr eaLnBrk="1" latinLnBrk="0" hangingPunct="1"/>
-              <a:t>10/26/2025</a:t>
+              <a:t>2/26/2026</a:t>
             </a:fld>
             <a:endParaRPr lang="en-US"/>
           </a:p>
@@ -6125,7 +5463,7 @@
             <a:fld id="{1B6FC726-A0B4-4FC7-90F5-F17415A5C1A3}" type="datetime1">
               <a:rPr lang="en-US" smtClean="0"/>
               <a:pPr eaLnBrk="1" latinLnBrk="0" hangingPunct="1"/>
-              <a:t>10/26/2025</a:t>
+              <a:t>2/26/2026</a:t>
             </a:fld>
             <a:endParaRPr lang="en-US"/>
           </a:p>
@@ -6359,7 +5697,7 @@
             <a:fld id="{BE217211-C3F9-4892-9CC3-C7105638567D}" type="datetime1">
               <a:rPr lang="en-US" smtClean="0"/>
               <a:pPr eaLnBrk="1" latinLnBrk="0" hangingPunct="1"/>
-              <a:t>10/26/2025</a:t>
+              <a:t>2/26/2026</a:t>
             </a:fld>
             <a:endParaRPr lang="en-US"/>
           </a:p>
@@ -6502,7 +5840,7 @@
             <a:fld id="{BA713E6A-6B26-4373-A75B-EF395DC64F9E}" type="datetime1">
               <a:rPr lang="en-US" smtClean="0"/>
               <a:pPr eaLnBrk="1" latinLnBrk="0" hangingPunct="1"/>
-              <a:t>10/26/2025</a:t>
+              <a:t>2/26/2026</a:t>
             </a:fld>
             <a:endParaRPr lang="en-US"/>
           </a:p>
@@ -6781,7 +6119,7 @@
             <a:fld id="{57EB41EF-4260-415A-8DD6-FEDCC46E7EFC}" type="datetime1">
               <a:rPr lang="en-US" smtClean="0"/>
               <a:pPr eaLnBrk="1" latinLnBrk="0" hangingPunct="1"/>
-              <a:t>10/26/2025</a:t>
+              <a:t>2/26/2026</a:t>
             </a:fld>
             <a:endParaRPr lang="en-US"/>
           </a:p>
@@ -7190,7 +6528,7 @@
             <a:fld id="{6BDA80A0-06CC-4492-94A0-E8516751045E}" type="datetime1">
               <a:rPr lang="en-US" smtClean="0"/>
               <a:pPr eaLnBrk="1" latinLnBrk="0" hangingPunct="1"/>
-              <a:t>10/26/2025</a:t>
+              <a:t>2/26/2026</a:t>
             </a:fld>
             <a:endParaRPr lang="en-US"/>
           </a:p>
@@ -7529,7 +6867,7 @@
             <a:fld id="{A25B5B4B-57EE-495D-8E74-A657CFD8BB6C}" type="datetime1">
               <a:rPr lang="en-US" smtClean="0"/>
               <a:pPr eaLnBrk="1" latinLnBrk="0" hangingPunct="1"/>
-              <a:t>10/26/2025</a:t>
+              <a:t>2/26/2026</a:t>
             </a:fld>
             <a:endParaRPr lang="en-US" sz="1400" dirty="0">
               <a:solidFill>
@@ -9670,14 +9008,21 @@
             <p:ph sz="quarter" idx="1"/>
           </p:nvPr>
         </p:nvSpPr>
-        <p:spPr/>
+        <p:spPr>
+          <a:xfrm>
+            <a:off x="457200" y="1219200"/>
+            <a:ext cx="8229600" cy="5257800"/>
+          </a:xfrm>
+        </p:spPr>
         <p:txBody>
-          <a:bodyPr/>
+          <a:bodyPr>
+            <a:normAutofit fontScale="92500" lnSpcReduction="20000"/>
+          </a:bodyPr>
           <a:lstStyle/>
           <a:p>
             <a:r>
               <a:rPr lang="pt-BR" dirty="0"/>
-              <a:t>Q2:</a:t>
+              <a:t>Q2.1:</a:t>
             </a:r>
           </a:p>
           <a:p>
@@ -9720,6 +9065,51 @@
               <a:rPr lang="en-US" dirty="0"/>
               <a:t>In decimal: 1024 ÷ 2² = 256 (Not required for exam)</a:t>
             </a:r>
+          </a:p>
+          <a:p>
+            <a:r>
+              <a:rPr lang="pt-BR" dirty="0"/>
+              <a:t>Q2,2:</a:t>
+            </a:r>
+          </a:p>
+          <a:p>
+            <a:pPr lvl="1"/>
+            <a:r>
+              <a:rPr lang="pt-BR" dirty="0"/>
+              <a:t>LDR r0, =0x00000400</a:t>
+            </a:r>
+          </a:p>
+          <a:p>
+            <a:pPr lvl="1"/>
+            <a:r>
+              <a:rPr lang="pt-BR" dirty="0"/>
+              <a:t>MOV r0, r0, ASR 2</a:t>
+            </a:r>
+          </a:p>
+          <a:p>
+            <a:r>
+              <a:rPr lang="pt-BR" dirty="0"/>
+              <a:t>ANS:</a:t>
+            </a:r>
+          </a:p>
+          <a:p>
+            <a:pPr lvl="1"/>
+            <a:r>
+              <a:rPr lang="pt-BR" dirty="0"/>
+              <a:t>r0 = 0x00000100 (LSR and ASR have no difference for positive numbers)</a:t>
+            </a:r>
+          </a:p>
+          <a:p>
+            <a:pPr lvl="1"/>
+            <a:r>
+              <a:rPr lang="en-US" dirty="0"/>
+              <a:t>In decimal: 1024 ÷ 2² = 256 (Not required for exam)</a:t>
+            </a:r>
+            <a:endParaRPr lang="pt-BR" dirty="0"/>
+          </a:p>
+          <a:p>
+            <a:pPr lvl="1"/>
+            <a:endParaRPr lang="en-US" dirty="0"/>
           </a:p>
         </p:txBody>
       </p:sp>
@@ -9829,12 +9219,14 @@
         </p:nvSpPr>
         <p:spPr/>
         <p:txBody>
-          <a:bodyPr/>
+          <a:bodyPr>
+            <a:normAutofit fontScale="92500" lnSpcReduction="20000"/>
+          </a:bodyPr>
           <a:lstStyle/>
           <a:p>
             <a:r>
               <a:rPr lang="pt-BR" dirty="0"/>
-              <a:t>Q3:</a:t>
+              <a:t>Q3.1:</a:t>
             </a:r>
           </a:p>
           <a:p>
@@ -9894,6 +9286,89 @@
               <a:rPr lang="en-US" dirty="0"/>
               <a:t>In decimal: 4,294,951,424 ÷ 4 = 1,073,737,728 (Not required for exam)</a:t>
             </a:r>
+          </a:p>
+          <a:p>
+            <a:r>
+              <a:rPr lang="pt-BR" dirty="0"/>
+              <a:t>Q3.2:</a:t>
+            </a:r>
+          </a:p>
+          <a:p>
+            <a:pPr lvl="1"/>
+            <a:r>
+              <a:rPr lang="pt-BR" dirty="0"/>
+              <a:t>LDR r0, =</a:t>
+            </a:r>
+            <a:r>
+              <a:rPr lang="en-US" dirty="0"/>
+              <a:t>0xFFFFC000</a:t>
+            </a:r>
+          </a:p>
+          <a:p>
+            <a:pPr lvl="1"/>
+            <a:r>
+              <a:rPr lang="pt-BR" dirty="0"/>
+              <a:t>MOV r0, r0, </a:t>
+            </a:r>
+            <a:r>
+              <a:rPr lang="pt-BR" dirty="0">
+                <a:solidFill>
+                  <a:srgbClr val="FF0000"/>
+                </a:solidFill>
+              </a:rPr>
+              <a:t>ASR</a:t>
+            </a:r>
+            <a:r>
+              <a:rPr lang="pt-BR" dirty="0"/>
+              <a:t> 2</a:t>
+            </a:r>
+          </a:p>
+          <a:p>
+            <a:r>
+              <a:rPr lang="pt-BR" dirty="0"/>
+              <a:t>ANS:</a:t>
+            </a:r>
+          </a:p>
+          <a:p>
+            <a:pPr lvl="1"/>
+            <a:r>
+              <a:rPr lang="en-US" dirty="0"/>
+              <a:t>r0 = </a:t>
+            </a:r>
+            <a:r>
+              <a:rPr lang="en-US" dirty="0">
+                <a:solidFill>
+                  <a:srgbClr val="FF0000"/>
+                </a:solidFill>
+              </a:rPr>
+              <a:t>11</a:t>
+            </a:r>
+            <a:r>
+              <a:rPr lang="en-US" dirty="0"/>
+              <a:t>11 1111 1111 1111 1111 1111 0000 0000 = 0x</a:t>
+            </a:r>
+            <a:r>
+              <a:rPr lang="en-US" dirty="0">
+                <a:solidFill>
+                  <a:srgbClr val="FF0000"/>
+                </a:solidFill>
+              </a:rPr>
+              <a:t>F</a:t>
+            </a:r>
+            <a:r>
+              <a:rPr lang="en-US" dirty="0"/>
+              <a:t>FFFF000</a:t>
+            </a:r>
+          </a:p>
+          <a:p>
+            <a:pPr lvl="1"/>
+            <a:r>
+              <a:rPr lang="en-US" dirty="0"/>
+              <a:t>In decimal: −16384 ÷ 4 = −4096 (Not required for exam)</a:t>
+            </a:r>
+          </a:p>
+          <a:p>
+            <a:endParaRPr lang="en-US" dirty="0"/>
           </a:p>
           <a:p>
             <a:endParaRPr lang="pt-BR" dirty="0"/>
@@ -10415,192 +9890,6 @@
   <p:cSld>
     <p:spTree>
       <p:nvGrpSpPr>
-        <p:cNvPr id="1" name="">
-          <a:extLst>
-            <a:ext uri="{FF2B5EF4-FFF2-40B4-BE49-F238E27FC236}">
-              <a16:creationId xmlns:a16="http://schemas.microsoft.com/office/drawing/2014/main" id="{0F4780EF-5EA1-3126-9F72-DBC3BB5CA814}"/>
-            </a:ext>
-          </a:extLst>
-        </p:cNvPr>
-        <p:cNvGrpSpPr/>
-        <p:nvPr/>
-      </p:nvGrpSpPr>
-      <p:grpSpPr>
-        <a:xfrm>
-          <a:off x="0" y="0"/>
-          <a:ext cx="0" cy="0"/>
-          <a:chOff x="0" y="0"/>
-          <a:chExt cx="0" cy="0"/>
-        </a:xfrm>
-      </p:grpSpPr>
-      <p:sp>
-        <p:nvSpPr>
-          <p:cNvPr id="2" name="Title 1">
-            <a:extLst>
-              <a:ext uri="{FF2B5EF4-FFF2-40B4-BE49-F238E27FC236}">
-                <a16:creationId xmlns:a16="http://schemas.microsoft.com/office/drawing/2014/main" id="{866D28A9-784B-2788-2972-41B5BBF91658}"/>
-              </a:ext>
-            </a:extLst>
-          </p:cNvPr>
-          <p:cNvSpPr>
-            <a:spLocks noGrp="1"/>
-          </p:cNvSpPr>
-          <p:nvPr>
-            <p:ph type="title"/>
-          </p:nvPr>
-        </p:nvSpPr>
-        <p:spPr/>
-        <p:txBody>
-          <a:bodyPr/>
-          <a:lstStyle/>
-          <a:p>
-            <a:r>
-              <a:rPr lang="en-US" dirty="0"/>
-              <a:t>Q4 ANS</a:t>
-            </a:r>
-          </a:p>
-        </p:txBody>
-      </p:sp>
-      <p:sp>
-        <p:nvSpPr>
-          <p:cNvPr id="3" name="Slide Number Placeholder 2">
-            <a:extLst>
-              <a:ext uri="{FF2B5EF4-FFF2-40B4-BE49-F238E27FC236}">
-                <a16:creationId xmlns:a16="http://schemas.microsoft.com/office/drawing/2014/main" id="{DB4A7CFC-639E-5CD7-AD17-ED109B732CF8}"/>
-              </a:ext>
-            </a:extLst>
-          </p:cNvPr>
-          <p:cNvSpPr>
-            <a:spLocks noGrp="1"/>
-          </p:cNvSpPr>
-          <p:nvPr>
-            <p:ph type="sldNum" sz="quarter" idx="12"/>
-          </p:nvPr>
-        </p:nvSpPr>
-        <p:spPr/>
-        <p:txBody>
-          <a:bodyPr/>
-          <a:lstStyle/>
-          <a:p>
-            <a:fld id="{EA7C8D44-3667-46F6-9772-CC52308E2A7F}" type="slidenum">
-              <a:rPr kumimoji="0" lang="en-US" smtClean="0"/>
-              <a:pPr/>
-              <a:t>20</a:t>
-            </a:fld>
-            <a:endParaRPr kumimoji="0" lang="en-US" dirty="0"/>
-          </a:p>
-        </p:txBody>
-      </p:sp>
-      <p:sp>
-        <p:nvSpPr>
-          <p:cNvPr id="4" name="Content Placeholder 3">
-            <a:extLst>
-              <a:ext uri="{FF2B5EF4-FFF2-40B4-BE49-F238E27FC236}">
-                <a16:creationId xmlns:a16="http://schemas.microsoft.com/office/drawing/2014/main" id="{8BA53D22-7664-ED5A-1A06-11937BAAD832}"/>
-              </a:ext>
-            </a:extLst>
-          </p:cNvPr>
-          <p:cNvSpPr>
-            <a:spLocks noGrp="1"/>
-          </p:cNvSpPr>
-          <p:nvPr>
-            <p:ph sz="quarter" idx="1"/>
-          </p:nvPr>
-        </p:nvSpPr>
-        <p:spPr/>
-        <p:txBody>
-          <a:bodyPr/>
-          <a:lstStyle/>
-          <a:p>
-            <a:r>
-              <a:rPr lang="pt-BR" dirty="0"/>
-              <a:t>Q3:</a:t>
-            </a:r>
-          </a:p>
-          <a:p>
-            <a:pPr lvl="1"/>
-            <a:r>
-              <a:rPr lang="pt-BR" dirty="0"/>
-              <a:t>LDR r0, =</a:t>
-            </a:r>
-            <a:r>
-              <a:rPr lang="en-US" dirty="0"/>
-              <a:t>0xFFFFC000</a:t>
-            </a:r>
-          </a:p>
-          <a:p>
-            <a:pPr lvl="1"/>
-            <a:r>
-              <a:rPr lang="pt-BR" dirty="0"/>
-              <a:t>MOV r0, r0, ASR 2</a:t>
-            </a:r>
-            <a:endParaRPr lang="en-US" dirty="0"/>
-          </a:p>
-          <a:p>
-            <a:r>
-              <a:rPr lang="pt-BR" dirty="0"/>
-              <a:t>ANS:</a:t>
-            </a:r>
-          </a:p>
-          <a:p>
-            <a:pPr lvl="1"/>
-            <a:r>
-              <a:rPr lang="en-US" dirty="0"/>
-              <a:t>Original r0 = 1111 1111 1111 1111 1111 1100 0000 0000</a:t>
-            </a:r>
-          </a:p>
-          <a:p>
-            <a:pPr lvl="1"/>
-            <a:r>
-              <a:rPr lang="en-US" dirty="0"/>
-              <a:t>After ASR 2, r0 = </a:t>
-            </a:r>
-            <a:r>
-              <a:rPr lang="en-US" dirty="0">
-                <a:solidFill>
-                  <a:srgbClr val="FF0000"/>
-                </a:solidFill>
-              </a:rPr>
-              <a:t>11</a:t>
-            </a:r>
-            <a:r>
-              <a:rPr lang="en-US" dirty="0"/>
-              <a:t>11 1111 1111 1111 1111 1111 0000 0000 = 0xFFFFFF00 (-256 in decimal)</a:t>
-            </a:r>
-          </a:p>
-          <a:p>
-            <a:pPr lvl="1"/>
-            <a:r>
-              <a:rPr lang="en-US" dirty="0"/>
-              <a:t>In decimal: -16384 ÷ 2² = -4096 (Not required for exam)</a:t>
-            </a:r>
-          </a:p>
-          <a:p>
-            <a:endParaRPr lang="pt-BR" dirty="0"/>
-          </a:p>
-          <a:p>
-            <a:endParaRPr lang="en-US" dirty="0"/>
-          </a:p>
-        </p:txBody>
-      </p:sp>
-    </p:spTree>
-    <p:extLst>
-      <p:ext uri="{BB962C8B-B14F-4D97-AF65-F5344CB8AC3E}">
-        <p14:creationId xmlns:p14="http://schemas.microsoft.com/office/powerpoint/2010/main" val="2531244333"/>
-      </p:ext>
-    </p:extLst>
-  </p:cSld>
-  <p:clrMapOvr>
-    <a:masterClrMapping/>
-  </p:clrMapOvr>
-</p:sld>
-</file>
-
-<file path=ppt/slides/slide21.xml><?xml version="1.0" encoding="utf-8"?>
-<p:sld xmlns:a="http://schemas.openxmlformats.org/drawingml/2006/main" xmlns:r="http://schemas.openxmlformats.org/officeDocument/2006/relationships" xmlns:p="http://schemas.openxmlformats.org/presentationml/2006/main">
-  <p:cSld>
-    <p:spTree>
-      <p:nvGrpSpPr>
         <p:cNvPr id="1" name=""/>
         <p:cNvGrpSpPr/>
         <p:nvPr/>
@@ -10665,7 +9954,7 @@
             <a:fld id="{EA7C8D44-3667-46F6-9772-CC52308E2A7F}" type="slidenum">
               <a:rPr kumimoji="0" lang="en-US" smtClean="0"/>
               <a:pPr/>
-              <a:t>21</a:t>
+              <a:t>20</a:t>
             </a:fld>
             <a:endParaRPr kumimoji="0" lang="en-US" dirty="0"/>
           </a:p>
@@ -10749,7 +10038,7 @@
 </p:sld>
 </file>
 
-<file path=ppt/slides/slide22.xml><?xml version="1.0" encoding="utf-8"?>
+<file path=ppt/slides/slide21.xml><?xml version="1.0" encoding="utf-8"?>
 <p:sld xmlns:a="http://schemas.openxmlformats.org/drawingml/2006/main" xmlns:r="http://schemas.openxmlformats.org/officeDocument/2006/relationships" xmlns:p="http://schemas.openxmlformats.org/presentationml/2006/main">
   <p:cSld>
     <p:spTree>
@@ -10818,7 +10107,7 @@
             <a:fld id="{EA7C8D44-3667-46F6-9772-CC52308E2A7F}" type="slidenum">
               <a:rPr kumimoji="0" lang="en-US" smtClean="0"/>
               <a:pPr/>
-              <a:t>22</a:t>
+              <a:t>21</a:t>
             </a:fld>
             <a:endParaRPr kumimoji="0" lang="en-US" dirty="0"/>
           </a:p>
@@ -10872,7 +10161,7 @@
 </p:sld>
 </file>
 
-<file path=ppt/slides/slide23.xml><?xml version="1.0" encoding="utf-8"?>
+<file path=ppt/slides/slide22.xml><?xml version="1.0" encoding="utf-8"?>
 <p:sld xmlns:a="http://schemas.openxmlformats.org/drawingml/2006/main" xmlns:r="http://schemas.openxmlformats.org/officeDocument/2006/relationships" xmlns:p="http://schemas.openxmlformats.org/presentationml/2006/main">
   <p:cSld>
     <p:spTree>
@@ -10941,7 +10230,7 @@
             <a:fld id="{EA7C8D44-3667-46F6-9772-CC52308E2A7F}" type="slidenum">
               <a:rPr kumimoji="0" lang="en-US" smtClean="0"/>
               <a:pPr/>
-              <a:t>23</a:t>
+              <a:t>22</a:t>
             </a:fld>
             <a:endParaRPr kumimoji="0" lang="en-US" dirty="0"/>
           </a:p>
@@ -11016,7 +10305,7 @@
 </p:sld>
 </file>
 
-<file path=ppt/slides/slide24.xml><?xml version="1.0" encoding="utf-8"?>
+<file path=ppt/slides/slide23.xml><?xml version="1.0" encoding="utf-8"?>
 <p:sld xmlns:a="http://schemas.openxmlformats.org/drawingml/2006/main" xmlns:r="http://schemas.openxmlformats.org/officeDocument/2006/relationships" xmlns:p="http://schemas.openxmlformats.org/presentationml/2006/main">
   <p:cSld>
     <p:spTree>
@@ -11091,7 +10380,7 @@
             <a:fld id="{EA7C8D44-3667-46F6-9772-CC52308E2A7F}" type="slidenum">
               <a:rPr kumimoji="0" lang="en-US" smtClean="0"/>
               <a:pPr/>
-              <a:t>24</a:t>
+              <a:t>23</a:t>
             </a:fld>
             <a:endParaRPr kumimoji="0" lang="en-US" dirty="0"/>
           </a:p>
@@ -11233,7 +10522,7 @@
 </p:sld>
 </file>
 
-<file path=ppt/slides/slide25.xml><?xml version="1.0" encoding="utf-8"?>
+<file path=ppt/slides/slide24.xml><?xml version="1.0" encoding="utf-8"?>
 <p:sld xmlns:a="http://schemas.openxmlformats.org/drawingml/2006/main" xmlns:r="http://schemas.openxmlformats.org/officeDocument/2006/relationships" xmlns:p="http://schemas.openxmlformats.org/presentationml/2006/main">
   <p:cSld>
     <p:spTree>
@@ -11308,7 +10597,7 @@
             <a:fld id="{EA7C8D44-3667-46F6-9772-CC52308E2A7F}" type="slidenum">
               <a:rPr kumimoji="0" lang="en-US" smtClean="0"/>
               <a:pPr/>
-              <a:t>25</a:t>
+              <a:t>24</a:t>
             </a:fld>
             <a:endParaRPr kumimoji="0" lang="en-US" dirty="0"/>
           </a:p>
@@ -11474,7 +10763,7 @@
 </p:sld>
 </file>
 
-<file path=ppt/slides/slide26.xml><?xml version="1.0" encoding="utf-8"?>
+<file path=ppt/slides/slide25.xml><?xml version="1.0" encoding="utf-8"?>
 <p:sld xmlns:a="http://schemas.openxmlformats.org/drawingml/2006/main" xmlns:r="http://schemas.openxmlformats.org/officeDocument/2006/relationships" xmlns:p="http://schemas.openxmlformats.org/presentationml/2006/main">
   <p:cSld>
     <p:spTree>
@@ -11543,7 +10832,7 @@
             <a:fld id="{EA7C8D44-3667-46F6-9772-CC52308E2A7F}" type="slidenum">
               <a:rPr kumimoji="0" lang="en-US" smtClean="0"/>
               <a:pPr/>
-              <a:t>26</a:t>
+              <a:t>25</a:t>
             </a:fld>
             <a:endParaRPr kumimoji="0" lang="en-US" dirty="0"/>
           </a:p>
@@ -11647,7 +10936,7 @@
 </p:sld>
 </file>
 
-<file path=ppt/slides/slide27.xml><?xml version="1.0" encoding="utf-8"?>
+<file path=ppt/slides/slide26.xml><?xml version="1.0" encoding="utf-8"?>
 <p:sld xmlns:a="http://schemas.openxmlformats.org/drawingml/2006/main" xmlns:r="http://schemas.openxmlformats.org/officeDocument/2006/relationships" xmlns:p="http://schemas.openxmlformats.org/presentationml/2006/main">
   <p:cSld>
     <p:spTree>
@@ -11722,7 +11011,7 @@
             <a:fld id="{EA7C8D44-3667-46F6-9772-CC52308E2A7F}" type="slidenum">
               <a:rPr kumimoji="0" lang="en-US" smtClean="0"/>
               <a:pPr/>
-              <a:t>27</a:t>
+              <a:t>26</a:t>
             </a:fld>
             <a:endParaRPr kumimoji="0" lang="en-US" dirty="0"/>
           </a:p>
@@ -11900,7 +11189,7 @@
 </p:sld>
 </file>
 
-<file path=ppt/slides/slide28.xml><?xml version="1.0" encoding="utf-8"?>
+<file path=ppt/slides/slide27.xml><?xml version="1.0" encoding="utf-8"?>
 <p:sld xmlns:a="http://schemas.openxmlformats.org/drawingml/2006/main" xmlns:r="http://schemas.openxmlformats.org/officeDocument/2006/relationships" xmlns:p="http://schemas.openxmlformats.org/presentationml/2006/main">
   <p:cSld>
     <p:spTree>
@@ -11975,7 +11264,7 @@
             <a:fld id="{EA7C8D44-3667-46F6-9772-CC52308E2A7F}" type="slidenum">
               <a:rPr kumimoji="0" lang="en-US" smtClean="0"/>
               <a:pPr/>
-              <a:t>28</a:t>
+              <a:t>27</a:t>
             </a:fld>
             <a:endParaRPr kumimoji="0" lang="en-US" dirty="0"/>
           </a:p>
@@ -12204,7 +11493,7 @@
 </p:sld>
 </file>
 
-<file path=ppt/slides/slide29.xml><?xml version="1.0" encoding="utf-8"?>
+<file path=ppt/slides/slide28.xml><?xml version="1.0" encoding="utf-8"?>
 <p:sld xmlns:a="http://schemas.openxmlformats.org/drawingml/2006/main" xmlns:r="http://schemas.openxmlformats.org/officeDocument/2006/relationships" xmlns:p="http://schemas.openxmlformats.org/presentationml/2006/main">
   <p:cSld>
     <p:spTree>
@@ -12273,7 +11562,7 @@
             <a:fld id="{EA7C8D44-3667-46F6-9772-CC52308E2A7F}" type="slidenum">
               <a:rPr kumimoji="0" lang="en-US" smtClean="0"/>
               <a:pPr/>
-              <a:t>29</a:t>
+              <a:t>28</a:t>
             </a:fld>
             <a:endParaRPr kumimoji="0" lang="en-US" dirty="0"/>
           </a:p>
@@ -12349,6 +11638,265 @@
     <p:extLst>
       <p:ext uri="{BB962C8B-B14F-4D97-AF65-F5344CB8AC3E}">
         <p14:creationId xmlns:p14="http://schemas.microsoft.com/office/powerpoint/2010/main" val="570184693"/>
+      </p:ext>
+    </p:extLst>
+  </p:cSld>
+  <p:clrMapOvr>
+    <a:masterClrMapping/>
+  </p:clrMapOvr>
+</p:sld>
+</file>
+
+<file path=ppt/slides/slide29.xml><?xml version="1.0" encoding="utf-8"?>
+<p:sld xmlns:a="http://schemas.openxmlformats.org/drawingml/2006/main" xmlns:r="http://schemas.openxmlformats.org/officeDocument/2006/relationships" xmlns:p="http://schemas.openxmlformats.org/presentationml/2006/main">
+  <p:cSld>
+    <p:spTree>
+      <p:nvGrpSpPr>
+        <p:cNvPr id="1" name="">
+          <a:extLst>
+            <a:ext uri="{FF2B5EF4-FFF2-40B4-BE49-F238E27FC236}">
+              <a16:creationId xmlns:a16="http://schemas.microsoft.com/office/drawing/2014/main" id="{7B027702-AA68-AFC9-05E8-6A7817689E7E}"/>
+            </a:ext>
+          </a:extLst>
+        </p:cNvPr>
+        <p:cNvGrpSpPr/>
+        <p:nvPr/>
+      </p:nvGrpSpPr>
+      <p:grpSpPr>
+        <a:xfrm>
+          <a:off x="0" y="0"/>
+          <a:ext cx="0" cy="0"/>
+          <a:chOff x="0" y="0"/>
+          <a:chExt cx="0" cy="0"/>
+        </a:xfrm>
+      </p:grpSpPr>
+      <p:sp>
+        <p:nvSpPr>
+          <p:cNvPr id="2" name="Title 1">
+            <a:extLst>
+              <a:ext uri="{FF2B5EF4-FFF2-40B4-BE49-F238E27FC236}">
+                <a16:creationId xmlns:a16="http://schemas.microsoft.com/office/drawing/2014/main" id="{D8B98FC1-052B-F011-D5E5-525504D762AF}"/>
+              </a:ext>
+            </a:extLst>
+          </p:cNvPr>
+          <p:cNvSpPr>
+            <a:spLocks noGrp="1"/>
+          </p:cNvSpPr>
+          <p:nvPr>
+            <p:ph type="title"/>
+          </p:nvPr>
+        </p:nvSpPr>
+        <p:spPr/>
+        <p:txBody>
+          <a:bodyPr/>
+          <a:lstStyle/>
+          <a:p>
+            <a:r>
+              <a:rPr lang="en-US" dirty="0"/>
+              <a:t>Multiply without MUL ANS</a:t>
+            </a:r>
+          </a:p>
+        </p:txBody>
+      </p:sp>
+      <p:sp>
+        <p:nvSpPr>
+          <p:cNvPr id="3" name="Slide Number Placeholder 2">
+            <a:extLst>
+              <a:ext uri="{FF2B5EF4-FFF2-40B4-BE49-F238E27FC236}">
+                <a16:creationId xmlns:a16="http://schemas.microsoft.com/office/drawing/2014/main" id="{BFA8F778-6A22-5F8A-A058-93D44EDFF849}"/>
+              </a:ext>
+            </a:extLst>
+          </p:cNvPr>
+          <p:cNvSpPr>
+            <a:spLocks noGrp="1"/>
+          </p:cNvSpPr>
+          <p:nvPr>
+            <p:ph type="sldNum" sz="quarter" idx="12"/>
+          </p:nvPr>
+        </p:nvSpPr>
+        <p:spPr/>
+        <p:txBody>
+          <a:bodyPr/>
+          <a:lstStyle/>
+          <a:p>
+            <a:fld id="{EA7C8D44-3667-46F6-9772-CC52308E2A7F}" type="slidenum">
+              <a:rPr kumimoji="0" lang="en-US" smtClean="0"/>
+              <a:pPr/>
+              <a:t>29</a:t>
+            </a:fld>
+            <a:endParaRPr kumimoji="0" lang="en-US" dirty="0"/>
+          </a:p>
+        </p:txBody>
+      </p:sp>
+      <p:sp>
+        <p:nvSpPr>
+          <p:cNvPr id="4" name="Content Placeholder 3">
+            <a:extLst>
+              <a:ext uri="{FF2B5EF4-FFF2-40B4-BE49-F238E27FC236}">
+                <a16:creationId xmlns:a16="http://schemas.microsoft.com/office/drawing/2014/main" id="{E7CAC4D7-2D14-2E25-93CD-623479AB15DB}"/>
+              </a:ext>
+            </a:extLst>
+          </p:cNvPr>
+          <p:cNvSpPr>
+            <a:spLocks noGrp="1"/>
+          </p:cNvSpPr>
+          <p:nvPr>
+            <p:ph sz="quarter" idx="1"/>
+          </p:nvPr>
+        </p:nvSpPr>
+        <p:spPr/>
+        <p:txBody>
+          <a:bodyPr>
+            <a:normAutofit fontScale="55000" lnSpcReduction="20000"/>
+          </a:bodyPr>
+          <a:lstStyle/>
+          <a:p>
+            <a:r>
+              <a:rPr lang="en-US" dirty="0"/>
+              <a:t>Without using MUL instruction, give instructions that multiply a register, r3 by:</a:t>
+            </a:r>
+          </a:p>
+          <a:p>
+            <a:pPr lvl="1"/>
+            <a:r>
+              <a:rPr lang="en-US" dirty="0"/>
+              <a:t>135</a:t>
+            </a:r>
+          </a:p>
+          <a:p>
+            <a:pPr lvl="1"/>
+            <a:r>
+              <a:rPr lang="en-US" dirty="0"/>
+              <a:t>153</a:t>
+            </a:r>
+          </a:p>
+          <a:p>
+            <a:pPr lvl="1"/>
+            <a:r>
+              <a:rPr lang="en-US" dirty="0"/>
+              <a:t>255</a:t>
+            </a:r>
+          </a:p>
+          <a:p>
+            <a:pPr lvl="1"/>
+            <a:r>
+              <a:rPr lang="en-US" dirty="0"/>
+              <a:t>18</a:t>
+            </a:r>
+          </a:p>
+          <a:p>
+            <a:pPr lvl="1"/>
+            <a:r>
+              <a:rPr lang="en-US" dirty="0"/>
+              <a:t>1025</a:t>
+            </a:r>
+          </a:p>
+          <a:p>
+            <a:r>
+              <a:rPr lang="en-US" dirty="0"/>
+              <a:t>ANS:  Decompose 135 = 128 + 4 + 2 + 1</a:t>
+            </a:r>
+          </a:p>
+          <a:p>
+            <a:pPr lvl="1"/>
+            <a:r>
+              <a:rPr lang="pt-BR" dirty="0"/>
+              <a:t>MOV   r0, r3, LSL #7    @ 128*r3</a:t>
+            </a:r>
+          </a:p>
+          <a:p>
+            <a:pPr lvl="1"/>
+            <a:r>
+              <a:rPr lang="pt-BR" dirty="0"/>
+              <a:t>ADD   r0, r0, r3, LSL #2 @ +4*r3  -&gt; 132*r3</a:t>
+            </a:r>
+          </a:p>
+          <a:p>
+            <a:pPr lvl="1"/>
+            <a:r>
+              <a:rPr lang="pt-BR" dirty="0"/>
+              <a:t>ADD   r0, r0, r3, LSL #1 @ +2*r3  -&gt; 134*r3</a:t>
+            </a:r>
+          </a:p>
+          <a:p>
+            <a:pPr lvl="1"/>
+            <a:r>
+              <a:rPr lang="pt-BR" dirty="0"/>
+              <a:t>ADD   r0, r0, r3         @ +1*r3  -&gt; 135*r3</a:t>
+            </a:r>
+          </a:p>
+          <a:p>
+            <a:r>
+              <a:rPr lang="en-US" dirty="0"/>
+              <a:t>Decompose 153 = (8 + 1) * (16 + 1)</a:t>
+            </a:r>
+          </a:p>
+          <a:p>
+            <a:pPr lvl="1"/>
+            <a:r>
+              <a:rPr lang="en-US" dirty="0"/>
+              <a:t>ADD r0, r3, r3, LSL#3   @ r0 = r3 + 8*r3 = 9*r3</a:t>
+            </a:r>
+            <a:br>
+              <a:rPr lang="en-US" dirty="0"/>
+            </a:br>
+            <a:r>
+              <a:rPr lang="en-US" dirty="0"/>
+              <a:t>ADD r0, r0, r0, LSL#4   @ r0 = 9*r3 + 16*9*r3 = 135*r3</a:t>
+            </a:r>
+          </a:p>
+          <a:p>
+            <a:r>
+              <a:rPr lang="en-US" dirty="0"/>
+              <a:t>Decompose 255 = 256 - 1</a:t>
+            </a:r>
+          </a:p>
+          <a:p>
+            <a:pPr lvl="1"/>
+            <a:r>
+              <a:rPr lang="en-US" dirty="0"/>
+              <a:t>RSB r0, r3, r3, LSL#8   @ r0 = 256*r3 - r3 = 255*r3</a:t>
+            </a:r>
+          </a:p>
+          <a:p>
+            <a:r>
+              <a:rPr lang="en-US" dirty="0"/>
+              <a:t>Decompose 1025=2^10+1:</a:t>
+            </a:r>
+          </a:p>
+          <a:p>
+            <a:pPr lvl="1"/>
+            <a:r>
+              <a:rPr lang="en-US" dirty="0"/>
+              <a:t>ADD r0, r3, r3, LSL#10   @ r0 = r3 + 1024*r3 = 1025*r3</a:t>
+            </a:r>
+          </a:p>
+          <a:p>
+            <a:r>
+              <a:rPr lang="en-US" dirty="0"/>
+              <a:t>Decompose 18 = (16 + 1) + 1</a:t>
+            </a:r>
+          </a:p>
+          <a:p>
+            <a:pPr lvl="1"/>
+            <a:r>
+              <a:rPr lang="en-US" dirty="0"/>
+              <a:t>ADD r0, r3, r3, LSL#4   @ r0 = r3 + 16*r3 = 17*r3</a:t>
+            </a:r>
+            <a:br>
+              <a:rPr lang="en-US" dirty="0"/>
+            </a:br>
+            <a:r>
+              <a:rPr lang="en-US" dirty="0"/>
+              <a:t>ADD r0, r0, r3          @ r0 = 17*r3 + r3 = 18*r3</a:t>
+            </a:r>
+          </a:p>
+        </p:txBody>
+      </p:sp>
+    </p:spTree>
+    <p:extLst>
+      <p:ext uri="{BB962C8B-B14F-4D97-AF65-F5344CB8AC3E}">
+        <p14:creationId xmlns:p14="http://schemas.microsoft.com/office/powerpoint/2010/main" val="210341446"/>
       </p:ext>
     </p:extLst>
   </p:cSld>
@@ -13912,265 +13460,6 @@
   <p:cSld>
     <p:spTree>
       <p:nvGrpSpPr>
-        <p:cNvPr id="1" name="">
-          <a:extLst>
-            <a:ext uri="{FF2B5EF4-FFF2-40B4-BE49-F238E27FC236}">
-              <a16:creationId xmlns:a16="http://schemas.microsoft.com/office/drawing/2014/main" id="{7B027702-AA68-AFC9-05E8-6A7817689E7E}"/>
-            </a:ext>
-          </a:extLst>
-        </p:cNvPr>
-        <p:cNvGrpSpPr/>
-        <p:nvPr/>
-      </p:nvGrpSpPr>
-      <p:grpSpPr>
-        <a:xfrm>
-          <a:off x="0" y="0"/>
-          <a:ext cx="0" cy="0"/>
-          <a:chOff x="0" y="0"/>
-          <a:chExt cx="0" cy="0"/>
-        </a:xfrm>
-      </p:grpSpPr>
-      <p:sp>
-        <p:nvSpPr>
-          <p:cNvPr id="2" name="Title 1">
-            <a:extLst>
-              <a:ext uri="{FF2B5EF4-FFF2-40B4-BE49-F238E27FC236}">
-                <a16:creationId xmlns:a16="http://schemas.microsoft.com/office/drawing/2014/main" id="{D8B98FC1-052B-F011-D5E5-525504D762AF}"/>
-              </a:ext>
-            </a:extLst>
-          </p:cNvPr>
-          <p:cNvSpPr>
-            <a:spLocks noGrp="1"/>
-          </p:cNvSpPr>
-          <p:nvPr>
-            <p:ph type="title"/>
-          </p:nvPr>
-        </p:nvSpPr>
-        <p:spPr/>
-        <p:txBody>
-          <a:bodyPr/>
-          <a:lstStyle/>
-          <a:p>
-            <a:r>
-              <a:rPr lang="en-US" dirty="0"/>
-              <a:t>Multiply without MUL ANS</a:t>
-            </a:r>
-          </a:p>
-        </p:txBody>
-      </p:sp>
-      <p:sp>
-        <p:nvSpPr>
-          <p:cNvPr id="3" name="Slide Number Placeholder 2">
-            <a:extLst>
-              <a:ext uri="{FF2B5EF4-FFF2-40B4-BE49-F238E27FC236}">
-                <a16:creationId xmlns:a16="http://schemas.microsoft.com/office/drawing/2014/main" id="{BFA8F778-6A22-5F8A-A058-93D44EDFF849}"/>
-              </a:ext>
-            </a:extLst>
-          </p:cNvPr>
-          <p:cNvSpPr>
-            <a:spLocks noGrp="1"/>
-          </p:cNvSpPr>
-          <p:nvPr>
-            <p:ph type="sldNum" sz="quarter" idx="12"/>
-          </p:nvPr>
-        </p:nvSpPr>
-        <p:spPr/>
-        <p:txBody>
-          <a:bodyPr/>
-          <a:lstStyle/>
-          <a:p>
-            <a:fld id="{EA7C8D44-3667-46F6-9772-CC52308E2A7F}" type="slidenum">
-              <a:rPr kumimoji="0" lang="en-US" smtClean="0"/>
-              <a:pPr/>
-              <a:t>30</a:t>
-            </a:fld>
-            <a:endParaRPr kumimoji="0" lang="en-US" dirty="0"/>
-          </a:p>
-        </p:txBody>
-      </p:sp>
-      <p:sp>
-        <p:nvSpPr>
-          <p:cNvPr id="4" name="Content Placeholder 3">
-            <a:extLst>
-              <a:ext uri="{FF2B5EF4-FFF2-40B4-BE49-F238E27FC236}">
-                <a16:creationId xmlns:a16="http://schemas.microsoft.com/office/drawing/2014/main" id="{E7CAC4D7-2D14-2E25-93CD-623479AB15DB}"/>
-              </a:ext>
-            </a:extLst>
-          </p:cNvPr>
-          <p:cNvSpPr>
-            <a:spLocks noGrp="1"/>
-          </p:cNvSpPr>
-          <p:nvPr>
-            <p:ph sz="quarter" idx="1"/>
-          </p:nvPr>
-        </p:nvSpPr>
-        <p:spPr/>
-        <p:txBody>
-          <a:bodyPr>
-            <a:normAutofit fontScale="55000" lnSpcReduction="20000"/>
-          </a:bodyPr>
-          <a:lstStyle/>
-          <a:p>
-            <a:r>
-              <a:rPr lang="en-US" dirty="0"/>
-              <a:t>Without using MUL instruction, give instructions that multiply a register, r3 by:</a:t>
-            </a:r>
-          </a:p>
-          <a:p>
-            <a:pPr lvl="1"/>
-            <a:r>
-              <a:rPr lang="en-US" dirty="0"/>
-              <a:t>135</a:t>
-            </a:r>
-          </a:p>
-          <a:p>
-            <a:pPr lvl="1"/>
-            <a:r>
-              <a:rPr lang="en-US" dirty="0"/>
-              <a:t>153</a:t>
-            </a:r>
-          </a:p>
-          <a:p>
-            <a:pPr lvl="1"/>
-            <a:r>
-              <a:rPr lang="en-US" dirty="0"/>
-              <a:t>255</a:t>
-            </a:r>
-          </a:p>
-          <a:p>
-            <a:pPr lvl="1"/>
-            <a:r>
-              <a:rPr lang="en-US" dirty="0"/>
-              <a:t>18</a:t>
-            </a:r>
-          </a:p>
-          <a:p>
-            <a:pPr lvl="1"/>
-            <a:r>
-              <a:rPr lang="en-US" dirty="0"/>
-              <a:t>1025</a:t>
-            </a:r>
-          </a:p>
-          <a:p>
-            <a:r>
-              <a:rPr lang="en-US" dirty="0"/>
-              <a:t>ANS:  Decompose 135 = 128 + 4 + 2 + 1</a:t>
-            </a:r>
-          </a:p>
-          <a:p>
-            <a:pPr lvl="1"/>
-            <a:r>
-              <a:rPr lang="pt-BR" dirty="0"/>
-              <a:t>MOV   r0, r3, LSL #7    @ 128*r3</a:t>
-            </a:r>
-          </a:p>
-          <a:p>
-            <a:pPr lvl="1"/>
-            <a:r>
-              <a:rPr lang="pt-BR" dirty="0"/>
-              <a:t>ADD   r0, r0, r3, LSL #2 @ +4*r3  -&gt; 132*r3</a:t>
-            </a:r>
-          </a:p>
-          <a:p>
-            <a:pPr lvl="1"/>
-            <a:r>
-              <a:rPr lang="pt-BR" dirty="0"/>
-              <a:t>ADD   r0, r0, r3, LSL #1 @ +2*r3  -&gt; 134*r3</a:t>
-            </a:r>
-          </a:p>
-          <a:p>
-            <a:pPr lvl="1"/>
-            <a:r>
-              <a:rPr lang="pt-BR" dirty="0"/>
-              <a:t>ADD   r0, r0, r3         @ +1*r3  -&gt; 135*r3</a:t>
-            </a:r>
-          </a:p>
-          <a:p>
-            <a:r>
-              <a:rPr lang="en-US" dirty="0"/>
-              <a:t>Decompose 153 = (8 + 1) * (16 + 1)</a:t>
-            </a:r>
-          </a:p>
-          <a:p>
-            <a:pPr lvl="1"/>
-            <a:r>
-              <a:rPr lang="en-US" dirty="0"/>
-              <a:t>ADD r0, r3, r3, LSL#3   @ r0 = r3 + 8*r3 = 9*r3</a:t>
-            </a:r>
-            <a:br>
-              <a:rPr lang="en-US" dirty="0"/>
-            </a:br>
-            <a:r>
-              <a:rPr lang="en-US" dirty="0"/>
-              <a:t>ADD r0, r0, r0, LSL#4   @ r0 = 9*r3 + 16*9*r3 = 135*r3</a:t>
-            </a:r>
-          </a:p>
-          <a:p>
-            <a:r>
-              <a:rPr lang="en-US" dirty="0"/>
-              <a:t>Decompose 255 = 256 - 1</a:t>
-            </a:r>
-          </a:p>
-          <a:p>
-            <a:pPr lvl="1"/>
-            <a:r>
-              <a:rPr lang="en-US" dirty="0"/>
-              <a:t>RSB r0, r3, r3, LSL#8   @ r0 = 256*r3 - r3 = 255*r3</a:t>
-            </a:r>
-          </a:p>
-          <a:p>
-            <a:r>
-              <a:rPr lang="en-US" dirty="0"/>
-              <a:t>Decompose 1025=2^10+1:</a:t>
-            </a:r>
-          </a:p>
-          <a:p>
-            <a:pPr lvl="1"/>
-            <a:r>
-              <a:rPr lang="en-US" dirty="0"/>
-              <a:t>ADD r0, r3, r3, LSL#10   @ r0 = r3 + 1024*r3 = 1025*r3</a:t>
-            </a:r>
-          </a:p>
-          <a:p>
-            <a:r>
-              <a:rPr lang="en-US" dirty="0"/>
-              <a:t>Decompose 18 = (16 + 1) + 1</a:t>
-            </a:r>
-          </a:p>
-          <a:p>
-            <a:pPr lvl="1"/>
-            <a:r>
-              <a:rPr lang="en-US" dirty="0"/>
-              <a:t>ADD r0, r3, r3, LSL#4   @ r0 = r3 + 16*r3 = 17*r3</a:t>
-            </a:r>
-            <a:br>
-              <a:rPr lang="en-US" dirty="0"/>
-            </a:br>
-            <a:r>
-              <a:rPr lang="en-US" dirty="0"/>
-              <a:t>ADD r0, r0, r3          @ r0 = 17*r3 + r3 = 18*r3</a:t>
-            </a:r>
-          </a:p>
-        </p:txBody>
-      </p:sp>
-    </p:spTree>
-    <p:extLst>
-      <p:ext uri="{BB962C8B-B14F-4D97-AF65-F5344CB8AC3E}">
-        <p14:creationId xmlns:p14="http://schemas.microsoft.com/office/powerpoint/2010/main" val="210341446"/>
-      </p:ext>
-    </p:extLst>
-  </p:cSld>
-  <p:clrMapOvr>
-    <a:masterClrMapping/>
-  </p:clrMapOvr>
-</p:sld>
-</file>
-
-<file path=ppt/slides/slide31.xml><?xml version="1.0" encoding="utf-8"?>
-<p:sld xmlns:a="http://schemas.openxmlformats.org/drawingml/2006/main" xmlns:r="http://schemas.openxmlformats.org/officeDocument/2006/relationships" xmlns:p="http://schemas.openxmlformats.org/presentationml/2006/main">
-  <p:cSld>
-    <p:spTree>
-      <p:nvGrpSpPr>
         <p:cNvPr id="1" name=""/>
         <p:cNvGrpSpPr/>
         <p:nvPr/>
@@ -14235,7 +13524,7 @@
             <a:fld id="{EA7C8D44-3667-46F6-9772-CC52308E2A7F}" type="slidenum">
               <a:rPr kumimoji="0" lang="en-US" smtClean="0"/>
               <a:pPr/>
-              <a:t>31</a:t>
+              <a:t>30</a:t>
             </a:fld>
             <a:endParaRPr kumimoji="0" lang="en-US" dirty="0"/>
           </a:p>
@@ -14290,7 +13579,7 @@
 </p:sld>
 </file>
 
-<file path=ppt/slides/slide32.xml><?xml version="1.0" encoding="utf-8"?>
+<file path=ppt/slides/slide31.xml><?xml version="1.0" encoding="utf-8"?>
 <p:sld xmlns:a="http://schemas.openxmlformats.org/drawingml/2006/main" xmlns:r="http://schemas.openxmlformats.org/officeDocument/2006/relationships" xmlns:p="http://schemas.openxmlformats.org/presentationml/2006/main">
   <p:cSld>
     <p:spTree>
@@ -14365,7 +13654,7 @@
             <a:fld id="{EA7C8D44-3667-46F6-9772-CC52308E2A7F}" type="slidenum">
               <a:rPr kumimoji="0" lang="en-US" smtClean="0"/>
               <a:pPr/>
-              <a:t>32</a:t>
+              <a:t>31</a:t>
             </a:fld>
             <a:endParaRPr kumimoji="0" lang="en-US" dirty="0"/>
           </a:p>
@@ -14514,7 +13803,7 @@
 </p:sld>
 </file>
 
-<file path=ppt/slides/slide33.xml><?xml version="1.0" encoding="utf-8"?>
+<file path=ppt/slides/slide32.xml><?xml version="1.0" encoding="utf-8"?>
 <p:sld xmlns:a="http://schemas.openxmlformats.org/drawingml/2006/main" xmlns:r="http://schemas.openxmlformats.org/officeDocument/2006/relationships" xmlns:p="http://schemas.openxmlformats.org/presentationml/2006/main">
   <p:cSld>
     <p:spTree>
@@ -14589,7 +13878,7 @@
             <a:fld id="{EA7C8D44-3667-46F6-9772-CC52308E2A7F}" type="slidenum">
               <a:rPr kumimoji="0" lang="en-US" smtClean="0"/>
               <a:pPr/>
-              <a:t>33</a:t>
+              <a:t>32</a:t>
             </a:fld>
             <a:endParaRPr kumimoji="0" lang="en-US" dirty="0"/>
           </a:p>
@@ -14643,7 +13932,7 @@
 </p:sld>
 </file>
 
-<file path=ppt/slides/slide34.xml><?xml version="1.0" encoding="utf-8"?>
+<file path=ppt/slides/slide33.xml><?xml version="1.0" encoding="utf-8"?>
 <p:sld xmlns:a="http://schemas.openxmlformats.org/drawingml/2006/main" xmlns:r="http://schemas.openxmlformats.org/officeDocument/2006/relationships" xmlns:p="http://schemas.openxmlformats.org/presentationml/2006/main">
   <p:cSld>
     <p:spTree>
@@ -14718,7 +14007,7 @@
             <a:fld id="{EA7C8D44-3667-46F6-9772-CC52308E2A7F}" type="slidenum">
               <a:rPr kumimoji="0" lang="en-US" smtClean="0"/>
               <a:pPr/>
-              <a:t>34</a:t>
+              <a:t>33</a:t>
             </a:fld>
             <a:endParaRPr kumimoji="0" lang="en-US" dirty="0"/>
           </a:p>
@@ -15061,7 +14350,7 @@
 </p:sld>
 </file>
 
-<file path=ppt/slides/slide35.xml><?xml version="1.0" encoding="utf-8"?>
+<file path=ppt/slides/slide34.xml><?xml version="1.0" encoding="utf-8"?>
 <p:sld xmlns:a="http://schemas.openxmlformats.org/drawingml/2006/main" xmlns:r="http://schemas.openxmlformats.org/officeDocument/2006/relationships" xmlns:p="http://schemas.openxmlformats.org/presentationml/2006/main">
   <p:cSld>
     <p:spTree>
@@ -15130,7 +14419,7 @@
             <a:fld id="{EA7C8D44-3667-46F6-9772-CC52308E2A7F}" type="slidenum">
               <a:rPr kumimoji="0" lang="en-US" smtClean="0"/>
               <a:pPr/>
-              <a:t>35</a:t>
+              <a:t>34</a:t>
             </a:fld>
             <a:endParaRPr kumimoji="0" lang="en-US" dirty="0"/>
           </a:p>
@@ -15177,7 +14466,7 @@
 </p:sld>
 </file>
 
-<file path=ppt/slides/slide36.xml><?xml version="1.0" encoding="utf-8"?>
+<file path=ppt/slides/slide35.xml><?xml version="1.0" encoding="utf-8"?>
 <p:sld xmlns:a="http://schemas.openxmlformats.org/drawingml/2006/main" xmlns:r="http://schemas.openxmlformats.org/officeDocument/2006/relationships" xmlns:p="http://schemas.openxmlformats.org/presentationml/2006/main">
   <p:cSld>
     <p:spTree>
@@ -15229,7 +14518,7 @@
             <a:fld id="{EA7C8D44-3667-46F6-9772-CC52308E2A7F}" type="slidenum">
               <a:rPr kumimoji="0" lang="en-US" smtClean="0"/>
               <a:pPr/>
-              <a:t>36</a:t>
+              <a:t>35</a:t>
             </a:fld>
             <a:endParaRPr kumimoji="0" lang="en-US" dirty="0"/>
           </a:p>
@@ -15517,7 +14806,7 @@
 </p:sld>
 </file>
 
-<file path=ppt/slides/slide37.xml><?xml version="1.0" encoding="utf-8"?>
+<file path=ppt/slides/slide36.xml><?xml version="1.0" encoding="utf-8"?>
 <p:sld xmlns:a="http://schemas.openxmlformats.org/drawingml/2006/main" xmlns:r="http://schemas.openxmlformats.org/officeDocument/2006/relationships" xmlns:p="http://schemas.openxmlformats.org/presentationml/2006/main">
   <p:cSld>
     <p:spTree>
@@ -15563,7 +14852,7 @@
             <a:fld id="{EA7C8D44-3667-46F6-9772-CC52308E2A7F}" type="slidenum">
               <a:rPr kumimoji="0" lang="en-US" smtClean="0"/>
               <a:pPr/>
-              <a:t>37</a:t>
+              <a:t>36</a:t>
             </a:fld>
             <a:endParaRPr kumimoji="0" lang="en-US" dirty="0"/>
           </a:p>
@@ -16189,7 +15478,7 @@
 </p:sld>
 </file>
 
-<file path=ppt/slides/slide38.xml><?xml version="1.0" encoding="utf-8"?>
+<file path=ppt/slides/slide37.xml><?xml version="1.0" encoding="utf-8"?>
 <p:sld xmlns:a="http://schemas.openxmlformats.org/drawingml/2006/main" xmlns:r="http://schemas.openxmlformats.org/officeDocument/2006/relationships" xmlns:p="http://schemas.openxmlformats.org/presentationml/2006/main">
   <p:cSld>
     <p:spTree>
@@ -16258,7 +15547,7 @@
             <a:fld id="{EA7C8D44-3667-46F6-9772-CC52308E2A7F}" type="slidenum">
               <a:rPr kumimoji="0" lang="en-US" smtClean="0"/>
               <a:pPr/>
-              <a:t>38</a:t>
+              <a:t>37</a:t>
             </a:fld>
             <a:endParaRPr kumimoji="0" lang="en-US" dirty="0"/>
           </a:p>
@@ -16398,7 +15687,7 @@
 </p:sld>
 </file>
 
-<file path=ppt/slides/slide39.xml><?xml version="1.0" encoding="utf-8"?>
+<file path=ppt/slides/slide38.xml><?xml version="1.0" encoding="utf-8"?>
 <p:sld xmlns:a="http://schemas.openxmlformats.org/drawingml/2006/main" xmlns:r="http://schemas.openxmlformats.org/officeDocument/2006/relationships" xmlns:p="http://schemas.openxmlformats.org/presentationml/2006/main">
   <p:cSld>
     <p:spTree>
@@ -16473,7 +15762,7 @@
             <a:fld id="{EA7C8D44-3667-46F6-9772-CC52308E2A7F}" type="slidenum">
               <a:rPr kumimoji="0" lang="en-US" smtClean="0"/>
               <a:pPr/>
-              <a:t>39</a:t>
+              <a:t>38</a:t>
             </a:fld>
             <a:endParaRPr kumimoji="0" lang="en-US" dirty="0"/>
           </a:p>
@@ -16882,168 +16171,7 @@
 </p:sld>
 </file>
 
-<file path=ppt/slides/slide4.xml><?xml version="1.0" encoding="utf-8"?>
-<p:sld xmlns:a="http://schemas.openxmlformats.org/drawingml/2006/main" xmlns:r="http://schemas.openxmlformats.org/officeDocument/2006/relationships" xmlns:p="http://schemas.openxmlformats.org/presentationml/2006/main">
-  <p:cSld>
-    <p:spTree>
-      <p:nvGrpSpPr>
-        <p:cNvPr id="1" name=""/>
-        <p:cNvGrpSpPr/>
-        <p:nvPr/>
-      </p:nvGrpSpPr>
-      <p:grpSpPr>
-        <a:xfrm>
-          <a:off x="0" y="0"/>
-          <a:ext cx="0" cy="0"/>
-          <a:chOff x="0" y="0"/>
-          <a:chExt cx="0" cy="0"/>
-        </a:xfrm>
-      </p:grpSpPr>
-      <p:sp>
-        <p:nvSpPr>
-          <p:cNvPr id="2" name="Title 1">
-            <a:extLst>
-              <a:ext uri="{FF2B5EF4-FFF2-40B4-BE49-F238E27FC236}">
-                <a16:creationId xmlns:a16="http://schemas.microsoft.com/office/drawing/2014/main" id="{6BA372BA-4E36-5939-EA5D-65E91EDB30B3}"/>
-              </a:ext>
-            </a:extLst>
-          </p:cNvPr>
-          <p:cNvSpPr>
-            <a:spLocks noGrp="1"/>
-          </p:cNvSpPr>
-          <p:nvPr>
-            <p:ph type="title"/>
-          </p:nvPr>
-        </p:nvSpPr>
-        <p:spPr/>
-        <p:txBody>
-          <a:bodyPr/>
-          <a:lstStyle/>
-          <a:p>
-            <a:r>
-              <a:rPr lang="en-US" dirty="0"/>
-              <a:t>Bit Manipulations</a:t>
-            </a:r>
-          </a:p>
-        </p:txBody>
-      </p:sp>
-      <p:sp>
-        <p:nvSpPr>
-          <p:cNvPr id="3" name="Slide Number Placeholder 2">
-            <a:extLst>
-              <a:ext uri="{FF2B5EF4-FFF2-40B4-BE49-F238E27FC236}">
-                <a16:creationId xmlns:a16="http://schemas.microsoft.com/office/drawing/2014/main" id="{4B2DE8FE-731E-0AC7-29AB-17D9745E19A1}"/>
-              </a:ext>
-            </a:extLst>
-          </p:cNvPr>
-          <p:cNvSpPr>
-            <a:spLocks noGrp="1"/>
-          </p:cNvSpPr>
-          <p:nvPr>
-            <p:ph type="sldNum" sz="quarter" idx="12"/>
-          </p:nvPr>
-        </p:nvSpPr>
-        <p:spPr/>
-        <p:txBody>
-          <a:bodyPr/>
-          <a:lstStyle/>
-          <a:p>
-            <a:fld id="{EA7C8D44-3667-46F6-9772-CC52308E2A7F}" type="slidenum">
-              <a:rPr kumimoji="0" lang="en-US" smtClean="0"/>
-              <a:pPr/>
-              <a:t>4</a:t>
-            </a:fld>
-            <a:endParaRPr kumimoji="0" lang="en-US" dirty="0"/>
-          </a:p>
-        </p:txBody>
-      </p:sp>
-      <p:sp>
-        <p:nvSpPr>
-          <p:cNvPr id="4" name="Content Placeholder 3">
-            <a:extLst>
-              <a:ext uri="{FF2B5EF4-FFF2-40B4-BE49-F238E27FC236}">
-                <a16:creationId xmlns:a16="http://schemas.microsoft.com/office/drawing/2014/main" id="{0DBB9D86-D583-CABE-4B85-A5314A655FCE}"/>
-              </a:ext>
-            </a:extLst>
-          </p:cNvPr>
-          <p:cNvSpPr>
-            <a:spLocks noGrp="1"/>
-          </p:cNvSpPr>
-          <p:nvPr>
-            <p:ph sz="quarter" idx="1"/>
-          </p:nvPr>
-        </p:nvSpPr>
-        <p:spPr/>
-        <p:txBody>
-          <a:bodyPr>
-            <a:normAutofit/>
-          </a:bodyPr>
-          <a:lstStyle/>
-          <a:p>
-            <a:r>
-              <a:rPr lang="pt-BR" dirty="0"/>
-              <a:t>Compute 32-bit register values after each instruction</a:t>
-            </a:r>
-          </a:p>
-          <a:p>
-            <a:r>
-              <a:rPr lang="pt-BR" dirty="0"/>
-              <a:t>MOV R0, #0x0ABC</a:t>
-            </a:r>
-          </a:p>
-          <a:p>
-            <a:r>
-              <a:rPr lang="pt-BR" dirty="0"/>
-              <a:t>MOV R1, #0x0DEF</a:t>
-            </a:r>
-          </a:p>
-          <a:p>
-            <a:r>
-              <a:rPr lang="pt-BR" dirty="0"/>
-              <a:t>AND R2, R0, R1</a:t>
-            </a:r>
-          </a:p>
-          <a:p>
-            <a:r>
-              <a:rPr lang="pt-BR" dirty="0"/>
-              <a:t>ORR R3, R0, R1</a:t>
-            </a:r>
-          </a:p>
-          <a:p>
-            <a:r>
-              <a:rPr lang="pt-BR" dirty="0"/>
-              <a:t>EOR R4, R0, R1</a:t>
-            </a:r>
-          </a:p>
-          <a:p>
-            <a:r>
-              <a:rPr lang="pt-BR" dirty="0"/>
-              <a:t>ORN R5, R0, R1</a:t>
-            </a:r>
-          </a:p>
-          <a:p>
-            <a:r>
-              <a:rPr lang="pt-BR" dirty="0"/>
-              <a:t>BIC r6, R0, R1</a:t>
-            </a:r>
-            <a:endParaRPr lang="en-US" dirty="0"/>
-          </a:p>
-        </p:txBody>
-      </p:sp>
-    </p:spTree>
-    <p:extLst>
-      <p:ext uri="{BB962C8B-B14F-4D97-AF65-F5344CB8AC3E}">
-        <p14:creationId xmlns:p14="http://schemas.microsoft.com/office/powerpoint/2010/main" val="1248622466"/>
-      </p:ext>
-    </p:extLst>
-  </p:cSld>
-  <p:clrMapOvr>
-    <a:masterClrMapping/>
-  </p:clrMapOvr>
-</p:sld>
-</file>
-
-<file path=ppt/slides/slide40.xml><?xml version="1.0" encoding="utf-8"?>
+<file path=ppt/slides/slide39.xml><?xml version="1.0" encoding="utf-8"?>
 <p:sld xmlns:a="http://schemas.openxmlformats.org/drawingml/2006/main" xmlns:r="http://schemas.openxmlformats.org/officeDocument/2006/relationships" xmlns:p="http://schemas.openxmlformats.org/presentationml/2006/main">
   <p:cSld>
     <p:spTree>
@@ -17112,7 +16240,7 @@
             <a:fld id="{EA7C8D44-3667-46F6-9772-CC52308E2A7F}" type="slidenum">
               <a:rPr kumimoji="0" lang="en-US" smtClean="0"/>
               <a:pPr/>
-              <a:t>40</a:t>
+              <a:t>39</a:t>
             </a:fld>
             <a:endParaRPr kumimoji="0" lang="en-US" dirty="0"/>
           </a:p>
@@ -17242,7 +16370,168 @@
 </p:sld>
 </file>
 
-<file path=ppt/slides/slide41.xml><?xml version="1.0" encoding="utf-8"?>
+<file path=ppt/slides/slide4.xml><?xml version="1.0" encoding="utf-8"?>
+<p:sld xmlns:a="http://schemas.openxmlformats.org/drawingml/2006/main" xmlns:r="http://schemas.openxmlformats.org/officeDocument/2006/relationships" xmlns:p="http://schemas.openxmlformats.org/presentationml/2006/main">
+  <p:cSld>
+    <p:spTree>
+      <p:nvGrpSpPr>
+        <p:cNvPr id="1" name=""/>
+        <p:cNvGrpSpPr/>
+        <p:nvPr/>
+      </p:nvGrpSpPr>
+      <p:grpSpPr>
+        <a:xfrm>
+          <a:off x="0" y="0"/>
+          <a:ext cx="0" cy="0"/>
+          <a:chOff x="0" y="0"/>
+          <a:chExt cx="0" cy="0"/>
+        </a:xfrm>
+      </p:grpSpPr>
+      <p:sp>
+        <p:nvSpPr>
+          <p:cNvPr id="2" name="Title 1">
+            <a:extLst>
+              <a:ext uri="{FF2B5EF4-FFF2-40B4-BE49-F238E27FC236}">
+                <a16:creationId xmlns:a16="http://schemas.microsoft.com/office/drawing/2014/main" id="{6BA372BA-4E36-5939-EA5D-65E91EDB30B3}"/>
+              </a:ext>
+            </a:extLst>
+          </p:cNvPr>
+          <p:cNvSpPr>
+            <a:spLocks noGrp="1"/>
+          </p:cNvSpPr>
+          <p:nvPr>
+            <p:ph type="title"/>
+          </p:nvPr>
+        </p:nvSpPr>
+        <p:spPr/>
+        <p:txBody>
+          <a:bodyPr/>
+          <a:lstStyle/>
+          <a:p>
+            <a:r>
+              <a:rPr lang="en-US" dirty="0"/>
+              <a:t>Bit Manipulations</a:t>
+            </a:r>
+          </a:p>
+        </p:txBody>
+      </p:sp>
+      <p:sp>
+        <p:nvSpPr>
+          <p:cNvPr id="3" name="Slide Number Placeholder 2">
+            <a:extLst>
+              <a:ext uri="{FF2B5EF4-FFF2-40B4-BE49-F238E27FC236}">
+                <a16:creationId xmlns:a16="http://schemas.microsoft.com/office/drawing/2014/main" id="{4B2DE8FE-731E-0AC7-29AB-17D9745E19A1}"/>
+              </a:ext>
+            </a:extLst>
+          </p:cNvPr>
+          <p:cNvSpPr>
+            <a:spLocks noGrp="1"/>
+          </p:cNvSpPr>
+          <p:nvPr>
+            <p:ph type="sldNum" sz="quarter" idx="12"/>
+          </p:nvPr>
+        </p:nvSpPr>
+        <p:spPr/>
+        <p:txBody>
+          <a:bodyPr/>
+          <a:lstStyle/>
+          <a:p>
+            <a:fld id="{EA7C8D44-3667-46F6-9772-CC52308E2A7F}" type="slidenum">
+              <a:rPr kumimoji="0" lang="en-US" smtClean="0"/>
+              <a:pPr/>
+              <a:t>4</a:t>
+            </a:fld>
+            <a:endParaRPr kumimoji="0" lang="en-US" dirty="0"/>
+          </a:p>
+        </p:txBody>
+      </p:sp>
+      <p:sp>
+        <p:nvSpPr>
+          <p:cNvPr id="4" name="Content Placeholder 3">
+            <a:extLst>
+              <a:ext uri="{FF2B5EF4-FFF2-40B4-BE49-F238E27FC236}">
+                <a16:creationId xmlns:a16="http://schemas.microsoft.com/office/drawing/2014/main" id="{0DBB9D86-D583-CABE-4B85-A5314A655FCE}"/>
+              </a:ext>
+            </a:extLst>
+          </p:cNvPr>
+          <p:cNvSpPr>
+            <a:spLocks noGrp="1"/>
+          </p:cNvSpPr>
+          <p:nvPr>
+            <p:ph sz="quarter" idx="1"/>
+          </p:nvPr>
+        </p:nvSpPr>
+        <p:spPr/>
+        <p:txBody>
+          <a:bodyPr>
+            <a:normAutofit/>
+          </a:bodyPr>
+          <a:lstStyle/>
+          <a:p>
+            <a:r>
+              <a:rPr lang="pt-BR" dirty="0"/>
+              <a:t>Compute 32-bit register values after each instruction</a:t>
+            </a:r>
+          </a:p>
+          <a:p>
+            <a:r>
+              <a:rPr lang="pt-BR" dirty="0"/>
+              <a:t>MOV R0, #0x0ABC</a:t>
+            </a:r>
+          </a:p>
+          <a:p>
+            <a:r>
+              <a:rPr lang="pt-BR" dirty="0"/>
+              <a:t>MOV R1, #0x0DEF</a:t>
+            </a:r>
+          </a:p>
+          <a:p>
+            <a:r>
+              <a:rPr lang="pt-BR" dirty="0"/>
+              <a:t>AND R2, R0, R1</a:t>
+            </a:r>
+          </a:p>
+          <a:p>
+            <a:r>
+              <a:rPr lang="pt-BR" dirty="0"/>
+              <a:t>ORR R3, R0, R1</a:t>
+            </a:r>
+          </a:p>
+          <a:p>
+            <a:r>
+              <a:rPr lang="pt-BR" dirty="0"/>
+              <a:t>EOR R4, R0, R1</a:t>
+            </a:r>
+          </a:p>
+          <a:p>
+            <a:r>
+              <a:rPr lang="pt-BR" dirty="0"/>
+              <a:t>ORN R5, R0, R1</a:t>
+            </a:r>
+          </a:p>
+          <a:p>
+            <a:r>
+              <a:rPr lang="pt-BR" dirty="0"/>
+              <a:t>BIC r6, R0, R1</a:t>
+            </a:r>
+            <a:endParaRPr lang="en-US" dirty="0"/>
+          </a:p>
+        </p:txBody>
+      </p:sp>
+    </p:spTree>
+    <p:extLst>
+      <p:ext uri="{BB962C8B-B14F-4D97-AF65-F5344CB8AC3E}">
+        <p14:creationId xmlns:p14="http://schemas.microsoft.com/office/powerpoint/2010/main" val="1248622466"/>
+      </p:ext>
+    </p:extLst>
+  </p:cSld>
+  <p:clrMapOvr>
+    <a:masterClrMapping/>
+  </p:clrMapOvr>
+</p:sld>
+</file>
+
+<file path=ppt/slides/slide40.xml><?xml version="1.0" encoding="utf-8"?>
 <p:sld xmlns:a="http://schemas.openxmlformats.org/drawingml/2006/main" xmlns:r="http://schemas.openxmlformats.org/officeDocument/2006/relationships" xmlns:p="http://schemas.openxmlformats.org/presentationml/2006/main">
   <p:cSld>
     <p:spTree>
@@ -17317,7 +16606,7 @@
             <a:fld id="{EA7C8D44-3667-46F6-9772-CC52308E2A7F}" type="slidenum">
               <a:rPr kumimoji="0" lang="en-US" smtClean="0"/>
               <a:pPr/>
-              <a:t>41</a:t>
+              <a:t>40</a:t>
             </a:fld>
             <a:endParaRPr kumimoji="0" lang="en-US" dirty="0"/>
           </a:p>
@@ -17457,8 +16746,8 @@
           </a:p>
         </p:txBody>
       </p:sp>
-      <mc:AlternateContent xmlns:mc="http://schemas.openxmlformats.org/markup-compatibility/2006">
-        <mc:Choice xmlns:a14="http://schemas.microsoft.com/office/drawing/2010/main" Requires="a14">
+      <mc:AlternateContent xmlns:mc="http://schemas.openxmlformats.org/markup-compatibility/2006" xmlns:a14="http://schemas.microsoft.com/office/drawing/2010/main">
+        <mc:Choice Requires="a14">
           <p:sp>
             <p:nvSpPr>
               <p:cNvPr id="4" name="Content Placeholder 3">
@@ -17848,7 +17137,7 @@
             </p:txBody>
           </p:sp>
         </mc:Choice>
-        <mc:Fallback>
+        <mc:Fallback xmlns="">
           <p:sp>
             <p:nvSpPr>
               <p:cNvPr id="4" name="Content Placeholder 3">
@@ -17906,7 +17195,7 @@
 </p:sld>
 </file>
 
-<file path=ppt/slides/slide42.xml><?xml version="1.0" encoding="utf-8"?>
+<file path=ppt/slides/slide41.xml><?xml version="1.0" encoding="utf-8"?>
 <p:sld xmlns:a="http://schemas.openxmlformats.org/drawingml/2006/main" xmlns:r="http://schemas.openxmlformats.org/officeDocument/2006/relationships" xmlns:p="http://schemas.openxmlformats.org/presentationml/2006/main">
   <p:cSld>
     <p:spTree>
@@ -17975,7 +17264,7 @@
             <a:fld id="{EA7C8D44-3667-46F6-9772-CC52308E2A7F}" type="slidenum">
               <a:rPr kumimoji="0" lang="en-US" smtClean="0"/>
               <a:pPr/>
-              <a:t>42</a:t>
+              <a:t>41</a:t>
             </a:fld>
             <a:endParaRPr kumimoji="0" lang="en-US" dirty="0"/>
           </a:p>
@@ -18279,7 +17568,7 @@
 </p:sld>
 </file>
 
-<file path=ppt/slides/slide43.xml><?xml version="1.0" encoding="utf-8"?>
+<file path=ppt/slides/slide42.xml><?xml version="1.0" encoding="utf-8"?>
 <p:sld xmlns:a="http://schemas.openxmlformats.org/drawingml/2006/main" xmlns:r="http://schemas.openxmlformats.org/officeDocument/2006/relationships" xmlns:p="http://schemas.openxmlformats.org/presentationml/2006/main">
   <p:cSld>
     <p:spTree>
@@ -18348,7 +17637,7 @@
             <a:fld id="{EA7C8D44-3667-46F6-9772-CC52308E2A7F}" type="slidenum">
               <a:rPr kumimoji="0" lang="en-US" smtClean="0"/>
               <a:pPr/>
-              <a:t>43</a:t>
+              <a:t>42</a:t>
             </a:fld>
             <a:endParaRPr kumimoji="0" lang="en-US" dirty="0"/>
           </a:p>
@@ -18762,7 +18051,7 @@
 </p:sld>
 </file>
 
-<file path=ppt/slides/slide44.xml><?xml version="1.0" encoding="utf-8"?>
+<file path=ppt/slides/slide43.xml><?xml version="1.0" encoding="utf-8"?>
 <p:sld xmlns:a="http://schemas.openxmlformats.org/drawingml/2006/main" xmlns:r="http://schemas.openxmlformats.org/officeDocument/2006/relationships" xmlns:p="http://schemas.openxmlformats.org/presentationml/2006/main">
   <p:cSld>
     <p:spTree>
@@ -18837,7 +18126,7 @@
             <a:fld id="{EA7C8D44-3667-46F6-9772-CC52308E2A7F}" type="slidenum">
               <a:rPr kumimoji="0" lang="en-US" smtClean="0"/>
               <a:pPr/>
-              <a:t>44</a:t>
+              <a:t>43</a:t>
             </a:fld>
             <a:endParaRPr kumimoji="0" lang="en-US" dirty="0"/>
           </a:p>
@@ -19206,7 +18495,7 @@
 </p:sld>
 </file>
 
-<file path=ppt/slides/slide45.xml><?xml version="1.0" encoding="utf-8"?>
+<file path=ppt/slides/slide44.xml><?xml version="1.0" encoding="utf-8"?>
 <p:sld xmlns:a="http://schemas.openxmlformats.org/drawingml/2006/main" xmlns:r="http://schemas.openxmlformats.org/officeDocument/2006/relationships" xmlns:p="http://schemas.openxmlformats.org/presentationml/2006/main">
   <p:cSld>
     <p:spTree>
@@ -19281,7 +18570,7 @@
             <a:fld id="{EA7C8D44-3667-46F6-9772-CC52308E2A7F}" type="slidenum">
               <a:rPr kumimoji="0" lang="en-US" smtClean="0"/>
               <a:pPr/>
-              <a:t>45</a:t>
+              <a:t>44</a:t>
             </a:fld>
             <a:endParaRPr kumimoji="0" lang="en-US" dirty="0"/>
           </a:p>
@@ -19546,7 +18835,7 @@
 </p:sld>
 </file>
 
-<file path=ppt/slides/slide46.xml><?xml version="1.0" encoding="utf-8"?>
+<file path=ppt/slides/slide45.xml><?xml version="1.0" encoding="utf-8"?>
 <p:sld xmlns:a="http://schemas.openxmlformats.org/drawingml/2006/main" xmlns:r="http://schemas.openxmlformats.org/officeDocument/2006/relationships" xmlns:p="http://schemas.openxmlformats.org/presentationml/2006/main">
   <p:cSld>
     <p:spTree>
@@ -19621,7 +18910,7 @@
             <a:fld id="{EA7C8D44-3667-46F6-9772-CC52308E2A7F}" type="slidenum">
               <a:rPr kumimoji="0" lang="en-US" smtClean="0"/>
               <a:pPr/>
-              <a:t>46</a:t>
+              <a:t>45</a:t>
             </a:fld>
             <a:endParaRPr kumimoji="0" lang="en-US" dirty="0"/>
           </a:p>
@@ -19933,7 +19222,7 @@
 </p:sld>
 </file>
 
-<file path=ppt/slides/slide47.xml><?xml version="1.0" encoding="utf-8"?>
+<file path=ppt/slides/slide46.xml><?xml version="1.0" encoding="utf-8"?>
 <p:sld xmlns:a="http://schemas.openxmlformats.org/drawingml/2006/main" xmlns:r="http://schemas.openxmlformats.org/officeDocument/2006/relationships" xmlns:p="http://schemas.openxmlformats.org/presentationml/2006/main">
   <p:cSld>
     <p:spTree>
@@ -20008,7 +19297,7 @@
             <a:fld id="{EA7C8D44-3667-46F6-9772-CC52308E2A7F}" type="slidenum">
               <a:rPr kumimoji="0" lang="en-US" smtClean="0"/>
               <a:pPr/>
-              <a:t>47</a:t>
+              <a:t>46</a:t>
             </a:fld>
             <a:endParaRPr kumimoji="0" lang="en-US" dirty="0"/>
           </a:p>
@@ -20321,7 +19610,7 @@
 </p:sld>
 </file>
 
-<file path=ppt/slides/slide48.xml><?xml version="1.0" encoding="utf-8"?>
+<file path=ppt/slides/slide47.xml><?xml version="1.0" encoding="utf-8"?>
 <p:sld xmlns:a="http://schemas.openxmlformats.org/drawingml/2006/main" xmlns:r="http://schemas.openxmlformats.org/officeDocument/2006/relationships" xmlns:p="http://schemas.openxmlformats.org/presentationml/2006/main">
   <p:cSld>
     <p:spTree>
@@ -20396,7 +19685,7 @@
             <a:fld id="{EA7C8D44-3667-46F6-9772-CC52308E2A7F}" type="slidenum">
               <a:rPr kumimoji="0" lang="en-US" smtClean="0"/>
               <a:pPr/>
-              <a:t>48</a:t>
+              <a:t>47</a:t>
             </a:fld>
             <a:endParaRPr kumimoji="0" lang="en-US" dirty="0"/>
           </a:p>
@@ -24949,7 +24238,7 @@
 </p:sld>
 </file>
 
-<file path=ppt/slides/slide49.xml><?xml version="1.0" encoding="utf-8"?>
+<file path=ppt/slides/slide48.xml><?xml version="1.0" encoding="utf-8"?>
 <p:sld xmlns:a="http://schemas.openxmlformats.org/drawingml/2006/main" xmlns:r="http://schemas.openxmlformats.org/officeDocument/2006/relationships" xmlns:p="http://schemas.openxmlformats.org/presentationml/2006/main">
   <p:cSld>
     <p:spTree>
@@ -25018,7 +24307,7 @@
             <a:fld id="{EA7C8D44-3667-46F6-9772-CC52308E2A7F}" type="slidenum">
               <a:rPr kumimoji="0" lang="en-US" smtClean="0"/>
               <a:pPr/>
-              <a:t>49</a:t>
+              <a:t>48</a:t>
             </a:fld>
             <a:endParaRPr kumimoji="0" lang="en-US" dirty="0"/>
           </a:p>
@@ -29907,783 +29196,7 @@
 </p:sld>
 </file>
 
-<file path=ppt/slides/slide5.xml><?xml version="1.0" encoding="utf-8"?>
-<p:sld xmlns:a="http://schemas.openxmlformats.org/drawingml/2006/main" xmlns:r="http://schemas.openxmlformats.org/officeDocument/2006/relationships" xmlns:p="http://schemas.openxmlformats.org/presentationml/2006/main">
-  <p:cSld>
-    <p:spTree>
-      <p:nvGrpSpPr>
-        <p:cNvPr id="1" name="">
-          <a:extLst>
-            <a:ext uri="{FF2B5EF4-FFF2-40B4-BE49-F238E27FC236}">
-              <a16:creationId xmlns:a16="http://schemas.microsoft.com/office/drawing/2014/main" id="{5D8FCCDD-F534-1679-8F38-7DE37BF403B8}"/>
-            </a:ext>
-          </a:extLst>
-        </p:cNvPr>
-        <p:cNvGrpSpPr/>
-        <p:nvPr/>
-      </p:nvGrpSpPr>
-      <p:grpSpPr>
-        <a:xfrm>
-          <a:off x="0" y="0"/>
-          <a:ext cx="0" cy="0"/>
-          <a:chOff x="0" y="0"/>
-          <a:chExt cx="0" cy="0"/>
-        </a:xfrm>
-      </p:grpSpPr>
-      <p:sp>
-        <p:nvSpPr>
-          <p:cNvPr id="2" name="Title 1">
-            <a:extLst>
-              <a:ext uri="{FF2B5EF4-FFF2-40B4-BE49-F238E27FC236}">
-                <a16:creationId xmlns:a16="http://schemas.microsoft.com/office/drawing/2014/main" id="{92206104-88B9-F7DD-C7CF-BD3C5A8DDA25}"/>
-              </a:ext>
-            </a:extLst>
-          </p:cNvPr>
-          <p:cNvSpPr>
-            <a:spLocks noGrp="1"/>
-          </p:cNvSpPr>
-          <p:nvPr>
-            <p:ph type="title"/>
-          </p:nvPr>
-        </p:nvSpPr>
-        <p:spPr/>
-        <p:txBody>
-          <a:bodyPr/>
-          <a:lstStyle/>
-          <a:p>
-            <a:r>
-              <a:rPr lang="en-US" dirty="0"/>
-              <a:t>Bit Manipulations ANS</a:t>
-            </a:r>
-          </a:p>
-        </p:txBody>
-      </p:sp>
-      <p:sp>
-        <p:nvSpPr>
-          <p:cNvPr id="3" name="Slide Number Placeholder 2">
-            <a:extLst>
-              <a:ext uri="{FF2B5EF4-FFF2-40B4-BE49-F238E27FC236}">
-                <a16:creationId xmlns:a16="http://schemas.microsoft.com/office/drawing/2014/main" id="{836BEFCD-466A-CEA5-3D17-4D6AE99169C4}"/>
-              </a:ext>
-            </a:extLst>
-          </p:cNvPr>
-          <p:cNvSpPr>
-            <a:spLocks noGrp="1"/>
-          </p:cNvSpPr>
-          <p:nvPr>
-            <p:ph type="sldNum" sz="quarter" idx="12"/>
-          </p:nvPr>
-        </p:nvSpPr>
-        <p:spPr/>
-        <p:txBody>
-          <a:bodyPr/>
-          <a:lstStyle/>
-          <a:p>
-            <a:fld id="{EA7C8D44-3667-46F6-9772-CC52308E2A7F}" type="slidenum">
-              <a:rPr kumimoji="0" lang="en-US" smtClean="0"/>
-              <a:pPr/>
-              <a:t>5</a:t>
-            </a:fld>
-            <a:endParaRPr kumimoji="0" lang="en-US" dirty="0"/>
-          </a:p>
-        </p:txBody>
-      </p:sp>
-      <p:sp>
-        <p:nvSpPr>
-          <p:cNvPr id="4" name="Content Placeholder 3">
-            <a:extLst>
-              <a:ext uri="{FF2B5EF4-FFF2-40B4-BE49-F238E27FC236}">
-                <a16:creationId xmlns:a16="http://schemas.microsoft.com/office/drawing/2014/main" id="{26C07159-9E90-34FC-FD37-707ADD2978CD}"/>
-              </a:ext>
-            </a:extLst>
-          </p:cNvPr>
-          <p:cNvSpPr>
-            <a:spLocks noGrp="1"/>
-          </p:cNvSpPr>
-          <p:nvPr>
-            <p:ph sz="quarter" idx="1"/>
-          </p:nvPr>
-        </p:nvSpPr>
-        <p:spPr>
-          <a:xfrm>
-            <a:off x="457200" y="1219200"/>
-            <a:ext cx="3505200" cy="4557932"/>
-          </a:xfrm>
-        </p:spPr>
-        <p:txBody>
-          <a:bodyPr>
-            <a:normAutofit/>
-          </a:bodyPr>
-          <a:lstStyle/>
-          <a:p>
-            <a:r>
-              <a:rPr lang="pt-BR" dirty="0"/>
-              <a:t>MOV R0, #0x0ABC</a:t>
-            </a:r>
-          </a:p>
-          <a:p>
-            <a:r>
-              <a:rPr lang="pt-BR" dirty="0"/>
-              <a:t>MOV R1, #0x0DEF</a:t>
-            </a:r>
-          </a:p>
-          <a:p>
-            <a:r>
-              <a:rPr lang="pt-BR" dirty="0"/>
-              <a:t>AND R2, R0, R1</a:t>
-            </a:r>
-          </a:p>
-          <a:p>
-            <a:r>
-              <a:rPr lang="pt-BR" dirty="0"/>
-              <a:t>ORR R3, R0, R1</a:t>
-            </a:r>
-          </a:p>
-          <a:p>
-            <a:r>
-              <a:rPr lang="pt-BR" dirty="0"/>
-              <a:t>EOR R4, R0, R1</a:t>
-            </a:r>
-          </a:p>
-          <a:p>
-            <a:r>
-              <a:rPr lang="pt-BR" dirty="0"/>
-              <a:t>ORN R5, R0, R1</a:t>
-            </a:r>
-          </a:p>
-          <a:p>
-            <a:r>
-              <a:rPr lang="pt-BR" dirty="0"/>
-              <a:t>BIC r6, R0, R1</a:t>
-            </a:r>
-            <a:endParaRPr lang="en-US" dirty="0"/>
-          </a:p>
-        </p:txBody>
-      </p:sp>
-      <p:sp>
-        <p:nvSpPr>
-          <p:cNvPr id="5" name="Content Placeholder 3">
-            <a:extLst>
-              <a:ext uri="{FF2B5EF4-FFF2-40B4-BE49-F238E27FC236}">
-                <a16:creationId xmlns:a16="http://schemas.microsoft.com/office/drawing/2014/main" id="{F62F52E9-C913-0809-7AFE-FB9B6517BE16}"/>
-              </a:ext>
-            </a:extLst>
-          </p:cNvPr>
-          <p:cNvSpPr txBox="1">
-            <a:spLocks/>
-          </p:cNvSpPr>
-          <p:nvPr/>
-        </p:nvSpPr>
-        <p:spPr>
-          <a:xfrm>
-            <a:off x="4038600" y="1219200"/>
-            <a:ext cx="4572000" cy="3657600"/>
-          </a:xfrm>
-          <a:prstGeom prst="rect">
-            <a:avLst/>
-          </a:prstGeom>
-        </p:spPr>
-        <p:txBody>
-          <a:bodyPr vert="horz">
-            <a:normAutofit fontScale="77500" lnSpcReduction="20000"/>
-          </a:bodyPr>
-          <a:lstStyle>
-            <a:lvl1pPr marL="274320" indent="-274320" algn="l" rtl="0" eaLnBrk="1" latinLnBrk="0" hangingPunct="1">
-              <a:spcBef>
-                <a:spcPts val="600"/>
-              </a:spcBef>
-              <a:buClr>
-                <a:schemeClr val="accent1"/>
-              </a:buClr>
-              <a:buSzPct val="76000"/>
-              <a:buFont typeface="Wingdings 3"/>
-              <a:buChar char=""/>
-              <a:defRPr kumimoji="0" sz="2600" kern="1200">
-                <a:solidFill>
-                  <a:schemeClr val="tx1"/>
-                </a:solidFill>
-                <a:latin typeface="+mn-lt"/>
-                <a:ea typeface="+mn-ea"/>
-                <a:cs typeface="+mn-cs"/>
-              </a:defRPr>
-            </a:lvl1pPr>
-            <a:lvl2pPr marL="548640" indent="-274320" algn="l" rtl="0" eaLnBrk="1" latinLnBrk="0" hangingPunct="1">
-              <a:spcBef>
-                <a:spcPts val="500"/>
-              </a:spcBef>
-              <a:buClr>
-                <a:schemeClr val="accent2"/>
-              </a:buClr>
-              <a:buSzPct val="76000"/>
-              <a:buFont typeface="Wingdings 3"/>
-              <a:buChar char=""/>
-              <a:defRPr kumimoji="0" sz="2300" kern="1200">
-                <a:solidFill>
-                  <a:schemeClr val="tx2"/>
-                </a:solidFill>
-                <a:latin typeface="+mn-lt"/>
-                <a:ea typeface="+mn-ea"/>
-                <a:cs typeface="+mn-cs"/>
-              </a:defRPr>
-            </a:lvl2pPr>
-            <a:lvl3pPr marL="822960" indent="-228600" algn="l" rtl="0" eaLnBrk="1" latinLnBrk="0" hangingPunct="1">
-              <a:spcBef>
-                <a:spcPts val="500"/>
-              </a:spcBef>
-              <a:buClr>
-                <a:schemeClr val="bg1">
-                  <a:shade val="50000"/>
-                </a:schemeClr>
-              </a:buClr>
-              <a:buSzPct val="76000"/>
-              <a:buFont typeface="Wingdings 3"/>
-              <a:buChar char=""/>
-              <a:defRPr kumimoji="0" sz="2000" kern="1200">
-                <a:solidFill>
-                  <a:schemeClr val="tx1"/>
-                </a:solidFill>
-                <a:latin typeface="+mn-lt"/>
-                <a:ea typeface="+mn-ea"/>
-                <a:cs typeface="+mn-cs"/>
-              </a:defRPr>
-            </a:lvl3pPr>
-            <a:lvl4pPr marL="1097280" indent="-228600" algn="l" rtl="0" eaLnBrk="1" latinLnBrk="0" hangingPunct="1">
-              <a:spcBef>
-                <a:spcPts val="400"/>
-              </a:spcBef>
-              <a:buClr>
-                <a:schemeClr val="accent2">
-                  <a:shade val="75000"/>
-                </a:schemeClr>
-              </a:buClr>
-              <a:buSzPct val="70000"/>
-              <a:buFont typeface="Wingdings"/>
-              <a:buChar char=""/>
-              <a:defRPr kumimoji="0" sz="1800" kern="1200">
-                <a:solidFill>
-                  <a:schemeClr val="tx1"/>
-                </a:solidFill>
-                <a:latin typeface="+mn-lt"/>
-                <a:ea typeface="+mn-ea"/>
-                <a:cs typeface="+mn-cs"/>
-              </a:defRPr>
-            </a:lvl4pPr>
-            <a:lvl5pPr marL="1371600" indent="-228600" algn="l" rtl="0" eaLnBrk="1" latinLnBrk="0" hangingPunct="1">
-              <a:spcBef>
-                <a:spcPts val="300"/>
-              </a:spcBef>
-              <a:buClr>
-                <a:schemeClr val="accent2"/>
-              </a:buClr>
-              <a:buSzPct val="70000"/>
-              <a:buFont typeface="Wingdings"/>
-              <a:buChar char=""/>
-              <a:defRPr kumimoji="0" sz="1600" kern="1200">
-                <a:solidFill>
-                  <a:schemeClr val="tx1"/>
-                </a:solidFill>
-                <a:latin typeface="+mn-lt"/>
-                <a:ea typeface="+mn-ea"/>
-                <a:cs typeface="+mn-cs"/>
-              </a:defRPr>
-            </a:lvl5pPr>
-            <a:lvl6pPr marL="1645920" indent="-182880" algn="l" rtl="0" eaLnBrk="1" latinLnBrk="0" hangingPunct="1">
-              <a:spcBef>
-                <a:spcPts val="300"/>
-              </a:spcBef>
-              <a:buClr>
-                <a:srgbClr val="9FB8CD">
-                  <a:shade val="75000"/>
-                </a:srgbClr>
-              </a:buClr>
-              <a:buSzPct val="75000"/>
-              <a:buFont typeface="Wingdings 3"/>
-              <a:buChar char=""/>
-              <a:defRPr kumimoji="0" lang="en-US" sz="1600" kern="1200" smtClean="0">
-                <a:solidFill>
-                  <a:schemeClr val="tx1"/>
-                </a:solidFill>
-                <a:latin typeface="+mn-lt"/>
-                <a:ea typeface="+mn-ea"/>
-                <a:cs typeface="+mn-cs"/>
-              </a:defRPr>
-            </a:lvl6pPr>
-            <a:lvl7pPr marL="1828800" indent="-182880" algn="l" rtl="0" eaLnBrk="1" latinLnBrk="0" hangingPunct="1">
-              <a:spcBef>
-                <a:spcPts val="300"/>
-              </a:spcBef>
-              <a:buClr>
-                <a:srgbClr val="727CA3">
-                  <a:shade val="75000"/>
-                </a:srgbClr>
-              </a:buClr>
-              <a:buSzPct val="75000"/>
-              <a:buFont typeface="Wingdings 3"/>
-              <a:buChar char=""/>
-              <a:defRPr kumimoji="0" lang="en-US" sz="1400" kern="1200" smtClean="0">
-                <a:solidFill>
-                  <a:schemeClr val="tx1"/>
-                </a:solidFill>
-                <a:latin typeface="+mn-lt"/>
-                <a:ea typeface="+mn-ea"/>
-                <a:cs typeface="+mn-cs"/>
-              </a:defRPr>
-            </a:lvl7pPr>
-            <a:lvl8pPr marL="2011680" indent="-182880" algn="l" rtl="0" eaLnBrk="1" latinLnBrk="0" hangingPunct="1">
-              <a:spcBef>
-                <a:spcPts val="300"/>
-              </a:spcBef>
-              <a:buClr>
-                <a:prstClr val="white">
-                  <a:shade val="50000"/>
-                </a:prstClr>
-              </a:buClr>
-              <a:buSzPct val="75000"/>
-              <a:buFont typeface="Wingdings 3"/>
-              <a:buChar char=""/>
-              <a:defRPr kumimoji="0" lang="en-US" sz="1400" kern="1200" smtClean="0">
-                <a:solidFill>
-                  <a:schemeClr val="tx1"/>
-                </a:solidFill>
-                <a:latin typeface="+mn-lt"/>
-                <a:ea typeface="+mn-ea"/>
-                <a:cs typeface="+mn-cs"/>
-              </a:defRPr>
-            </a:lvl8pPr>
-            <a:lvl9pPr marL="2194560" indent="-182880" algn="l" rtl="0" eaLnBrk="1" latinLnBrk="0" hangingPunct="1">
-              <a:spcBef>
-                <a:spcPts val="300"/>
-              </a:spcBef>
-              <a:buClr>
-                <a:srgbClr val="9FB8CD"/>
-              </a:buClr>
-              <a:buSzPct val="75000"/>
-              <a:buFont typeface="Wingdings 3"/>
-              <a:buChar char=""/>
-              <a:defRPr kumimoji="0" lang="en-US" sz="1200" kern="1200" smtClean="0">
-                <a:solidFill>
-                  <a:schemeClr val="tx1"/>
-                </a:solidFill>
-                <a:latin typeface="+mn-lt"/>
-                <a:ea typeface="+mn-ea"/>
-                <a:cs typeface="+mn-cs"/>
-              </a:defRPr>
-            </a:lvl9pPr>
-          </a:lstStyle>
-          <a:p>
-            <a:r>
-              <a:rPr lang="pt-BR" dirty="0"/>
-              <a:t>R0 = 0x0ABC</a:t>
-            </a:r>
-          </a:p>
-          <a:p>
-            <a:r>
-              <a:rPr lang="pt-BR" dirty="0"/>
-              <a:t>R1 = 0x0DEF</a:t>
-            </a:r>
-          </a:p>
-          <a:p>
-            <a:r>
-              <a:rPr lang="pt-BR" dirty="0"/>
-              <a:t>R2 = R0 AND R1 = 0x08AC</a:t>
-            </a:r>
-          </a:p>
-          <a:p>
-            <a:r>
-              <a:rPr lang="pt-BR" dirty="0"/>
-              <a:t>R3 = R0 ORR R1 = 0x0FFF</a:t>
-            </a:r>
-          </a:p>
-          <a:p>
-            <a:r>
-              <a:rPr lang="pt-BR" dirty="0"/>
-              <a:t>R4 = R0 EOR R1 = 0x0753</a:t>
-            </a:r>
-          </a:p>
-          <a:p>
-            <a:r>
-              <a:rPr lang="pt-BR" dirty="0"/>
-              <a:t>R5 = R0 ORN R1 = R0 | (~R1) = </a:t>
-            </a:r>
-            <a:r>
-              <a:rPr lang="en-US" dirty="0"/>
-              <a:t>0x00000ABC </a:t>
-            </a:r>
-            <a:r>
-              <a:rPr lang="pt-BR" dirty="0"/>
-              <a:t>| 0xFFFFF210 = </a:t>
-            </a:r>
-            <a:r>
-              <a:rPr lang="en-US" dirty="0"/>
-              <a:t> 0xFFFFFABC</a:t>
-            </a:r>
-            <a:endParaRPr lang="pt-BR" dirty="0"/>
-          </a:p>
-          <a:p>
-            <a:pPr lvl="1"/>
-            <a:r>
-              <a:rPr lang="en-US" dirty="0"/>
-              <a:t>~R1 (32-bit) = 0xFFFFF210</a:t>
-            </a:r>
-            <a:endParaRPr lang="pt-BR" dirty="0"/>
-          </a:p>
-          <a:p>
-            <a:r>
-              <a:rPr lang="pt-BR" dirty="0"/>
-              <a:t>r6 = r0 BIC R1 = R0 &amp; (~R1) =</a:t>
-            </a:r>
-            <a:r>
-              <a:rPr lang="en-US" dirty="0"/>
-              <a:t> 0x00000ABC </a:t>
-            </a:r>
-            <a:r>
-              <a:rPr lang="pt-BR" dirty="0"/>
-              <a:t>&amp; 0xFFFFF210 = 0x00000210</a:t>
-            </a:r>
-            <a:endParaRPr lang="en-US" dirty="0"/>
-          </a:p>
-        </p:txBody>
-      </p:sp>
-      <p:sp>
-        <p:nvSpPr>
-          <p:cNvPr id="6" name="内容占位符 2">
-            <a:extLst>
-              <a:ext uri="{FF2B5EF4-FFF2-40B4-BE49-F238E27FC236}">
-                <a16:creationId xmlns:a16="http://schemas.microsoft.com/office/drawing/2014/main" id="{A362AD7A-A16D-A5D7-1F8E-3C4D2AEFE54C}"/>
-              </a:ext>
-            </a:extLst>
-          </p:cNvPr>
-          <p:cNvSpPr txBox="1">
-            <a:spLocks/>
-          </p:cNvSpPr>
-          <p:nvPr/>
-        </p:nvSpPr>
-        <p:spPr bwMode="auto">
-          <a:xfrm>
-            <a:off x="1603248" y="4724400"/>
-            <a:ext cx="6285109" cy="1828800"/>
-          </a:xfrm>
-          <a:prstGeom prst="rect">
-            <a:avLst/>
-          </a:prstGeom>
-          <a:solidFill>
-            <a:schemeClr val="bg1">
-              <a:lumMod val="85000"/>
-            </a:schemeClr>
-          </a:solidFill>
-          <a:ln/>
-          <a:extLst>
-            <a:ext uri="{FAA26D3D-D897-4be2-8F04-BA451C77F1D7}">
-              <ma14:placeholderFlag xmlns="" xmlns:ma14="http://schemas.microsoft.com/office/mac/drawingml/2011/main" val="1"/>
-            </a:ext>
-            <a:ext uri="{909E8E84-426E-40dd-AFC4-6F175D3DCCD1}">
-              <a14:hiddenFill xmlns="" xmlns:a14="http://schemas.microsoft.com/office/drawing/2010/main">
-                <a:solidFill>
-                  <a:schemeClr val="bg1"/>
-                </a:solidFill>
-              </a14:hiddenFill>
-            </a:ext>
-            <a:ext uri="{91240B29-F687-4f45-9708-019B960494DF}">
-              <a14:hiddenLine xmlns="" xmlns:a14="http://schemas.microsoft.com/office/drawing/2010/main" w="12700">
-                <a:pattFill prst="narHorz">
-                  <a:fgClr>
-                    <a:schemeClr val="tx1"/>
-                  </a:fgClr>
-                  <a:bgClr>
-                    <a:schemeClr val="bg1"/>
-                  </a:bgClr>
-                </a:pattFill>
-                <a:miter lim="800000"/>
-                <a:headEnd/>
-                <a:tailEnd/>
-              </a14:hiddenLine>
-            </a:ext>
-            <a:ext uri="{AF507438-7753-43e0-B8FC-AC1667EBCBE1}">
-              <a14:hiddenEffects xmlns="" xmlns:a14="http://schemas.microsoft.com/office/drawing/2010/main">
-                <a:effectLst>
-                  <a:outerShdw blurRad="63500" dist="38099" dir="2700000" algn="ctr" rotWithShape="0">
-                    <a:schemeClr val="bg2">
-                      <a:alpha val="74998"/>
-                    </a:schemeClr>
-                  </a:outerShdw>
-                </a:effectLst>
-              </a14:hiddenEffects>
-            </a:ext>
-          </a:extLst>
-        </p:spPr>
-        <p:style>
-          <a:lnRef idx="1">
-            <a:schemeClr val="dk1"/>
-          </a:lnRef>
-          <a:fillRef idx="2">
-            <a:schemeClr val="dk1"/>
-          </a:fillRef>
-          <a:effectRef idx="1">
-            <a:schemeClr val="dk1"/>
-          </a:effectRef>
-          <a:fontRef idx="minor">
-            <a:schemeClr val="dk1"/>
-          </a:fontRef>
-        </p:style>
-        <p:txBody>
-          <a:bodyPr vert="horz" wrap="square" lIns="90478" tIns="44445" rIns="90478" bIns="44445" numCol="1" anchor="t" anchorCtr="0" compatLnSpc="1">
-            <a:prstTxWarp prst="textNoShape">
-              <a:avLst/>
-            </a:prstTxWarp>
-          </a:bodyPr>
-          <a:lstStyle>
-            <a:lvl1pPr marL="285750" indent="-285750" algn="l" rtl="0" eaLnBrk="0" fontAlgn="base" hangingPunct="0">
-              <a:lnSpc>
-                <a:spcPct val="90000"/>
-              </a:lnSpc>
-              <a:spcBef>
-                <a:spcPct val="30000"/>
-              </a:spcBef>
-              <a:spcAft>
-                <a:spcPct val="0"/>
-              </a:spcAft>
-              <a:buSzPct val="100000"/>
-              <a:buChar char="•"/>
-              <a:defRPr sz="2400">
-                <a:solidFill>
-                  <a:schemeClr val="tx1"/>
-                </a:solidFill>
-                <a:latin typeface="Gill Sans" charset="0"/>
-                <a:ea typeface="ＭＳ Ｐゴシック" charset="0"/>
-                <a:cs typeface="Gill Sans" charset="0"/>
-              </a:defRPr>
-            </a:lvl1pPr>
-            <a:lvl2pPr marL="685800" indent="-228600" algn="l" rtl="0" eaLnBrk="0" fontAlgn="base" hangingPunct="0">
-              <a:lnSpc>
-                <a:spcPct val="90000"/>
-              </a:lnSpc>
-              <a:spcBef>
-                <a:spcPct val="30000"/>
-              </a:spcBef>
-              <a:spcAft>
-                <a:spcPct val="0"/>
-              </a:spcAft>
-              <a:buSzPct val="100000"/>
-              <a:buChar char="–"/>
-              <a:defRPr sz="2200">
-                <a:solidFill>
-                  <a:schemeClr val="tx1"/>
-                </a:solidFill>
-                <a:latin typeface="Gill Sans" charset="0"/>
-                <a:ea typeface="Gill Sans" charset="0"/>
-                <a:cs typeface="Gill Sans" charset="0"/>
-              </a:defRPr>
-            </a:lvl2pPr>
-            <a:lvl3pPr marL="1143000" indent="-228600" algn="l" rtl="0" eaLnBrk="0" fontAlgn="base" hangingPunct="0">
-              <a:lnSpc>
-                <a:spcPct val="90000"/>
-              </a:lnSpc>
-              <a:spcBef>
-                <a:spcPct val="30000"/>
-              </a:spcBef>
-              <a:spcAft>
-                <a:spcPct val="0"/>
-              </a:spcAft>
-              <a:buSzPct val="100000"/>
-              <a:buChar char="»"/>
-              <a:defRPr sz="2000">
-                <a:solidFill>
-                  <a:schemeClr val="tx1"/>
-                </a:solidFill>
-                <a:latin typeface="Gill Sans" charset="0"/>
-                <a:ea typeface="Gill Sans" charset="0"/>
-                <a:cs typeface="Gill Sans" charset="0"/>
-              </a:defRPr>
-            </a:lvl3pPr>
-            <a:lvl4pPr marL="1543050" indent="-171450" algn="l" rtl="0" eaLnBrk="0" fontAlgn="base" hangingPunct="0">
-              <a:lnSpc>
-                <a:spcPct val="90000"/>
-              </a:lnSpc>
-              <a:spcBef>
-                <a:spcPct val="30000"/>
-              </a:spcBef>
-              <a:spcAft>
-                <a:spcPct val="0"/>
-              </a:spcAft>
-              <a:buSzPct val="100000"/>
-              <a:buChar char="•"/>
-              <a:defRPr sz="2000">
-                <a:solidFill>
-                  <a:schemeClr val="tx1"/>
-                </a:solidFill>
-                <a:latin typeface="Gill Sans" charset="0"/>
-                <a:ea typeface="Gill Sans" charset="0"/>
-                <a:cs typeface="Gill Sans" charset="0"/>
-              </a:defRPr>
-            </a:lvl4pPr>
-            <a:lvl5pPr marL="2000250" indent="-171450" algn="l" rtl="0" eaLnBrk="0" fontAlgn="base" hangingPunct="0">
-              <a:lnSpc>
-                <a:spcPct val="90000"/>
-              </a:lnSpc>
-              <a:spcBef>
-                <a:spcPct val="30000"/>
-              </a:spcBef>
-              <a:spcAft>
-                <a:spcPct val="0"/>
-              </a:spcAft>
-              <a:buSzPct val="100000"/>
-              <a:buChar char="–"/>
-              <a:defRPr sz="2000">
-                <a:solidFill>
-                  <a:schemeClr val="tx1"/>
-                </a:solidFill>
-                <a:latin typeface="Gill Sans" charset="0"/>
-                <a:ea typeface="Gill Sans" charset="0"/>
-                <a:cs typeface="Gill Sans" charset="0"/>
-              </a:defRPr>
-            </a:lvl5pPr>
-            <a:lvl6pPr marL="2457450" indent="-171450" algn="l" rtl="0" eaLnBrk="0" fontAlgn="base" hangingPunct="0">
-              <a:lnSpc>
-                <a:spcPct val="90000"/>
-              </a:lnSpc>
-              <a:spcBef>
-                <a:spcPct val="30000"/>
-              </a:spcBef>
-              <a:spcAft>
-                <a:spcPct val="0"/>
-              </a:spcAft>
-              <a:buSzPct val="100000"/>
-              <a:buChar char="–"/>
-              <a:defRPr sz="2000" b="1">
-                <a:solidFill>
-                  <a:schemeClr val="tx1"/>
-                </a:solidFill>
-                <a:latin typeface="+mn-lt"/>
-              </a:defRPr>
-            </a:lvl6pPr>
-            <a:lvl7pPr marL="2914650" indent="-171450" algn="l" rtl="0" eaLnBrk="0" fontAlgn="base" hangingPunct="0">
-              <a:lnSpc>
-                <a:spcPct val="90000"/>
-              </a:lnSpc>
-              <a:spcBef>
-                <a:spcPct val="30000"/>
-              </a:spcBef>
-              <a:spcAft>
-                <a:spcPct val="0"/>
-              </a:spcAft>
-              <a:buSzPct val="100000"/>
-              <a:buChar char="–"/>
-              <a:defRPr sz="2000" b="1">
-                <a:solidFill>
-                  <a:schemeClr val="tx1"/>
-                </a:solidFill>
-                <a:latin typeface="+mn-lt"/>
-              </a:defRPr>
-            </a:lvl7pPr>
-            <a:lvl8pPr marL="3371850" indent="-171450" algn="l" rtl="0" eaLnBrk="0" fontAlgn="base" hangingPunct="0">
-              <a:lnSpc>
-                <a:spcPct val="90000"/>
-              </a:lnSpc>
-              <a:spcBef>
-                <a:spcPct val="30000"/>
-              </a:spcBef>
-              <a:spcAft>
-                <a:spcPct val="0"/>
-              </a:spcAft>
-              <a:buSzPct val="100000"/>
-              <a:buChar char="–"/>
-              <a:defRPr sz="2000" b="1">
-                <a:solidFill>
-                  <a:schemeClr val="tx1"/>
-                </a:solidFill>
-                <a:latin typeface="+mn-lt"/>
-              </a:defRPr>
-            </a:lvl8pPr>
-            <a:lvl9pPr marL="3829050" indent="-171450" algn="l" rtl="0" eaLnBrk="0" fontAlgn="base" hangingPunct="0">
-              <a:lnSpc>
-                <a:spcPct val="90000"/>
-              </a:lnSpc>
-              <a:spcBef>
-                <a:spcPct val="30000"/>
-              </a:spcBef>
-              <a:spcAft>
-                <a:spcPct val="0"/>
-              </a:spcAft>
-              <a:buSzPct val="100000"/>
-              <a:buChar char="–"/>
-              <a:defRPr sz="2000" b="1">
-                <a:solidFill>
-                  <a:schemeClr val="tx1"/>
-                </a:solidFill>
-                <a:latin typeface="+mn-lt"/>
-              </a:defRPr>
-            </a:lvl9pPr>
-          </a:lstStyle>
-          <a:p>
-            <a:pPr marL="0" indent="0">
-              <a:buNone/>
-            </a:pPr>
-            <a:r>
-              <a:rPr lang="en-US" sz="1600" dirty="0"/>
-              <a:t>AND Rn Operand2 performs bitwise conjunction on Rn and Operand2.</a:t>
-            </a:r>
-          </a:p>
-          <a:p>
-            <a:pPr marL="0" indent="0">
-              <a:buNone/>
-            </a:pPr>
-            <a:r>
-              <a:rPr lang="en-US" sz="1600" dirty="0"/>
-              <a:t>ORR performs bitwise OR on Rn and Operand2.</a:t>
-            </a:r>
-          </a:p>
-          <a:p>
-            <a:pPr marL="0" indent="0">
-              <a:buNone/>
-            </a:pPr>
-            <a:r>
-              <a:rPr lang="en-US" sz="1600" dirty="0"/>
-              <a:t>EOR performs bitwise XOR on Rn and Operand2.</a:t>
-            </a:r>
-          </a:p>
-          <a:p>
-            <a:pPr marL="0" indent="0">
-              <a:buNone/>
-            </a:pPr>
-            <a:r>
-              <a:rPr lang="en-US" sz="1600" dirty="0"/>
-              <a:t>ORN computes Rn OR NOT Operand2, i.e., Rn | (~Rm). </a:t>
-            </a:r>
-          </a:p>
-          <a:p>
-            <a:pPr marL="0" indent="0">
-              <a:buNone/>
-            </a:pPr>
-            <a:r>
-              <a:rPr lang="en-US" sz="1600" dirty="0"/>
-              <a:t>BIC computes Rn AND NOT Operand2, i.e., Rn &amp; (~Rm).</a:t>
-            </a:r>
-          </a:p>
-          <a:p>
-            <a:pPr marL="0" indent="0">
-              <a:buNone/>
-            </a:pPr>
-            <a:r>
-              <a:rPr lang="en-US" sz="1600" dirty="0"/>
-              <a:t>(Hint: convert hex to binary, perform operation, and convert back to hex.)</a:t>
-            </a:r>
-          </a:p>
-        </p:txBody>
-      </p:sp>
-    </p:spTree>
-    <p:extLst>
-      <p:ext uri="{BB962C8B-B14F-4D97-AF65-F5344CB8AC3E}">
-        <p14:creationId xmlns:p14="http://schemas.microsoft.com/office/powerpoint/2010/main" val="3198797166"/>
-      </p:ext>
-    </p:extLst>
-  </p:cSld>
-  <p:clrMapOvr>
-    <a:masterClrMapping/>
-  </p:clrMapOvr>
-</p:sld>
-</file>
-
-<file path=ppt/slides/slide50.xml><?xml version="1.0" encoding="utf-8"?>
+<file path=ppt/slides/slide49.xml><?xml version="1.0" encoding="utf-8"?>
 <p:sld xmlns:a="http://schemas.openxmlformats.org/drawingml/2006/main" xmlns:r="http://schemas.openxmlformats.org/officeDocument/2006/relationships" xmlns:p="http://schemas.openxmlformats.org/presentationml/2006/main">
   <p:cSld>
     <p:spTree>
@@ -30752,7 +29265,7 @@
             <a:fld id="{EA7C8D44-3667-46F6-9772-CC52308E2A7F}" type="slidenum">
               <a:rPr kumimoji="0" lang="en-US" smtClean="0"/>
               <a:pPr/>
-              <a:t>50</a:t>
+              <a:t>49</a:t>
             </a:fld>
             <a:endParaRPr kumimoji="0" lang="en-US" dirty="0"/>
           </a:p>
@@ -32496,7 +31009,783 @@
 </p:sld>
 </file>
 
-<file path=ppt/slides/slide51.xml><?xml version="1.0" encoding="utf-8"?>
+<file path=ppt/slides/slide5.xml><?xml version="1.0" encoding="utf-8"?>
+<p:sld xmlns:a="http://schemas.openxmlformats.org/drawingml/2006/main" xmlns:r="http://schemas.openxmlformats.org/officeDocument/2006/relationships" xmlns:p="http://schemas.openxmlformats.org/presentationml/2006/main">
+  <p:cSld>
+    <p:spTree>
+      <p:nvGrpSpPr>
+        <p:cNvPr id="1" name="">
+          <a:extLst>
+            <a:ext uri="{FF2B5EF4-FFF2-40B4-BE49-F238E27FC236}">
+              <a16:creationId xmlns:a16="http://schemas.microsoft.com/office/drawing/2014/main" id="{5D8FCCDD-F534-1679-8F38-7DE37BF403B8}"/>
+            </a:ext>
+          </a:extLst>
+        </p:cNvPr>
+        <p:cNvGrpSpPr/>
+        <p:nvPr/>
+      </p:nvGrpSpPr>
+      <p:grpSpPr>
+        <a:xfrm>
+          <a:off x="0" y="0"/>
+          <a:ext cx="0" cy="0"/>
+          <a:chOff x="0" y="0"/>
+          <a:chExt cx="0" cy="0"/>
+        </a:xfrm>
+      </p:grpSpPr>
+      <p:sp>
+        <p:nvSpPr>
+          <p:cNvPr id="2" name="Title 1">
+            <a:extLst>
+              <a:ext uri="{FF2B5EF4-FFF2-40B4-BE49-F238E27FC236}">
+                <a16:creationId xmlns:a16="http://schemas.microsoft.com/office/drawing/2014/main" id="{92206104-88B9-F7DD-C7CF-BD3C5A8DDA25}"/>
+              </a:ext>
+            </a:extLst>
+          </p:cNvPr>
+          <p:cNvSpPr>
+            <a:spLocks noGrp="1"/>
+          </p:cNvSpPr>
+          <p:nvPr>
+            <p:ph type="title"/>
+          </p:nvPr>
+        </p:nvSpPr>
+        <p:spPr/>
+        <p:txBody>
+          <a:bodyPr/>
+          <a:lstStyle/>
+          <a:p>
+            <a:r>
+              <a:rPr lang="en-US" dirty="0"/>
+              <a:t>Bit Manipulations ANS</a:t>
+            </a:r>
+          </a:p>
+        </p:txBody>
+      </p:sp>
+      <p:sp>
+        <p:nvSpPr>
+          <p:cNvPr id="3" name="Slide Number Placeholder 2">
+            <a:extLst>
+              <a:ext uri="{FF2B5EF4-FFF2-40B4-BE49-F238E27FC236}">
+                <a16:creationId xmlns:a16="http://schemas.microsoft.com/office/drawing/2014/main" id="{836BEFCD-466A-CEA5-3D17-4D6AE99169C4}"/>
+              </a:ext>
+            </a:extLst>
+          </p:cNvPr>
+          <p:cNvSpPr>
+            <a:spLocks noGrp="1"/>
+          </p:cNvSpPr>
+          <p:nvPr>
+            <p:ph type="sldNum" sz="quarter" idx="12"/>
+          </p:nvPr>
+        </p:nvSpPr>
+        <p:spPr/>
+        <p:txBody>
+          <a:bodyPr/>
+          <a:lstStyle/>
+          <a:p>
+            <a:fld id="{EA7C8D44-3667-46F6-9772-CC52308E2A7F}" type="slidenum">
+              <a:rPr kumimoji="0" lang="en-US" smtClean="0"/>
+              <a:pPr/>
+              <a:t>5</a:t>
+            </a:fld>
+            <a:endParaRPr kumimoji="0" lang="en-US" dirty="0"/>
+          </a:p>
+        </p:txBody>
+      </p:sp>
+      <p:sp>
+        <p:nvSpPr>
+          <p:cNvPr id="4" name="Content Placeholder 3">
+            <a:extLst>
+              <a:ext uri="{FF2B5EF4-FFF2-40B4-BE49-F238E27FC236}">
+                <a16:creationId xmlns:a16="http://schemas.microsoft.com/office/drawing/2014/main" id="{26C07159-9E90-34FC-FD37-707ADD2978CD}"/>
+              </a:ext>
+            </a:extLst>
+          </p:cNvPr>
+          <p:cNvSpPr>
+            <a:spLocks noGrp="1"/>
+          </p:cNvSpPr>
+          <p:nvPr>
+            <p:ph sz="quarter" idx="1"/>
+          </p:nvPr>
+        </p:nvSpPr>
+        <p:spPr>
+          <a:xfrm>
+            <a:off x="457200" y="1219200"/>
+            <a:ext cx="3505200" cy="4557932"/>
+          </a:xfrm>
+        </p:spPr>
+        <p:txBody>
+          <a:bodyPr>
+            <a:normAutofit/>
+          </a:bodyPr>
+          <a:lstStyle/>
+          <a:p>
+            <a:r>
+              <a:rPr lang="pt-BR" dirty="0"/>
+              <a:t>MOV R0, #0x0ABC</a:t>
+            </a:r>
+          </a:p>
+          <a:p>
+            <a:r>
+              <a:rPr lang="pt-BR" dirty="0"/>
+              <a:t>MOV R1, #0x0DEF</a:t>
+            </a:r>
+          </a:p>
+          <a:p>
+            <a:r>
+              <a:rPr lang="pt-BR" dirty="0"/>
+              <a:t>AND R2, R0, R1</a:t>
+            </a:r>
+          </a:p>
+          <a:p>
+            <a:r>
+              <a:rPr lang="pt-BR" dirty="0"/>
+              <a:t>ORR R3, R0, R1</a:t>
+            </a:r>
+          </a:p>
+          <a:p>
+            <a:r>
+              <a:rPr lang="pt-BR" dirty="0"/>
+              <a:t>EOR R4, R0, R1</a:t>
+            </a:r>
+          </a:p>
+          <a:p>
+            <a:r>
+              <a:rPr lang="pt-BR" dirty="0"/>
+              <a:t>ORN R5, R0, R1</a:t>
+            </a:r>
+          </a:p>
+          <a:p>
+            <a:r>
+              <a:rPr lang="pt-BR" dirty="0"/>
+              <a:t>BIC r6, R0, R1</a:t>
+            </a:r>
+            <a:endParaRPr lang="en-US" dirty="0"/>
+          </a:p>
+        </p:txBody>
+      </p:sp>
+      <p:sp>
+        <p:nvSpPr>
+          <p:cNvPr id="5" name="Content Placeholder 3">
+            <a:extLst>
+              <a:ext uri="{FF2B5EF4-FFF2-40B4-BE49-F238E27FC236}">
+                <a16:creationId xmlns:a16="http://schemas.microsoft.com/office/drawing/2014/main" id="{F62F52E9-C913-0809-7AFE-FB9B6517BE16}"/>
+              </a:ext>
+            </a:extLst>
+          </p:cNvPr>
+          <p:cNvSpPr txBox="1">
+            <a:spLocks/>
+          </p:cNvSpPr>
+          <p:nvPr/>
+        </p:nvSpPr>
+        <p:spPr>
+          <a:xfrm>
+            <a:off x="4038600" y="1219200"/>
+            <a:ext cx="4572000" cy="3657600"/>
+          </a:xfrm>
+          <a:prstGeom prst="rect">
+            <a:avLst/>
+          </a:prstGeom>
+        </p:spPr>
+        <p:txBody>
+          <a:bodyPr vert="horz">
+            <a:normAutofit fontScale="77500" lnSpcReduction="20000"/>
+          </a:bodyPr>
+          <a:lstStyle>
+            <a:lvl1pPr marL="274320" indent="-274320" algn="l" rtl="0" eaLnBrk="1" latinLnBrk="0" hangingPunct="1">
+              <a:spcBef>
+                <a:spcPts val="600"/>
+              </a:spcBef>
+              <a:buClr>
+                <a:schemeClr val="accent1"/>
+              </a:buClr>
+              <a:buSzPct val="76000"/>
+              <a:buFont typeface="Wingdings 3"/>
+              <a:buChar char=""/>
+              <a:defRPr kumimoji="0" sz="2600" kern="1200">
+                <a:solidFill>
+                  <a:schemeClr val="tx1"/>
+                </a:solidFill>
+                <a:latin typeface="+mn-lt"/>
+                <a:ea typeface="+mn-ea"/>
+                <a:cs typeface="+mn-cs"/>
+              </a:defRPr>
+            </a:lvl1pPr>
+            <a:lvl2pPr marL="548640" indent="-274320" algn="l" rtl="0" eaLnBrk="1" latinLnBrk="0" hangingPunct="1">
+              <a:spcBef>
+                <a:spcPts val="500"/>
+              </a:spcBef>
+              <a:buClr>
+                <a:schemeClr val="accent2"/>
+              </a:buClr>
+              <a:buSzPct val="76000"/>
+              <a:buFont typeface="Wingdings 3"/>
+              <a:buChar char=""/>
+              <a:defRPr kumimoji="0" sz="2300" kern="1200">
+                <a:solidFill>
+                  <a:schemeClr val="tx2"/>
+                </a:solidFill>
+                <a:latin typeface="+mn-lt"/>
+                <a:ea typeface="+mn-ea"/>
+                <a:cs typeface="+mn-cs"/>
+              </a:defRPr>
+            </a:lvl2pPr>
+            <a:lvl3pPr marL="822960" indent="-228600" algn="l" rtl="0" eaLnBrk="1" latinLnBrk="0" hangingPunct="1">
+              <a:spcBef>
+                <a:spcPts val="500"/>
+              </a:spcBef>
+              <a:buClr>
+                <a:schemeClr val="bg1">
+                  <a:shade val="50000"/>
+                </a:schemeClr>
+              </a:buClr>
+              <a:buSzPct val="76000"/>
+              <a:buFont typeface="Wingdings 3"/>
+              <a:buChar char=""/>
+              <a:defRPr kumimoji="0" sz="2000" kern="1200">
+                <a:solidFill>
+                  <a:schemeClr val="tx1"/>
+                </a:solidFill>
+                <a:latin typeface="+mn-lt"/>
+                <a:ea typeface="+mn-ea"/>
+                <a:cs typeface="+mn-cs"/>
+              </a:defRPr>
+            </a:lvl3pPr>
+            <a:lvl4pPr marL="1097280" indent="-228600" algn="l" rtl="0" eaLnBrk="1" latinLnBrk="0" hangingPunct="1">
+              <a:spcBef>
+                <a:spcPts val="400"/>
+              </a:spcBef>
+              <a:buClr>
+                <a:schemeClr val="accent2">
+                  <a:shade val="75000"/>
+                </a:schemeClr>
+              </a:buClr>
+              <a:buSzPct val="70000"/>
+              <a:buFont typeface="Wingdings"/>
+              <a:buChar char=""/>
+              <a:defRPr kumimoji="0" sz="1800" kern="1200">
+                <a:solidFill>
+                  <a:schemeClr val="tx1"/>
+                </a:solidFill>
+                <a:latin typeface="+mn-lt"/>
+                <a:ea typeface="+mn-ea"/>
+                <a:cs typeface="+mn-cs"/>
+              </a:defRPr>
+            </a:lvl4pPr>
+            <a:lvl5pPr marL="1371600" indent="-228600" algn="l" rtl="0" eaLnBrk="1" latinLnBrk="0" hangingPunct="1">
+              <a:spcBef>
+                <a:spcPts val="300"/>
+              </a:spcBef>
+              <a:buClr>
+                <a:schemeClr val="accent2"/>
+              </a:buClr>
+              <a:buSzPct val="70000"/>
+              <a:buFont typeface="Wingdings"/>
+              <a:buChar char=""/>
+              <a:defRPr kumimoji="0" sz="1600" kern="1200">
+                <a:solidFill>
+                  <a:schemeClr val="tx1"/>
+                </a:solidFill>
+                <a:latin typeface="+mn-lt"/>
+                <a:ea typeface="+mn-ea"/>
+                <a:cs typeface="+mn-cs"/>
+              </a:defRPr>
+            </a:lvl5pPr>
+            <a:lvl6pPr marL="1645920" indent="-182880" algn="l" rtl="0" eaLnBrk="1" latinLnBrk="0" hangingPunct="1">
+              <a:spcBef>
+                <a:spcPts val="300"/>
+              </a:spcBef>
+              <a:buClr>
+                <a:srgbClr val="9FB8CD">
+                  <a:shade val="75000"/>
+                </a:srgbClr>
+              </a:buClr>
+              <a:buSzPct val="75000"/>
+              <a:buFont typeface="Wingdings 3"/>
+              <a:buChar char=""/>
+              <a:defRPr kumimoji="0" lang="en-US" sz="1600" kern="1200" smtClean="0">
+                <a:solidFill>
+                  <a:schemeClr val="tx1"/>
+                </a:solidFill>
+                <a:latin typeface="+mn-lt"/>
+                <a:ea typeface="+mn-ea"/>
+                <a:cs typeface="+mn-cs"/>
+              </a:defRPr>
+            </a:lvl6pPr>
+            <a:lvl7pPr marL="1828800" indent="-182880" algn="l" rtl="0" eaLnBrk="1" latinLnBrk="0" hangingPunct="1">
+              <a:spcBef>
+                <a:spcPts val="300"/>
+              </a:spcBef>
+              <a:buClr>
+                <a:srgbClr val="727CA3">
+                  <a:shade val="75000"/>
+                </a:srgbClr>
+              </a:buClr>
+              <a:buSzPct val="75000"/>
+              <a:buFont typeface="Wingdings 3"/>
+              <a:buChar char=""/>
+              <a:defRPr kumimoji="0" lang="en-US" sz="1400" kern="1200" smtClean="0">
+                <a:solidFill>
+                  <a:schemeClr val="tx1"/>
+                </a:solidFill>
+                <a:latin typeface="+mn-lt"/>
+                <a:ea typeface="+mn-ea"/>
+                <a:cs typeface="+mn-cs"/>
+              </a:defRPr>
+            </a:lvl7pPr>
+            <a:lvl8pPr marL="2011680" indent="-182880" algn="l" rtl="0" eaLnBrk="1" latinLnBrk="0" hangingPunct="1">
+              <a:spcBef>
+                <a:spcPts val="300"/>
+              </a:spcBef>
+              <a:buClr>
+                <a:prstClr val="white">
+                  <a:shade val="50000"/>
+                </a:prstClr>
+              </a:buClr>
+              <a:buSzPct val="75000"/>
+              <a:buFont typeface="Wingdings 3"/>
+              <a:buChar char=""/>
+              <a:defRPr kumimoji="0" lang="en-US" sz="1400" kern="1200" smtClean="0">
+                <a:solidFill>
+                  <a:schemeClr val="tx1"/>
+                </a:solidFill>
+                <a:latin typeface="+mn-lt"/>
+                <a:ea typeface="+mn-ea"/>
+                <a:cs typeface="+mn-cs"/>
+              </a:defRPr>
+            </a:lvl8pPr>
+            <a:lvl9pPr marL="2194560" indent="-182880" algn="l" rtl="0" eaLnBrk="1" latinLnBrk="0" hangingPunct="1">
+              <a:spcBef>
+                <a:spcPts val="300"/>
+              </a:spcBef>
+              <a:buClr>
+                <a:srgbClr val="9FB8CD"/>
+              </a:buClr>
+              <a:buSzPct val="75000"/>
+              <a:buFont typeface="Wingdings 3"/>
+              <a:buChar char=""/>
+              <a:defRPr kumimoji="0" lang="en-US" sz="1200" kern="1200" smtClean="0">
+                <a:solidFill>
+                  <a:schemeClr val="tx1"/>
+                </a:solidFill>
+                <a:latin typeface="+mn-lt"/>
+                <a:ea typeface="+mn-ea"/>
+                <a:cs typeface="+mn-cs"/>
+              </a:defRPr>
+            </a:lvl9pPr>
+          </a:lstStyle>
+          <a:p>
+            <a:r>
+              <a:rPr lang="pt-BR" dirty="0"/>
+              <a:t>R0 = 0x0ABC</a:t>
+            </a:r>
+          </a:p>
+          <a:p>
+            <a:r>
+              <a:rPr lang="pt-BR" dirty="0"/>
+              <a:t>R1 = 0x0DEF</a:t>
+            </a:r>
+          </a:p>
+          <a:p>
+            <a:r>
+              <a:rPr lang="pt-BR" dirty="0"/>
+              <a:t>R2 = R0 AND R1 = 0x08AC</a:t>
+            </a:r>
+          </a:p>
+          <a:p>
+            <a:r>
+              <a:rPr lang="pt-BR" dirty="0"/>
+              <a:t>R3 = R0 ORR R1 = 0x0FFF</a:t>
+            </a:r>
+          </a:p>
+          <a:p>
+            <a:r>
+              <a:rPr lang="pt-BR" dirty="0"/>
+              <a:t>R4 = R0 EOR R1 = 0x0753</a:t>
+            </a:r>
+          </a:p>
+          <a:p>
+            <a:r>
+              <a:rPr lang="pt-BR" dirty="0"/>
+              <a:t>R5 = R0 ORN R1 = R0 | (~R1) = </a:t>
+            </a:r>
+            <a:r>
+              <a:rPr lang="en-US" dirty="0"/>
+              <a:t>0x00000ABC </a:t>
+            </a:r>
+            <a:r>
+              <a:rPr lang="pt-BR" dirty="0"/>
+              <a:t>| 0xFFFFF210 = </a:t>
+            </a:r>
+            <a:r>
+              <a:rPr lang="en-US" dirty="0"/>
+              <a:t> 0xFFFFFABC</a:t>
+            </a:r>
+            <a:endParaRPr lang="pt-BR" dirty="0"/>
+          </a:p>
+          <a:p>
+            <a:pPr lvl="1"/>
+            <a:r>
+              <a:rPr lang="en-US" dirty="0"/>
+              <a:t>~R1 (32-bit) = 0xFFFFF210</a:t>
+            </a:r>
+            <a:endParaRPr lang="pt-BR" dirty="0"/>
+          </a:p>
+          <a:p>
+            <a:r>
+              <a:rPr lang="pt-BR" dirty="0"/>
+              <a:t>r6 = r0 BIC R1 = R0 &amp; (~R1) =</a:t>
+            </a:r>
+            <a:r>
+              <a:rPr lang="en-US" dirty="0"/>
+              <a:t> 0x00000ABC </a:t>
+            </a:r>
+            <a:r>
+              <a:rPr lang="pt-BR" dirty="0"/>
+              <a:t>&amp; 0xFFFFF210 = 0x00000210</a:t>
+            </a:r>
+            <a:endParaRPr lang="en-US" dirty="0"/>
+          </a:p>
+        </p:txBody>
+      </p:sp>
+      <p:sp>
+        <p:nvSpPr>
+          <p:cNvPr id="6" name="内容占位符 2">
+            <a:extLst>
+              <a:ext uri="{FF2B5EF4-FFF2-40B4-BE49-F238E27FC236}">
+                <a16:creationId xmlns:a16="http://schemas.microsoft.com/office/drawing/2014/main" id="{A362AD7A-A16D-A5D7-1F8E-3C4D2AEFE54C}"/>
+              </a:ext>
+            </a:extLst>
+          </p:cNvPr>
+          <p:cNvSpPr txBox="1">
+            <a:spLocks/>
+          </p:cNvSpPr>
+          <p:nvPr/>
+        </p:nvSpPr>
+        <p:spPr bwMode="auto">
+          <a:xfrm>
+            <a:off x="1603248" y="4724400"/>
+            <a:ext cx="6285109" cy="1828800"/>
+          </a:xfrm>
+          <a:prstGeom prst="rect">
+            <a:avLst/>
+          </a:prstGeom>
+          <a:solidFill>
+            <a:schemeClr val="bg1">
+              <a:lumMod val="85000"/>
+            </a:schemeClr>
+          </a:solidFill>
+          <a:ln/>
+          <a:extLst>
+            <a:ext uri="{FAA26D3D-D897-4be2-8F04-BA451C77F1D7}">
+              <ma14:placeholderFlag xmlns:ma14="http://schemas.microsoft.com/office/mac/drawingml/2011/main" xmlns="" val="1"/>
+            </a:ext>
+            <a:ext uri="{909E8E84-426E-40dd-AFC4-6F175D3DCCD1}">
+              <a14:hiddenFill xmlns:a14="http://schemas.microsoft.com/office/drawing/2010/main" xmlns="">
+                <a:solidFill>
+                  <a:schemeClr val="bg1"/>
+                </a:solidFill>
+              </a14:hiddenFill>
+            </a:ext>
+            <a:ext uri="{91240B29-F687-4f45-9708-019B960494DF}">
+              <a14:hiddenLine xmlns:a14="http://schemas.microsoft.com/office/drawing/2010/main" xmlns="" w="12700">
+                <a:pattFill prst="narHorz">
+                  <a:fgClr>
+                    <a:schemeClr val="tx1"/>
+                  </a:fgClr>
+                  <a:bgClr>
+                    <a:schemeClr val="bg1"/>
+                  </a:bgClr>
+                </a:pattFill>
+                <a:miter lim="800000"/>
+                <a:headEnd/>
+                <a:tailEnd/>
+              </a14:hiddenLine>
+            </a:ext>
+            <a:ext uri="{AF507438-7753-43e0-B8FC-AC1667EBCBE1}">
+              <a14:hiddenEffects xmlns:a14="http://schemas.microsoft.com/office/drawing/2010/main" xmlns="">
+                <a:effectLst>
+                  <a:outerShdw blurRad="63500" dist="38099" dir="2700000" algn="ctr" rotWithShape="0">
+                    <a:schemeClr val="bg2">
+                      <a:alpha val="74998"/>
+                    </a:schemeClr>
+                  </a:outerShdw>
+                </a:effectLst>
+              </a14:hiddenEffects>
+            </a:ext>
+          </a:extLst>
+        </p:spPr>
+        <p:style>
+          <a:lnRef idx="1">
+            <a:schemeClr val="dk1"/>
+          </a:lnRef>
+          <a:fillRef idx="2">
+            <a:schemeClr val="dk1"/>
+          </a:fillRef>
+          <a:effectRef idx="1">
+            <a:schemeClr val="dk1"/>
+          </a:effectRef>
+          <a:fontRef idx="minor">
+            <a:schemeClr val="dk1"/>
+          </a:fontRef>
+        </p:style>
+        <p:txBody>
+          <a:bodyPr vert="horz" wrap="square" lIns="90478" tIns="44445" rIns="90478" bIns="44445" numCol="1" anchor="t" anchorCtr="0" compatLnSpc="1">
+            <a:prstTxWarp prst="textNoShape">
+              <a:avLst/>
+            </a:prstTxWarp>
+          </a:bodyPr>
+          <a:lstStyle>
+            <a:lvl1pPr marL="285750" indent="-285750" algn="l" rtl="0" eaLnBrk="0" fontAlgn="base" hangingPunct="0">
+              <a:lnSpc>
+                <a:spcPct val="90000"/>
+              </a:lnSpc>
+              <a:spcBef>
+                <a:spcPct val="30000"/>
+              </a:spcBef>
+              <a:spcAft>
+                <a:spcPct val="0"/>
+              </a:spcAft>
+              <a:buSzPct val="100000"/>
+              <a:buChar char="•"/>
+              <a:defRPr sz="2400">
+                <a:solidFill>
+                  <a:schemeClr val="tx1"/>
+                </a:solidFill>
+                <a:latin typeface="Gill Sans" charset="0"/>
+                <a:ea typeface="ＭＳ Ｐゴシック" charset="0"/>
+                <a:cs typeface="Gill Sans" charset="0"/>
+              </a:defRPr>
+            </a:lvl1pPr>
+            <a:lvl2pPr marL="685800" indent="-228600" algn="l" rtl="0" eaLnBrk="0" fontAlgn="base" hangingPunct="0">
+              <a:lnSpc>
+                <a:spcPct val="90000"/>
+              </a:lnSpc>
+              <a:spcBef>
+                <a:spcPct val="30000"/>
+              </a:spcBef>
+              <a:spcAft>
+                <a:spcPct val="0"/>
+              </a:spcAft>
+              <a:buSzPct val="100000"/>
+              <a:buChar char="–"/>
+              <a:defRPr sz="2200">
+                <a:solidFill>
+                  <a:schemeClr val="tx1"/>
+                </a:solidFill>
+                <a:latin typeface="Gill Sans" charset="0"/>
+                <a:ea typeface="Gill Sans" charset="0"/>
+                <a:cs typeface="Gill Sans" charset="0"/>
+              </a:defRPr>
+            </a:lvl2pPr>
+            <a:lvl3pPr marL="1143000" indent="-228600" algn="l" rtl="0" eaLnBrk="0" fontAlgn="base" hangingPunct="0">
+              <a:lnSpc>
+                <a:spcPct val="90000"/>
+              </a:lnSpc>
+              <a:spcBef>
+                <a:spcPct val="30000"/>
+              </a:spcBef>
+              <a:spcAft>
+                <a:spcPct val="0"/>
+              </a:spcAft>
+              <a:buSzPct val="100000"/>
+              <a:buChar char="»"/>
+              <a:defRPr sz="2000">
+                <a:solidFill>
+                  <a:schemeClr val="tx1"/>
+                </a:solidFill>
+                <a:latin typeface="Gill Sans" charset="0"/>
+                <a:ea typeface="Gill Sans" charset="0"/>
+                <a:cs typeface="Gill Sans" charset="0"/>
+              </a:defRPr>
+            </a:lvl3pPr>
+            <a:lvl4pPr marL="1543050" indent="-171450" algn="l" rtl="0" eaLnBrk="0" fontAlgn="base" hangingPunct="0">
+              <a:lnSpc>
+                <a:spcPct val="90000"/>
+              </a:lnSpc>
+              <a:spcBef>
+                <a:spcPct val="30000"/>
+              </a:spcBef>
+              <a:spcAft>
+                <a:spcPct val="0"/>
+              </a:spcAft>
+              <a:buSzPct val="100000"/>
+              <a:buChar char="•"/>
+              <a:defRPr sz="2000">
+                <a:solidFill>
+                  <a:schemeClr val="tx1"/>
+                </a:solidFill>
+                <a:latin typeface="Gill Sans" charset="0"/>
+                <a:ea typeface="Gill Sans" charset="0"/>
+                <a:cs typeface="Gill Sans" charset="0"/>
+              </a:defRPr>
+            </a:lvl4pPr>
+            <a:lvl5pPr marL="2000250" indent="-171450" algn="l" rtl="0" eaLnBrk="0" fontAlgn="base" hangingPunct="0">
+              <a:lnSpc>
+                <a:spcPct val="90000"/>
+              </a:lnSpc>
+              <a:spcBef>
+                <a:spcPct val="30000"/>
+              </a:spcBef>
+              <a:spcAft>
+                <a:spcPct val="0"/>
+              </a:spcAft>
+              <a:buSzPct val="100000"/>
+              <a:buChar char="–"/>
+              <a:defRPr sz="2000">
+                <a:solidFill>
+                  <a:schemeClr val="tx1"/>
+                </a:solidFill>
+                <a:latin typeface="Gill Sans" charset="0"/>
+                <a:ea typeface="Gill Sans" charset="0"/>
+                <a:cs typeface="Gill Sans" charset="0"/>
+              </a:defRPr>
+            </a:lvl5pPr>
+            <a:lvl6pPr marL="2457450" indent="-171450" algn="l" rtl="0" eaLnBrk="0" fontAlgn="base" hangingPunct="0">
+              <a:lnSpc>
+                <a:spcPct val="90000"/>
+              </a:lnSpc>
+              <a:spcBef>
+                <a:spcPct val="30000"/>
+              </a:spcBef>
+              <a:spcAft>
+                <a:spcPct val="0"/>
+              </a:spcAft>
+              <a:buSzPct val="100000"/>
+              <a:buChar char="–"/>
+              <a:defRPr sz="2000" b="1">
+                <a:solidFill>
+                  <a:schemeClr val="tx1"/>
+                </a:solidFill>
+                <a:latin typeface="+mn-lt"/>
+              </a:defRPr>
+            </a:lvl6pPr>
+            <a:lvl7pPr marL="2914650" indent="-171450" algn="l" rtl="0" eaLnBrk="0" fontAlgn="base" hangingPunct="0">
+              <a:lnSpc>
+                <a:spcPct val="90000"/>
+              </a:lnSpc>
+              <a:spcBef>
+                <a:spcPct val="30000"/>
+              </a:spcBef>
+              <a:spcAft>
+                <a:spcPct val="0"/>
+              </a:spcAft>
+              <a:buSzPct val="100000"/>
+              <a:buChar char="–"/>
+              <a:defRPr sz="2000" b="1">
+                <a:solidFill>
+                  <a:schemeClr val="tx1"/>
+                </a:solidFill>
+                <a:latin typeface="+mn-lt"/>
+              </a:defRPr>
+            </a:lvl7pPr>
+            <a:lvl8pPr marL="3371850" indent="-171450" algn="l" rtl="0" eaLnBrk="0" fontAlgn="base" hangingPunct="0">
+              <a:lnSpc>
+                <a:spcPct val="90000"/>
+              </a:lnSpc>
+              <a:spcBef>
+                <a:spcPct val="30000"/>
+              </a:spcBef>
+              <a:spcAft>
+                <a:spcPct val="0"/>
+              </a:spcAft>
+              <a:buSzPct val="100000"/>
+              <a:buChar char="–"/>
+              <a:defRPr sz="2000" b="1">
+                <a:solidFill>
+                  <a:schemeClr val="tx1"/>
+                </a:solidFill>
+                <a:latin typeface="+mn-lt"/>
+              </a:defRPr>
+            </a:lvl8pPr>
+            <a:lvl9pPr marL="3829050" indent="-171450" algn="l" rtl="0" eaLnBrk="0" fontAlgn="base" hangingPunct="0">
+              <a:lnSpc>
+                <a:spcPct val="90000"/>
+              </a:lnSpc>
+              <a:spcBef>
+                <a:spcPct val="30000"/>
+              </a:spcBef>
+              <a:spcAft>
+                <a:spcPct val="0"/>
+              </a:spcAft>
+              <a:buSzPct val="100000"/>
+              <a:buChar char="–"/>
+              <a:defRPr sz="2000" b="1">
+                <a:solidFill>
+                  <a:schemeClr val="tx1"/>
+                </a:solidFill>
+                <a:latin typeface="+mn-lt"/>
+              </a:defRPr>
+            </a:lvl9pPr>
+          </a:lstStyle>
+          <a:p>
+            <a:pPr marL="0" indent="0">
+              <a:buNone/>
+            </a:pPr>
+            <a:r>
+              <a:rPr lang="en-US" sz="1600" dirty="0"/>
+              <a:t>AND Rn Operand2 performs bitwise conjunction on Rn and Operand2.</a:t>
+            </a:r>
+          </a:p>
+          <a:p>
+            <a:pPr marL="0" indent="0">
+              <a:buNone/>
+            </a:pPr>
+            <a:r>
+              <a:rPr lang="en-US" sz="1600" dirty="0"/>
+              <a:t>ORR performs bitwise OR on Rn and Operand2.</a:t>
+            </a:r>
+          </a:p>
+          <a:p>
+            <a:pPr marL="0" indent="0">
+              <a:buNone/>
+            </a:pPr>
+            <a:r>
+              <a:rPr lang="en-US" sz="1600" dirty="0"/>
+              <a:t>EOR performs bitwise XOR on Rn and Operand2.</a:t>
+            </a:r>
+          </a:p>
+          <a:p>
+            <a:pPr marL="0" indent="0">
+              <a:buNone/>
+            </a:pPr>
+            <a:r>
+              <a:rPr lang="en-US" sz="1600" dirty="0"/>
+              <a:t>ORN computes Rn OR NOT Operand2, i.e., Rn | (~Rm). </a:t>
+            </a:r>
+          </a:p>
+          <a:p>
+            <a:pPr marL="0" indent="0">
+              <a:buNone/>
+            </a:pPr>
+            <a:r>
+              <a:rPr lang="en-US" sz="1600" dirty="0"/>
+              <a:t>BIC computes Rn AND NOT Operand2, i.e., Rn &amp; (~Rm).</a:t>
+            </a:r>
+          </a:p>
+          <a:p>
+            <a:pPr marL="0" indent="0">
+              <a:buNone/>
+            </a:pPr>
+            <a:r>
+              <a:rPr lang="en-US" sz="1600" dirty="0"/>
+              <a:t>(Hint: convert hex to binary, perform operation, and convert back to hex.)</a:t>
+            </a:r>
+          </a:p>
+        </p:txBody>
+      </p:sp>
+    </p:spTree>
+    <p:extLst>
+      <p:ext uri="{BB962C8B-B14F-4D97-AF65-F5344CB8AC3E}">
+        <p14:creationId xmlns:p14="http://schemas.microsoft.com/office/powerpoint/2010/main" val="3198797166"/>
+      </p:ext>
+    </p:extLst>
+  </p:cSld>
+  <p:clrMapOvr>
+    <a:masterClrMapping/>
+  </p:clrMapOvr>
+</p:sld>
+</file>
+
+<file path=ppt/slides/slide50.xml><?xml version="1.0" encoding="utf-8"?>
 <p:sld xmlns:a="http://schemas.openxmlformats.org/drawingml/2006/main" xmlns:r="http://schemas.openxmlformats.org/officeDocument/2006/relationships" xmlns:p="http://schemas.openxmlformats.org/presentationml/2006/main">
   <p:cSld>
     <p:spTree>
@@ -32543,7 +31832,7 @@
             <a:fld id="{EA7C8D44-3667-46F6-9772-CC52308E2A7F}" type="slidenum">
               <a:rPr kumimoji="0" lang="en-US" smtClean="0"/>
               <a:pPr/>
-              <a:t>51</a:t>
+              <a:t>50</a:t>
             </a:fld>
             <a:endParaRPr kumimoji="0" lang="en-US" dirty="0"/>
           </a:p>
@@ -35106,13 +34395,15 @@
             <a:pPr lvl="1"/>
             <a:r>
               <a:rPr lang="en-US" dirty="0"/>
-              <a:t>BIC r12, r12</a:t>
-            </a:r>
-            <a:r>
-              <a:rPr lang="en-US"/>
-              <a:t>, r12</a:t>
-            </a:r>
-            <a:endParaRPr lang="en-US" dirty="0"/>
+              <a:t>BIC r12, r12, r12</a:t>
+            </a:r>
+          </a:p>
+          <a:p>
+            <a:pPr lvl="1"/>
+            <a:r>
+              <a:rPr lang="en-US" dirty="0"/>
+              <a:t>BIC Rd, Rn, Rm   ; Rd = Rn &amp; (~Rm)</a:t>
+            </a:r>
           </a:p>
         </p:txBody>
       </p:sp>
